--- a/ProductManager_InnovativeBusinessSolutionWithLLM_Project/ProductManager_InnovativeBusinessSolutionWithLLM_Submission.pptx
+++ b/ProductManager_InnovativeBusinessSolutionWithLLM_Project/ProductManager_InnovativeBusinessSolutionWithLLM_Submission.pptx
@@ -19,6 +19,12 @@
     <p:sldId id="267" r:id="rId18"/>
     <p:sldId id="268" r:id="rId19"/>
     <p:sldId id="269" r:id="rId20"/>
+    <p:sldId id="270" r:id="rId21"/>
+    <p:sldId id="271" r:id="rId22"/>
+    <p:sldId id="272" r:id="rId23"/>
+    <p:sldId id="273" r:id="rId24"/>
+    <p:sldId id="274" r:id="rId25"/>
+    <p:sldId id="275" r:id="rId26"/>
   </p:sldIdLst>
   <p:sldSz cx="9144000" cy="6858000" type="screen4x3"/>
   <p:notesSz cx="6858000" cy="9144000"/>
@@ -3116,7 +3122,7 @@
             <a:avLst/>
           </a:prstGeom>
           <a:solidFill>
-            <a:srgbClr val="F1F5F9"/>
+            <a:srgbClr val="F4F7FA"/>
           </a:solidFill>
           <a:ln>
             <a:noFill/>
@@ -3159,7 +3165,7 @@
             <a:avLst/>
           </a:prstGeom>
           <a:solidFill>
-            <a:srgbClr val="0E2A47"/>
+            <a:srgbClr val="112E4E"/>
           </a:solidFill>
           <a:ln>
             <a:noFill/>
@@ -3196,7 +3202,7 @@
         <p:spPr>
           <a:xfrm>
             <a:off x="411480" y="164592"/>
-            <a:ext cx="7772400" cy="320040"/>
+            <a:ext cx="8046720" cy="320040"/>
           </a:xfrm>
           <a:prstGeom prst="rect">
             <a:avLst/>
@@ -3214,6 +3220,7 @@
                 <a:solidFill>
                   <a:srgbClr val="FFFFFF"/>
                 </a:solidFill>
+                <a:latin typeface="Calibri"/>
               </a:defRPr>
             </a:pPr>
             <a:r>
@@ -3230,14 +3237,14 @@
         </p:nvSpPr>
         <p:spPr>
           <a:xfrm>
-            <a:off x="7360920" y="128016"/>
-            <a:ext cx="1417320" cy="384048"/>
+            <a:off x="7269481" y="128016"/>
+            <a:ext cx="1508760" cy="384048"/>
           </a:xfrm>
           <a:prstGeom prst="roundRect">
             <a:avLst/>
           </a:prstGeom>
           <a:solidFill>
-            <a:srgbClr val="0D9488"/>
+            <a:srgbClr val="0B8174"/>
           </a:solidFill>
           <a:ln>
             <a:noFill/>
@@ -3266,10 +3273,11 @@
                 <a:solidFill>
                   <a:srgbClr val="FFFFFF"/>
                 </a:solidFill>
-              </a:defRPr>
-            </a:pPr>
-            <a:r>
-              <a:t>01 / 14</a:t>
+                <a:latin typeface="Calibri"/>
+              </a:defRPr>
+            </a:pPr>
+            <a:r>
+              <a:t>01 / 20</a:t>
             </a:r>
           </a:p>
         </p:txBody>
@@ -3282,8 +3290,8 @@
         </p:nvSpPr>
         <p:spPr>
           <a:xfrm>
-            <a:off x="411480" y="868680"/>
-            <a:ext cx="11247120" cy="5257800"/>
+            <a:off x="411480" y="841248"/>
+            <a:ext cx="11247120" cy="5285232"/>
           </a:xfrm>
           <a:prstGeom prst="roundRect">
             <a:avLst/>
@@ -3291,9 +3299,9 @@
           <a:solidFill>
             <a:srgbClr val="FFFFFF"/>
           </a:solidFill>
-          <a:ln w="15240">
+          <a:ln w="13970">
             <a:solidFill>
-              <a:srgbClr val="DBEAFE"/>
+              <a:srgbClr val="D1E4F6"/>
             </a:solidFill>
           </a:ln>
         </p:spPr>
@@ -3327,14 +3335,14 @@
         </p:nvSpPr>
         <p:spPr>
           <a:xfrm>
-            <a:off x="621792" y="1078992"/>
-            <a:ext cx="73152" cy="4434840"/>
-          </a:xfrm>
-          <a:prstGeom prst="rect">
-            <a:avLst/>
-          </a:prstGeom>
-          <a:solidFill>
-            <a:srgbClr val="0D9488"/>
+            <a:off x="621792" y="1051560"/>
+            <a:ext cx="73152" cy="4498848"/>
+          </a:xfrm>
+          <a:prstGeom prst="rect">
+            <a:avLst/>
+          </a:prstGeom>
+          <a:solidFill>
+            <a:srgbClr val="0B8174"/>
           </a:solidFill>
           <a:ln>
             <a:noFill/>
@@ -3370,8 +3378,8 @@
         </p:nvSpPr>
         <p:spPr>
           <a:xfrm>
-            <a:off x="822960" y="1078992"/>
-            <a:ext cx="10515600" cy="731520"/>
+            <a:off x="822960" y="1024128"/>
+            <a:ext cx="10515600" cy="777240"/>
           </a:xfrm>
           <a:prstGeom prst="rect">
             <a:avLst/>
@@ -3385,9 +3393,9 @@
           <a:lstStyle/>
           <a:p>
             <a:pPr>
-              <a:defRPr sz="3400" b="1">
-                <a:solidFill>
-                  <a:srgbClr val="0E2A47"/>
+              <a:defRPr sz="3200" b="1">
+                <a:solidFill>
+                  <a:srgbClr val="112E4E"/>
                 </a:solidFill>
                 <a:latin typeface="Calibri"/>
               </a:defRPr>
@@ -3406,8 +3414,8 @@
         </p:nvSpPr>
         <p:spPr>
           <a:xfrm>
-            <a:off x="960120" y="1828800"/>
-            <a:ext cx="10241280" cy="3200400"/>
+            <a:off x="960120" y="1783080"/>
+            <a:ext cx="10241280" cy="822960"/>
           </a:xfrm>
           <a:prstGeom prst="rect">
             <a:avLst/>
@@ -3422,9 +3430,9 @@
           <a:p>
             <a:pPr>
               <a:spcAft>
-                <a:spcPts val="800"/>
+                <a:spcPts val="1000"/>
               </a:spcAft>
-              <a:defRPr sz="2200">
+              <a:defRPr sz="2100">
                 <a:solidFill>
                   <a:srgbClr val="1F2937"/>
                 </a:solidFill>
@@ -3434,13 +3442,40 @@
             <a:r>
               <a:t>Privacy-First In-Car AI Assistant for Next-Generation Vehicles</a:t>
             </a:r>
-          </a:p>
+            <a:br/>
+            <a:r>
+              <a:t>Scenario A: In-Car AI Assistant Service</a:t>
+            </a:r>
+          </a:p>
+        </p:txBody>
+      </p:sp>
+      <p:sp>
+        <p:nvSpPr>
+          <p:cNvPr id="10" name="TextBox 9"/>
+          <p:cNvSpPr txBox="1"/>
+          <p:nvPr/>
+        </p:nvSpPr>
+        <p:spPr>
+          <a:xfrm>
+            <a:off x="960120" y="2423160"/>
+            <a:ext cx="10241280" cy="3017520"/>
+          </a:xfrm>
+          <a:prstGeom prst="rect">
+            <a:avLst/>
+          </a:prstGeom>
+          <a:noFill/>
+        </p:spPr>
+        <p:txBody>
+          <a:bodyPr wrap="none">
+            <a:spAutoFit/>
+          </a:bodyPr>
+          <a:lstStyle/>
           <a:p>
             <a:pPr>
               <a:spcAft>
-                <a:spcPts val="800"/>
+                <a:spcPts val="500"/>
               </a:spcAft>
-              <a:defRPr sz="2200">
+              <a:defRPr sz="1800">
                 <a:solidFill>
                   <a:srgbClr val="1F2937"/>
                 </a:solidFill>
@@ -3448,21 +3483,37 @@
               </a:defRPr>
             </a:pPr>
             <a:r>
-              <a:t>Scenario A: In-Car AI Assistant Service</a:t>
-            </a:r>
-          </a:p>
-        </p:txBody>
-      </p:sp>
-      <p:sp>
-        <p:nvSpPr>
-          <p:cNvPr id="10" name="Rounded Rectangle 9"/>
+              <a:t>Submission package aligned to plan, operations, and slide outline files.</a:t>
+            </a:r>
+          </a:p>
+          <a:p>
+            <a:pPr>
+              <a:spcAft>
+                <a:spcPts val="500"/>
+              </a:spcAft>
+              <a:defRPr sz="1800">
+                <a:solidFill>
+                  <a:srgbClr val="1F2937"/>
+                </a:solidFill>
+                <a:latin typeface="Calibri"/>
+              </a:defRPr>
+            </a:pPr>
+            <a:r>
+              <a:t>Objective: deliver safe, natural, and trusted in-car AI assistance.</a:t>
+            </a:r>
+          </a:p>
+        </p:txBody>
+      </p:sp>
+      <p:sp>
+        <p:nvSpPr>
+          <p:cNvPr id="11" name="Rounded Rectangle 10"/>
           <p:cNvSpPr/>
           <p:nvPr/>
         </p:nvSpPr>
         <p:spPr>
           <a:xfrm>
-            <a:off x="822960" y="5349240"/>
-            <a:ext cx="10698480" cy="502920"/>
+            <a:off x="822960" y="5358384"/>
+            <a:ext cx="10698480" cy="512064"/>
           </a:xfrm>
           <a:prstGeom prst="roundRect">
             <a:avLst/>
@@ -3493,7 +3544,7 @@
           <a:lstStyle/>
           <a:p>
             <a:pPr algn="ctr">
-              <a:defRPr sz="1300" b="1">
+              <a:defRPr sz="1250" b="1">
                 <a:solidFill>
                   <a:srgbClr val="064E3B"/>
                 </a:solidFill>
@@ -3501,14 +3552,14 @@
               </a:defRPr>
             </a:pPr>
             <a:r>
-              <a:t>Key Takeaway: Build trust and modernize in-car AI safely.</a:t>
-            </a:r>
-          </a:p>
-        </p:txBody>
-      </p:sp>
-      <p:sp>
-        <p:nvSpPr>
-          <p:cNvPr id="11" name="TextBox 10"/>
+              <a:t>Key Takeaway: Executive narrative: modernize UX without compromising safety or privacy.</a:t>
+            </a:r>
+          </a:p>
+        </p:txBody>
+      </p:sp>
+      <p:sp>
+        <p:nvSpPr>
+          <p:cNvPr id="12" name="TextBox 11"/>
           <p:cNvSpPr txBox="1"/>
           <p:nvPr/>
         </p:nvSpPr>
@@ -3575,7 +3626,7 @@
             <a:avLst/>
           </a:prstGeom>
           <a:solidFill>
-            <a:srgbClr val="F1F5F9"/>
+            <a:srgbClr val="F4F7FA"/>
           </a:solidFill>
           <a:ln>
             <a:noFill/>
@@ -3618,7 +3669,7 @@
             <a:avLst/>
           </a:prstGeom>
           <a:solidFill>
-            <a:srgbClr val="0E2A47"/>
+            <a:srgbClr val="112E4E"/>
           </a:solidFill>
           <a:ln>
             <a:noFill/>
@@ -3655,7 +3706,7 @@
         <p:spPr>
           <a:xfrm>
             <a:off x="411480" y="164592"/>
-            <a:ext cx="7772400" cy="320040"/>
+            <a:ext cx="8046720" cy="320040"/>
           </a:xfrm>
           <a:prstGeom prst="rect">
             <a:avLst/>
@@ -3673,6 +3724,7 @@
                 <a:solidFill>
                   <a:srgbClr val="FFFFFF"/>
                 </a:solidFill>
+                <a:latin typeface="Calibri"/>
               </a:defRPr>
             </a:pPr>
             <a:r>
@@ -3689,14 +3741,14 @@
         </p:nvSpPr>
         <p:spPr>
           <a:xfrm>
-            <a:off x="7360920" y="128016"/>
-            <a:ext cx="1417320" cy="384048"/>
+            <a:off x="7269481" y="128016"/>
+            <a:ext cx="1508760" cy="384048"/>
           </a:xfrm>
           <a:prstGeom prst="roundRect">
             <a:avLst/>
           </a:prstGeom>
           <a:solidFill>
-            <a:srgbClr val="0D9488"/>
+            <a:srgbClr val="0B8174"/>
           </a:solidFill>
           <a:ln>
             <a:noFill/>
@@ -3725,10 +3777,11 @@
                 <a:solidFill>
                   <a:srgbClr val="FFFFFF"/>
                 </a:solidFill>
-              </a:defRPr>
-            </a:pPr>
-            <a:r>
-              <a:t>10 / 14</a:t>
+                <a:latin typeface="Calibri"/>
+              </a:defRPr>
+            </a:pPr>
+            <a:r>
+              <a:t>10 / 20</a:t>
             </a:r>
           </a:p>
         </p:txBody>
@@ -3741,8 +3794,8 @@
         </p:nvSpPr>
         <p:spPr>
           <a:xfrm>
-            <a:off x="411480" y="868680"/>
-            <a:ext cx="11247120" cy="5257800"/>
+            <a:off x="411480" y="841248"/>
+            <a:ext cx="11247120" cy="5285232"/>
           </a:xfrm>
           <a:prstGeom prst="roundRect">
             <a:avLst/>
@@ -3750,9 +3803,9 @@
           <a:solidFill>
             <a:srgbClr val="FFFFFF"/>
           </a:solidFill>
-          <a:ln w="15240">
+          <a:ln w="13970">
             <a:solidFill>
-              <a:srgbClr val="DBEAFE"/>
+              <a:srgbClr val="D1E4F6"/>
             </a:solidFill>
           </a:ln>
         </p:spPr>
@@ -3786,14 +3839,14 @@
         </p:nvSpPr>
         <p:spPr>
           <a:xfrm>
-            <a:off x="621792" y="1078992"/>
-            <a:ext cx="73152" cy="4434840"/>
-          </a:xfrm>
-          <a:prstGeom prst="rect">
-            <a:avLst/>
-          </a:prstGeom>
-          <a:solidFill>
-            <a:srgbClr val="0D9488"/>
+            <a:off x="621792" y="1051560"/>
+            <a:ext cx="73152" cy="4498848"/>
+          </a:xfrm>
+          <a:prstGeom prst="rect">
+            <a:avLst/>
+          </a:prstGeom>
+          <a:solidFill>
+            <a:srgbClr val="0B8174"/>
           </a:solidFill>
           <a:ln>
             <a:noFill/>
@@ -3829,8 +3882,8 @@
         </p:nvSpPr>
         <p:spPr>
           <a:xfrm>
-            <a:off x="822960" y="1078992"/>
-            <a:ext cx="10515600" cy="731520"/>
+            <a:off x="822960" y="1024128"/>
+            <a:ext cx="10515600" cy="777240"/>
           </a:xfrm>
           <a:prstGeom prst="rect">
             <a:avLst/>
@@ -3844,15 +3897,15 @@
           <a:lstStyle/>
           <a:p>
             <a:pPr>
-              <a:defRPr sz="3000" b="1">
-                <a:solidFill>
-                  <a:srgbClr val="0E2A47"/>
-                </a:solidFill>
-                <a:latin typeface="Calibri"/>
-              </a:defRPr>
-            </a:pPr>
-            <a:r>
-              <a:t>Risks and Mitigations</a:t>
+              <a:defRPr sz="2900" b="1">
+                <a:solidFill>
+                  <a:srgbClr val="112E4E"/>
+                </a:solidFill>
+                <a:latin typeface="Calibri"/>
+              </a:defRPr>
+            </a:pPr>
+            <a:r>
+              <a:t>System Attributes and Goals</a:t>
             </a:r>
           </a:p>
         </p:txBody>
@@ -3866,7 +3919,7 @@
         <p:spPr>
           <a:xfrm>
             <a:off x="960120" y="1828800"/>
-            <a:ext cx="10241280" cy="3200400"/>
+            <a:ext cx="10241280" cy="3017520"/>
           </a:xfrm>
           <a:prstGeom prst="rect">
             <a:avLst/>
@@ -3881,9 +3934,9 @@
           <a:p>
             <a:pPr>
               <a:spcAft>
-                <a:spcPts val="800"/>
+                <a:spcPts val="500"/>
               </a:spcAft>
-              <a:defRPr sz="2100">
+              <a:defRPr sz="1800">
                 <a:solidFill>
                   <a:srgbClr val="1F2937"/>
                 </a:solidFill>
@@ -3891,15 +3944,15 @@
               </a:defRPr>
             </a:pPr>
             <a:r>
-              <a:t>Risks: distraction, hallucinations, privacy leakage, harmful outputs, cost drift.</a:t>
+              <a:t>Primary goal: safe, natural, useful assistance without higher distraction risk.</a:t>
             </a:r>
           </a:p>
           <a:p>
             <a:pPr>
               <a:spcAft>
-                <a:spcPts val="800"/>
+                <a:spcPts val="500"/>
               </a:spcAft>
-              <a:defRPr sz="2100">
+              <a:defRPr sz="1800">
                 <a:solidFill>
                   <a:srgbClr val="1F2937"/>
                 </a:solidFill>
@@ -3907,15 +3960,15 @@
               </a:defRPr>
             </a:pPr>
             <a:r>
-              <a:t>Mitigations: safety policy gating, confidence thresholds, fallback logic.</a:t>
+              <a:t>Secondary goal: privacy-by-design with transparent consent controls.</a:t>
             </a:r>
           </a:p>
           <a:p>
             <a:pPr>
               <a:spcAft>
-                <a:spcPts val="800"/>
+                <a:spcPts val="500"/>
               </a:spcAft>
-              <a:defRPr sz="2100">
+              <a:defRPr sz="1800">
                 <a:solidFill>
                   <a:srgbClr val="1F2937"/>
                 </a:solidFill>
@@ -3923,7 +3976,23 @@
               </a:defRPr>
             </a:pPr>
             <a:r>
-              <a:t>Governance: redaction, monitoring, incident response playbooks.</a:t>
+              <a:t>Secondary goal: service continuity via edge fallback modes.</a:t>
+            </a:r>
+          </a:p>
+          <a:p>
+            <a:pPr>
+              <a:spcAft>
+                <a:spcPts val="500"/>
+              </a:spcAft>
+              <a:defRPr sz="1800">
+                <a:solidFill>
+                  <a:srgbClr val="1F2937"/>
+                </a:solidFill>
+                <a:latin typeface="Calibri"/>
+              </a:defRPr>
+            </a:pPr>
+            <a:r>
+              <a:t>Architecture detail source: SYSTEM_ARCHITECTURE.md.</a:t>
             </a:r>
           </a:p>
         </p:txBody>
@@ -3936,8 +4005,8 @@
         </p:nvSpPr>
         <p:spPr>
           <a:xfrm>
-            <a:off x="822960" y="5349240"/>
-            <a:ext cx="10698480" cy="502920"/>
+            <a:off x="822960" y="5358384"/>
+            <a:ext cx="10698480" cy="512064"/>
           </a:xfrm>
           <a:prstGeom prst="roundRect">
             <a:avLst/>
@@ -3968,7 +4037,7 @@
           <a:lstStyle/>
           <a:p>
             <a:pPr algn="ctr">
-              <a:defRPr sz="1300" b="1">
+              <a:defRPr sz="1250" b="1">
                 <a:solidFill>
                   <a:srgbClr val="064E3B"/>
                 </a:solidFill>
@@ -3976,7 +4045,7 @@
               </a:defRPr>
             </a:pPr>
             <a:r>
-              <a:t>Key Takeaway: Risk controls are designed into every layer.</a:t>
+              <a:t>Key Takeaway: System goals explicitly balance UX performance and governance requirements.</a:t>
             </a:r>
           </a:p>
         </p:txBody>
@@ -4050,7 +4119,7 @@
             <a:avLst/>
           </a:prstGeom>
           <a:solidFill>
-            <a:srgbClr val="F1F5F9"/>
+            <a:srgbClr val="F4F7FA"/>
           </a:solidFill>
           <a:ln>
             <a:noFill/>
@@ -4093,7 +4162,7 @@
             <a:avLst/>
           </a:prstGeom>
           <a:solidFill>
-            <a:srgbClr val="0E2A47"/>
+            <a:srgbClr val="112E4E"/>
           </a:solidFill>
           <a:ln>
             <a:noFill/>
@@ -4130,7 +4199,7 @@
         <p:spPr>
           <a:xfrm>
             <a:off x="411480" y="164592"/>
-            <a:ext cx="7772400" cy="320040"/>
+            <a:ext cx="8046720" cy="320040"/>
           </a:xfrm>
           <a:prstGeom prst="rect">
             <a:avLst/>
@@ -4148,6 +4217,7 @@
                 <a:solidFill>
                   <a:srgbClr val="FFFFFF"/>
                 </a:solidFill>
+                <a:latin typeface="Calibri"/>
               </a:defRPr>
             </a:pPr>
             <a:r>
@@ -4164,14 +4234,14 @@
         </p:nvSpPr>
         <p:spPr>
           <a:xfrm>
-            <a:off x="7360920" y="128016"/>
-            <a:ext cx="1417320" cy="384048"/>
+            <a:off x="7269481" y="128016"/>
+            <a:ext cx="1508760" cy="384048"/>
           </a:xfrm>
           <a:prstGeom prst="roundRect">
             <a:avLst/>
           </a:prstGeom>
           <a:solidFill>
-            <a:srgbClr val="0D9488"/>
+            <a:srgbClr val="0B8174"/>
           </a:solidFill>
           <a:ln>
             <a:noFill/>
@@ -4200,10 +4270,11 @@
                 <a:solidFill>
                   <a:srgbClr val="FFFFFF"/>
                 </a:solidFill>
-              </a:defRPr>
-            </a:pPr>
-            <a:r>
-              <a:t>11 / 14</a:t>
+                <a:latin typeface="Calibri"/>
+              </a:defRPr>
+            </a:pPr>
+            <a:r>
+              <a:t>11 / 20</a:t>
             </a:r>
           </a:p>
         </p:txBody>
@@ -4216,8 +4287,8 @@
         </p:nvSpPr>
         <p:spPr>
           <a:xfrm>
-            <a:off x="411480" y="868680"/>
-            <a:ext cx="11247120" cy="5257800"/>
+            <a:off x="411480" y="841248"/>
+            <a:ext cx="11247120" cy="5285232"/>
           </a:xfrm>
           <a:prstGeom prst="roundRect">
             <a:avLst/>
@@ -4225,9 +4296,9 @@
           <a:solidFill>
             <a:srgbClr val="FFFFFF"/>
           </a:solidFill>
-          <a:ln w="15240">
+          <a:ln w="13970">
             <a:solidFill>
-              <a:srgbClr val="DBEAFE"/>
+              <a:srgbClr val="D1E4F6"/>
             </a:solidFill>
           </a:ln>
         </p:spPr>
@@ -4261,14 +4332,14 @@
         </p:nvSpPr>
         <p:spPr>
           <a:xfrm>
-            <a:off x="621792" y="1078992"/>
-            <a:ext cx="73152" cy="4434840"/>
-          </a:xfrm>
-          <a:prstGeom prst="rect">
-            <a:avLst/>
-          </a:prstGeom>
-          <a:solidFill>
-            <a:srgbClr val="0D9488"/>
+            <a:off x="621792" y="1051560"/>
+            <a:ext cx="73152" cy="4498848"/>
+          </a:xfrm>
+          <a:prstGeom prst="rect">
+            <a:avLst/>
+          </a:prstGeom>
+          <a:solidFill>
+            <a:srgbClr val="0B8174"/>
           </a:solidFill>
           <a:ln>
             <a:noFill/>
@@ -4304,8 +4375,8 @@
         </p:nvSpPr>
         <p:spPr>
           <a:xfrm>
-            <a:off x="822960" y="1078992"/>
-            <a:ext cx="10515600" cy="731520"/>
+            <a:off x="822960" y="1024128"/>
+            <a:ext cx="10515600" cy="777240"/>
           </a:xfrm>
           <a:prstGeom prst="rect">
             <a:avLst/>
@@ -4319,15 +4390,15 @@
           <a:lstStyle/>
           <a:p>
             <a:pPr>
-              <a:defRPr sz="3000" b="1">
-                <a:solidFill>
-                  <a:srgbClr val="0E2A47"/>
-                </a:solidFill>
-                <a:latin typeface="Calibri"/>
-              </a:defRPr>
-            </a:pPr>
-            <a:r>
-              <a:t>Risk of Inaction</a:t>
+              <a:defRPr sz="2900" b="1">
+                <a:solidFill>
+                  <a:srgbClr val="112E4E"/>
+                </a:solidFill>
+                <a:latin typeface="Calibri"/>
+              </a:defRPr>
+            </a:pPr>
+            <a:r>
+              <a:t>Scalability, Security, and Efficiency</a:t>
             </a:r>
           </a:p>
         </p:txBody>
@@ -4341,7 +4412,7 @@
         <p:spPr>
           <a:xfrm>
             <a:off x="960120" y="1828800"/>
-            <a:ext cx="10241280" cy="3200400"/>
+            <a:ext cx="10241280" cy="3017520"/>
           </a:xfrm>
           <a:prstGeom prst="rect">
             <a:avLst/>
@@ -4356,9 +4427,9 @@
           <a:p>
             <a:pPr>
               <a:spcAft>
-                <a:spcPts val="800"/>
+                <a:spcPts val="500"/>
               </a:spcAft>
-              <a:defRPr sz="2100">
+              <a:defRPr sz="1600">
                 <a:solidFill>
                   <a:srgbClr val="1F2937"/>
                 </a:solidFill>
@@ -4366,15 +4437,15 @@
               </a:defRPr>
             </a:pPr>
             <a:r>
-              <a:t>Product perceived as outdated versus AI-native competitors.</a:t>
+              <a:t>Scalability: regional autoscaling and routing, plus edge caching.</a:t>
             </a:r>
           </a:p>
           <a:p>
             <a:pPr>
               <a:spcAft>
-                <a:spcPts val="800"/>
+                <a:spcPts val="500"/>
               </a:spcAft>
-              <a:defRPr sz="2100">
+              <a:defRPr sz="1600">
                 <a:solidFill>
                   <a:srgbClr val="1F2937"/>
                 </a:solidFill>
@@ -4382,15 +4453,15 @@
               </a:defRPr>
             </a:pPr>
             <a:r>
-              <a:t>Lower appeal in high-value target segment.</a:t>
+              <a:t>Quality ops: event-driven telemetry pipeline for continuous monitoring.</a:t>
             </a:r>
           </a:p>
           <a:p>
             <a:pPr>
               <a:spcAft>
-                <a:spcPts val="800"/>
+                <a:spcPts val="500"/>
               </a:spcAft>
-              <a:defRPr sz="2100">
+              <a:defRPr sz="1600">
                 <a:solidFill>
                   <a:srgbClr val="1F2937"/>
                 </a:solidFill>
@@ -4398,7 +4469,39 @@
               </a:defRPr>
             </a:pPr>
             <a:r>
-              <a:t>Missed opportunity for trusted digital-services differentiation.</a:t>
+              <a:t>Security/privacy: minimization, consent controls, redaction, encryption, audited access.</a:t>
+            </a:r>
+          </a:p>
+          <a:p>
+            <a:pPr>
+              <a:spcAft>
+                <a:spcPts val="500"/>
+              </a:spcAft>
+              <a:defRPr sz="1600">
+                <a:solidFill>
+                  <a:srgbClr val="1F2937"/>
+                </a:solidFill>
+                <a:latin typeface="Calibri"/>
+              </a:defRPr>
+            </a:pPr>
+            <a:r>
+              <a:t>Efficiency: model routing by intent complexity and retrieval constraints.</a:t>
+            </a:r>
+          </a:p>
+          <a:p>
+            <a:pPr>
+              <a:spcAft>
+                <a:spcPts val="500"/>
+              </a:spcAft>
+              <a:defRPr sz="1600">
+                <a:solidFill>
+                  <a:srgbClr val="1F2937"/>
+                </a:solidFill>
+                <a:latin typeface="Calibri"/>
+              </a:defRPr>
+            </a:pPr>
+            <a:r>
+              <a:t>Efficiency: token/cost budgets per session.</a:t>
             </a:r>
           </a:p>
         </p:txBody>
@@ -4411,8 +4514,8 @@
         </p:nvSpPr>
         <p:spPr>
           <a:xfrm>
-            <a:off x="822960" y="5349240"/>
-            <a:ext cx="10698480" cy="502920"/>
+            <a:off x="822960" y="5358384"/>
+            <a:ext cx="10698480" cy="512064"/>
           </a:xfrm>
           <a:prstGeom prst="roundRect">
             <a:avLst/>
@@ -4443,7 +4546,7 @@
           <a:lstStyle/>
           <a:p>
             <a:pPr algn="ctr">
-              <a:defRPr sz="1300" b="1">
+              <a:defRPr sz="1250" b="1">
                 <a:solidFill>
                   <a:srgbClr val="064E3B"/>
                 </a:solidFill>
@@ -4451,7 +4554,7 @@
               </a:defRPr>
             </a:pPr>
             <a:r>
-              <a:t>Key Takeaway: Not acting creates both market and brand risk.</a:t>
+              <a:t>Key Takeaway: Operational design supports scale, trust, and performance-cost discipline.</a:t>
             </a:r>
           </a:p>
         </p:txBody>
@@ -4525,7 +4628,7 @@
             <a:avLst/>
           </a:prstGeom>
           <a:solidFill>
-            <a:srgbClr val="F1F5F9"/>
+            <a:srgbClr val="F4F7FA"/>
           </a:solidFill>
           <a:ln>
             <a:noFill/>
@@ -4568,7 +4671,7 @@
             <a:avLst/>
           </a:prstGeom>
           <a:solidFill>
-            <a:srgbClr val="0E2A47"/>
+            <a:srgbClr val="112E4E"/>
           </a:solidFill>
           <a:ln>
             <a:noFill/>
@@ -4605,7 +4708,7 @@
         <p:spPr>
           <a:xfrm>
             <a:off x="411480" y="164592"/>
-            <a:ext cx="7772400" cy="320040"/>
+            <a:ext cx="8046720" cy="320040"/>
           </a:xfrm>
           <a:prstGeom prst="rect">
             <a:avLst/>
@@ -4623,6 +4726,7 @@
                 <a:solidFill>
                   <a:srgbClr val="FFFFFF"/>
                 </a:solidFill>
+                <a:latin typeface="Calibri"/>
               </a:defRPr>
             </a:pPr>
             <a:r>
@@ -4639,14 +4743,14 @@
         </p:nvSpPr>
         <p:spPr>
           <a:xfrm>
-            <a:off x="7360920" y="128016"/>
-            <a:ext cx="1417320" cy="384048"/>
+            <a:off x="7269481" y="128016"/>
+            <a:ext cx="1508760" cy="384048"/>
           </a:xfrm>
           <a:prstGeom prst="roundRect">
             <a:avLst/>
           </a:prstGeom>
           <a:solidFill>
-            <a:srgbClr val="0D9488"/>
+            <a:srgbClr val="0B8174"/>
           </a:solidFill>
           <a:ln>
             <a:noFill/>
@@ -4675,10 +4779,11 @@
                 <a:solidFill>
                   <a:srgbClr val="FFFFFF"/>
                 </a:solidFill>
-              </a:defRPr>
-            </a:pPr>
-            <a:r>
-              <a:t>12 / 14</a:t>
+                <a:latin typeface="Calibri"/>
+              </a:defRPr>
+            </a:pPr>
+            <a:r>
+              <a:t>12 / 20</a:t>
             </a:r>
           </a:p>
         </p:txBody>
@@ -4691,8 +4796,8 @@
         </p:nvSpPr>
         <p:spPr>
           <a:xfrm>
-            <a:off x="411480" y="868680"/>
-            <a:ext cx="11247120" cy="5257800"/>
+            <a:off x="411480" y="841248"/>
+            <a:ext cx="11247120" cy="5285232"/>
           </a:xfrm>
           <a:prstGeom prst="roundRect">
             <a:avLst/>
@@ -4700,9 +4805,9 @@
           <a:solidFill>
             <a:srgbClr val="FFFFFF"/>
           </a:solidFill>
-          <a:ln w="15240">
+          <a:ln w="13970">
             <a:solidFill>
-              <a:srgbClr val="DBEAFE"/>
+              <a:srgbClr val="D1E4F6"/>
             </a:solidFill>
           </a:ln>
         </p:spPr>
@@ -4736,14 +4841,14 @@
         </p:nvSpPr>
         <p:spPr>
           <a:xfrm>
-            <a:off x="621792" y="1078992"/>
-            <a:ext cx="73152" cy="4434840"/>
-          </a:xfrm>
-          <a:prstGeom prst="rect">
-            <a:avLst/>
-          </a:prstGeom>
-          <a:solidFill>
-            <a:srgbClr val="0D9488"/>
+            <a:off x="621792" y="1051560"/>
+            <a:ext cx="73152" cy="4498848"/>
+          </a:xfrm>
+          <a:prstGeom prst="rect">
+            <a:avLst/>
+          </a:prstGeom>
+          <a:solidFill>
+            <a:srgbClr val="0B8174"/>
           </a:solidFill>
           <a:ln>
             <a:noFill/>
@@ -4779,8 +4884,8 @@
         </p:nvSpPr>
         <p:spPr>
           <a:xfrm>
-            <a:off x="822960" y="1078992"/>
-            <a:ext cx="10515600" cy="731520"/>
+            <a:off x="822960" y="1024128"/>
+            <a:ext cx="10515600" cy="777240"/>
           </a:xfrm>
           <a:prstGeom prst="rect">
             <a:avLst/>
@@ -4794,15 +4899,15 @@
           <a:lstStyle/>
           <a:p>
             <a:pPr>
-              <a:defRPr sz="3000" b="1">
-                <a:solidFill>
-                  <a:srgbClr val="0E2A47"/>
-                </a:solidFill>
-                <a:latin typeface="Calibri"/>
-              </a:defRPr>
-            </a:pPr>
-            <a:r>
-              <a:t>Roadmap and Milestones</a:t>
+              <a:defRPr sz="2900" b="1">
+                <a:solidFill>
+                  <a:srgbClr val="112E4E"/>
+                </a:solidFill>
+                <a:latin typeface="Calibri"/>
+              </a:defRPr>
+            </a:pPr>
+            <a:r>
+              <a:t>Deployment Option and Runtime by Mode</a:t>
             </a:r>
           </a:p>
         </p:txBody>
@@ -4816,7 +4921,7 @@
         <p:spPr>
           <a:xfrm>
             <a:off x="960120" y="1828800"/>
-            <a:ext cx="10241280" cy="3200400"/>
+            <a:ext cx="10241280" cy="3017520"/>
           </a:xfrm>
           <a:prstGeom prst="rect">
             <a:avLst/>
@@ -4831,9 +4936,9 @@
           <a:p>
             <a:pPr>
               <a:spcAft>
-                <a:spcPts val="800"/>
+                <a:spcPts val="500"/>
               </a:spcAft>
-              <a:defRPr sz="2100">
+              <a:defRPr sz="1450">
                 <a:solidFill>
                   <a:srgbClr val="1F2937"/>
                 </a:solidFill>
@@ -4841,15 +4946,15 @@
               </a:defRPr>
             </a:pPr>
             <a:r>
-              <a:t>Phase 1: safety/privacy foundation + core intents.</a:t>
+              <a:t>Recommended deployment: hybrid (edge runtime + private cloud LLM endpoint).</a:t>
             </a:r>
           </a:p>
           <a:p>
             <a:pPr>
               <a:spcAft>
-                <a:spcPts val="800"/>
+                <a:spcPts val="500"/>
               </a:spcAft>
-              <a:defRPr sz="2100">
+              <a:defRPr sz="1450">
                 <a:solidFill>
                   <a:srgbClr val="1F2937"/>
                 </a:solidFill>
@@ -4857,15 +4962,15 @@
               </a:defRPr>
             </a:pPr>
             <a:r>
-              <a:t>Phase 2: personalization and network resilience.</a:t>
+              <a:t>Why hybrid: offline resilience, low-latency safety gating, centralized governance.</a:t>
             </a:r>
           </a:p>
           <a:p>
             <a:pPr>
               <a:spcAft>
-                <a:spcPts val="800"/>
+                <a:spcPts val="500"/>
               </a:spcAft>
-              <a:defRPr sz="2100">
+              <a:defRPr sz="1450">
                 <a:solidFill>
                   <a:srgbClr val="1F2937"/>
                 </a:solidFill>
@@ -4873,7 +4978,71 @@
               </a:defRPr>
             </a:pPr>
             <a:r>
-              <a:t>Phase 3: metro rollout and scale optimization.</a:t>
+              <a:t>Alternative pure cloud: simpler architecture but weaker offline resilience.</a:t>
+            </a:r>
+          </a:p>
+          <a:p>
+            <a:pPr>
+              <a:spcAft>
+                <a:spcPts val="500"/>
+              </a:spcAft>
+              <a:defRPr sz="1450">
+                <a:solidFill>
+                  <a:srgbClr val="1F2937"/>
+                </a:solidFill>
+                <a:latin typeface="Calibri"/>
+              </a:defRPr>
+            </a:pPr>
+            <a:r>
+              <a:t>Alternative pure edge: stronger privacy posture but weaker model quality/update speed.</a:t>
+            </a:r>
+          </a:p>
+          <a:p>
+            <a:pPr>
+              <a:spcAft>
+                <a:spcPts val="500"/>
+              </a:spcAft>
+              <a:defRPr sz="1450">
+                <a:solidFill>
+                  <a:srgbClr val="1F2937"/>
+                </a:solidFill>
+                <a:latin typeface="Calibri"/>
+              </a:defRPr>
+            </a:pPr>
+            <a:r>
+              <a:t>Driving mode config: temperature 0.1, max tokens 120, top-p 0.8.</a:t>
+            </a:r>
+          </a:p>
+          <a:p>
+            <a:pPr>
+              <a:spcAft>
+                <a:spcPts val="500"/>
+              </a:spcAft>
+              <a:defRPr sz="1450">
+                <a:solidFill>
+                  <a:srgbClr val="1F2937"/>
+                </a:solidFill>
+                <a:latin typeface="Calibri"/>
+              </a:defRPr>
+            </a:pPr>
+            <a:r>
+              <a:t>Parked mode config: temperature 0.3, max tokens 300, top-p 0.9.</a:t>
+            </a:r>
+          </a:p>
+          <a:p>
+            <a:pPr>
+              <a:spcAft>
+                <a:spcPts val="500"/>
+              </a:spcAft>
+              <a:defRPr sz="1450">
+                <a:solidFill>
+                  <a:srgbClr val="1F2937"/>
+                </a:solidFill>
+                <a:latin typeface="Calibri"/>
+              </a:defRPr>
+            </a:pPr>
+            <a:r>
+              <a:t>Message summarization: temperature 0.1, max tokens 80.</a:t>
             </a:r>
           </a:p>
         </p:txBody>
@@ -4886,8 +5055,8 @@
         </p:nvSpPr>
         <p:spPr>
           <a:xfrm>
-            <a:off x="822960" y="5349240"/>
-            <a:ext cx="10698480" cy="502920"/>
+            <a:off x="822960" y="5358384"/>
+            <a:ext cx="10698480" cy="512064"/>
           </a:xfrm>
           <a:prstGeom prst="roundRect">
             <a:avLst/>
@@ -4918,7 +5087,7 @@
           <a:lstStyle/>
           <a:p>
             <a:pPr algn="ctr">
-              <a:defRPr sz="1300" b="1">
+              <a:defRPr sz="1250" b="1">
                 <a:solidFill>
                   <a:srgbClr val="064E3B"/>
                 </a:solidFill>
@@ -4926,7 +5095,7 @@
               </a:defRPr>
             </a:pPr>
             <a:r>
-              <a:t>Key Takeaway: Sequence work to de-risk launch quality.</a:t>
+              <a:t>Key Takeaway: Runtime parameters are tuned for safety in motion and richer parked interactions.</a:t>
             </a:r>
           </a:p>
         </p:txBody>
@@ -5000,7 +5169,7 @@
             <a:avLst/>
           </a:prstGeom>
           <a:solidFill>
-            <a:srgbClr val="F1F5F9"/>
+            <a:srgbClr val="F4F7FA"/>
           </a:solidFill>
           <a:ln>
             <a:noFill/>
@@ -5043,7 +5212,7 @@
             <a:avLst/>
           </a:prstGeom>
           <a:solidFill>
-            <a:srgbClr val="0E2A47"/>
+            <a:srgbClr val="112E4E"/>
           </a:solidFill>
           <a:ln>
             <a:noFill/>
@@ -5080,7 +5249,7 @@
         <p:spPr>
           <a:xfrm>
             <a:off x="411480" y="164592"/>
-            <a:ext cx="7772400" cy="320040"/>
+            <a:ext cx="8046720" cy="320040"/>
           </a:xfrm>
           <a:prstGeom prst="rect">
             <a:avLst/>
@@ -5098,6 +5267,7 @@
                 <a:solidFill>
                   <a:srgbClr val="FFFFFF"/>
                 </a:solidFill>
+                <a:latin typeface="Calibri"/>
               </a:defRPr>
             </a:pPr>
             <a:r>
@@ -5114,14 +5284,14 @@
         </p:nvSpPr>
         <p:spPr>
           <a:xfrm>
-            <a:off x="7360920" y="128016"/>
-            <a:ext cx="1417320" cy="384048"/>
+            <a:off x="7269481" y="128016"/>
+            <a:ext cx="1508760" cy="384048"/>
           </a:xfrm>
           <a:prstGeom prst="roundRect">
             <a:avLst/>
           </a:prstGeom>
           <a:solidFill>
-            <a:srgbClr val="0D9488"/>
+            <a:srgbClr val="0B8174"/>
           </a:solidFill>
           <a:ln>
             <a:noFill/>
@@ -5150,10 +5320,11 @@
                 <a:solidFill>
                   <a:srgbClr val="FFFFFF"/>
                 </a:solidFill>
-              </a:defRPr>
-            </a:pPr>
-            <a:r>
-              <a:t>13 / 14</a:t>
+                <a:latin typeface="Calibri"/>
+              </a:defRPr>
+            </a:pPr>
+            <a:r>
+              <a:t>13 / 20</a:t>
             </a:r>
           </a:p>
         </p:txBody>
@@ -5166,8 +5337,8 @@
         </p:nvSpPr>
         <p:spPr>
           <a:xfrm>
-            <a:off x="411480" y="868680"/>
-            <a:ext cx="11247120" cy="5257800"/>
+            <a:off x="411480" y="841248"/>
+            <a:ext cx="11247120" cy="5285232"/>
           </a:xfrm>
           <a:prstGeom prst="roundRect">
             <a:avLst/>
@@ -5175,9 +5346,9 @@
           <a:solidFill>
             <a:srgbClr val="FFFFFF"/>
           </a:solidFill>
-          <a:ln w="15240">
+          <a:ln w="13970">
             <a:solidFill>
-              <a:srgbClr val="DBEAFE"/>
+              <a:srgbClr val="D1E4F6"/>
             </a:solidFill>
           </a:ln>
         </p:spPr>
@@ -5211,14 +5382,14 @@
         </p:nvSpPr>
         <p:spPr>
           <a:xfrm>
-            <a:off x="621792" y="1078992"/>
-            <a:ext cx="73152" cy="4434840"/>
-          </a:xfrm>
-          <a:prstGeom prst="rect">
-            <a:avLst/>
-          </a:prstGeom>
-          <a:solidFill>
-            <a:srgbClr val="0D9488"/>
+            <a:off x="621792" y="1051560"/>
+            <a:ext cx="73152" cy="4498848"/>
+          </a:xfrm>
+          <a:prstGeom prst="rect">
+            <a:avLst/>
+          </a:prstGeom>
+          <a:solidFill>
+            <a:srgbClr val="0B8174"/>
           </a:solidFill>
           <a:ln>
             <a:noFill/>
@@ -5254,8 +5425,8 @@
         </p:nvSpPr>
         <p:spPr>
           <a:xfrm>
-            <a:off x="822960" y="1078992"/>
-            <a:ext cx="10515600" cy="731520"/>
+            <a:off x="822960" y="1024128"/>
+            <a:ext cx="10515600" cy="777240"/>
           </a:xfrm>
           <a:prstGeom prst="rect">
             <a:avLst/>
@@ -5269,15 +5440,15 @@
           <a:lstStyle/>
           <a:p>
             <a:pPr>
-              <a:defRPr sz="3000" b="1">
-                <a:solidFill>
-                  <a:srgbClr val="0E2A47"/>
-                </a:solidFill>
-                <a:latin typeface="Calibri"/>
-              </a:defRPr>
-            </a:pPr>
-            <a:r>
-              <a:t>Success Metrics</a:t>
+              <a:defRPr sz="2900" b="1">
+                <a:solidFill>
+                  <a:srgbClr val="112E4E"/>
+                </a:solidFill>
+                <a:latin typeface="Calibri"/>
+              </a:defRPr>
+            </a:pPr>
+            <a:r>
+              <a:t>Retrieval, Privacy, and Security Settings</a:t>
             </a:r>
           </a:p>
         </p:txBody>
@@ -5291,7 +5462,7 @@
         <p:spPr>
           <a:xfrm>
             <a:off x="960120" y="1828800"/>
-            <a:ext cx="10241280" cy="3200400"/>
+            <a:ext cx="10241280" cy="3017520"/>
           </a:xfrm>
           <a:prstGeom prst="rect">
             <a:avLst/>
@@ -5306,9 +5477,9 @@
           <a:p>
             <a:pPr>
               <a:spcAft>
-                <a:spcPts val="800"/>
+                <a:spcPts val="500"/>
               </a:spcAft>
-              <a:defRPr sz="2100">
+              <a:defRPr sz="1600">
                 <a:solidFill>
                   <a:srgbClr val="1F2937"/>
                 </a:solidFill>
@@ -5316,15 +5487,15 @@
               </a:defRPr>
             </a:pPr>
             <a:r>
-              <a:t>Voice task success rate.</a:t>
+              <a:t>Retrieval: domain-optimized embeddings, 300-500 token chunks, 10% overlap.</a:t>
             </a:r>
           </a:p>
           <a:p>
             <a:pPr>
               <a:spcAft>
-                <a:spcPts val="800"/>
+                <a:spcPts val="500"/>
               </a:spcAft>
-              <a:defRPr sz="2100">
+              <a:defRPr sz="1600">
                 <a:solidFill>
                   <a:srgbClr val="1F2937"/>
                 </a:solidFill>
@@ -5332,15 +5503,15 @@
               </a:defRPr>
             </a:pPr>
             <a:r>
-              <a:t>Interaction satisfaction score.</a:t>
+              <a:t>Top-k retrieval: 3-5 sources with relevance/policy confidence threshold.</a:t>
             </a:r>
           </a:p>
           <a:p>
             <a:pPr>
               <a:spcAft>
-                <a:spcPts val="800"/>
+                <a:spcPts val="500"/>
               </a:spcAft>
-              <a:defRPr sz="2100">
+              <a:defRPr sz="1600">
                 <a:solidFill>
                   <a:srgbClr val="1F2937"/>
                 </a:solidFill>
@@ -5348,15 +5519,15 @@
               </a:defRPr>
             </a:pPr>
             <a:r>
-              <a:t>Time-to-complete key tasks.</a:t>
+              <a:t>PII masking before prompts (contacts, location traces, account identifiers).</a:t>
             </a:r>
           </a:p>
           <a:p>
             <a:pPr>
               <a:spcAft>
-                <a:spcPts val="800"/>
+                <a:spcPts val="500"/>
               </a:spcAft>
-              <a:defRPr sz="2100">
+              <a:defRPr sz="1600">
                 <a:solidFill>
                   <a:srgbClr val="1F2937"/>
                 </a:solidFill>
@@ -5364,15 +5535,15 @@
               </a:defRPr>
             </a:pPr>
             <a:r>
-              <a:t>Safety/policy violation rate.</a:t>
+              <a:t>Consent-gated personalization and redacted prompt/output logging.</a:t>
             </a:r>
           </a:p>
           <a:p>
             <a:pPr>
               <a:spcAft>
-                <a:spcPts val="800"/>
+                <a:spcPts val="500"/>
               </a:spcAft>
-              <a:defRPr sz="2100">
+              <a:defRPr sz="1600">
                 <a:solidFill>
                   <a:srgbClr val="1F2937"/>
                 </a:solidFill>
@@ -5380,7 +5551,7 @@
               </a:defRPr>
             </a:pPr>
             <a:r>
-              <a:t>Offline fallback success rate.</a:t>
+              <a:t>Region-aware retention and deletion policies.</a:t>
             </a:r>
           </a:p>
         </p:txBody>
@@ -5393,8 +5564,8 @@
         </p:nvSpPr>
         <p:spPr>
           <a:xfrm>
-            <a:off x="822960" y="5349240"/>
-            <a:ext cx="10698480" cy="502920"/>
+            <a:off x="822960" y="5358384"/>
+            <a:ext cx="10698480" cy="512064"/>
           </a:xfrm>
           <a:prstGeom prst="roundRect">
             <a:avLst/>
@@ -5425,7 +5596,7 @@
           <a:lstStyle/>
           <a:p>
             <a:pPr algn="ctr">
-              <a:defRPr sz="1300" b="1">
+              <a:defRPr sz="1250" b="1">
                 <a:solidFill>
                   <a:srgbClr val="064E3B"/>
                 </a:solidFill>
@@ -5433,7 +5604,7 @@
               </a:defRPr>
             </a:pPr>
             <a:r>
-              <a:t>Key Takeaway: Measure utility, trust, and operational reliability.</a:t>
+              <a:t>Key Takeaway: RAG and privacy controls reduce hallucination and data exposure risks.</a:t>
             </a:r>
           </a:p>
         </p:txBody>
@@ -5507,7 +5678,7 @@
             <a:avLst/>
           </a:prstGeom>
           <a:solidFill>
-            <a:srgbClr val="F1F5F9"/>
+            <a:srgbClr val="F4F7FA"/>
           </a:solidFill>
           <a:ln>
             <a:noFill/>
@@ -5550,7 +5721,7 @@
             <a:avLst/>
           </a:prstGeom>
           <a:solidFill>
-            <a:srgbClr val="0E2A47"/>
+            <a:srgbClr val="112E4E"/>
           </a:solidFill>
           <a:ln>
             <a:noFill/>
@@ -5587,7 +5758,7 @@
         <p:spPr>
           <a:xfrm>
             <a:off x="411480" y="164592"/>
-            <a:ext cx="7772400" cy="320040"/>
+            <a:ext cx="8046720" cy="320040"/>
           </a:xfrm>
           <a:prstGeom prst="rect">
             <a:avLst/>
@@ -5605,6 +5776,7 @@
                 <a:solidFill>
                   <a:srgbClr val="FFFFFF"/>
                 </a:solidFill>
+                <a:latin typeface="Calibri"/>
               </a:defRPr>
             </a:pPr>
             <a:r>
@@ -5621,14 +5793,14 @@
         </p:nvSpPr>
         <p:spPr>
           <a:xfrm>
-            <a:off x="7360920" y="128016"/>
-            <a:ext cx="1417320" cy="384048"/>
+            <a:off x="7269481" y="128016"/>
+            <a:ext cx="1508760" cy="384048"/>
           </a:xfrm>
           <a:prstGeom prst="roundRect">
             <a:avLst/>
           </a:prstGeom>
           <a:solidFill>
-            <a:srgbClr val="0D9488"/>
+            <a:srgbClr val="0B8174"/>
           </a:solidFill>
           <a:ln>
             <a:noFill/>
@@ -5657,10 +5829,11 @@
                 <a:solidFill>
                   <a:srgbClr val="FFFFFF"/>
                 </a:solidFill>
-              </a:defRPr>
-            </a:pPr>
-            <a:r>
-              <a:t>14 / 14</a:t>
+                <a:latin typeface="Calibri"/>
+              </a:defRPr>
+            </a:pPr>
+            <a:r>
+              <a:t>14 / 20</a:t>
             </a:r>
           </a:p>
         </p:txBody>
@@ -5673,8 +5846,8 @@
         </p:nvSpPr>
         <p:spPr>
           <a:xfrm>
-            <a:off x="411480" y="868680"/>
-            <a:ext cx="11247120" cy="5257800"/>
+            <a:off x="411480" y="841248"/>
+            <a:ext cx="11247120" cy="5285232"/>
           </a:xfrm>
           <a:prstGeom prst="roundRect">
             <a:avLst/>
@@ -5682,9 +5855,9 @@
           <a:solidFill>
             <a:srgbClr val="FFFFFF"/>
           </a:solidFill>
-          <a:ln w="15240">
+          <a:ln w="13970">
             <a:solidFill>
-              <a:srgbClr val="DBEAFE"/>
+              <a:srgbClr val="D1E4F6"/>
             </a:solidFill>
           </a:ln>
         </p:spPr>
@@ -5718,14 +5891,14 @@
         </p:nvSpPr>
         <p:spPr>
           <a:xfrm>
-            <a:off x="621792" y="1078992"/>
-            <a:ext cx="73152" cy="4434840"/>
-          </a:xfrm>
-          <a:prstGeom prst="rect">
-            <a:avLst/>
-          </a:prstGeom>
-          <a:solidFill>
-            <a:srgbClr val="0D9488"/>
+            <a:off x="621792" y="1051560"/>
+            <a:ext cx="73152" cy="4498848"/>
+          </a:xfrm>
+          <a:prstGeom prst="rect">
+            <a:avLst/>
+          </a:prstGeom>
+          <a:solidFill>
+            <a:srgbClr val="0B8174"/>
           </a:solidFill>
           <a:ln>
             <a:noFill/>
@@ -5761,8 +5934,8 @@
         </p:nvSpPr>
         <p:spPr>
           <a:xfrm>
-            <a:off x="822960" y="1078992"/>
-            <a:ext cx="10515600" cy="731520"/>
+            <a:off x="822960" y="1024128"/>
+            <a:ext cx="10515600" cy="777240"/>
           </a:xfrm>
           <a:prstGeom prst="rect">
             <a:avLst/>
@@ -5776,15 +5949,15 @@
           <a:lstStyle/>
           <a:p>
             <a:pPr>
-              <a:defRPr sz="3000" b="1">
-                <a:solidFill>
-                  <a:srgbClr val="0E2A47"/>
-                </a:solidFill>
-                <a:latin typeface="Calibri"/>
-              </a:defRPr>
-            </a:pPr>
-            <a:r>
-              <a:t>Ask and Next Steps</a:t>
+              <a:defRPr sz="2900" b="1">
+                <a:solidFill>
+                  <a:srgbClr val="112E4E"/>
+                </a:solidFill>
+                <a:latin typeface="Calibri"/>
+              </a:defRPr>
+            </a:pPr>
+            <a:r>
+              <a:t>Fine-Tuning and Data Strategy</a:t>
             </a:r>
           </a:p>
         </p:txBody>
@@ -5798,7 +5971,7 @@
         <p:spPr>
           <a:xfrm>
             <a:off x="960120" y="1828800"/>
-            <a:ext cx="10241280" cy="3200400"/>
+            <a:ext cx="10241280" cy="3017520"/>
           </a:xfrm>
           <a:prstGeom prst="rect">
             <a:avLst/>
@@ -5813,9 +5986,9 @@
           <a:p>
             <a:pPr>
               <a:spcAft>
-                <a:spcPts val="800"/>
+                <a:spcPts val="500"/>
               </a:spcAft>
-              <a:defRPr sz="2100">
+              <a:defRPr sz="1800">
                 <a:solidFill>
                   <a:srgbClr val="1F2937"/>
                 </a:solidFill>
@@ -5823,15 +5996,15 @@
               </a:defRPr>
             </a:pPr>
             <a:r>
-              <a:t>Approve pilot scope and budget.</a:t>
+              <a:t>Phase 1: no fine-tuning, use prompt engineering + policy templates + RAG.</a:t>
             </a:r>
           </a:p>
           <a:p>
             <a:pPr>
               <a:spcAft>
-                <a:spcPts val="800"/>
+                <a:spcPts val="500"/>
               </a:spcAft>
-              <a:defRPr sz="2100">
+              <a:defRPr sz="1800">
                 <a:solidFill>
                   <a:srgbClr val="1F2937"/>
                 </a:solidFill>
@@ -5839,15 +6012,15 @@
               </a:defRPr>
             </a:pPr>
             <a:r>
-              <a:t>Confirm safety/privacy governance and legal guardrails.</a:t>
+              <a:t>Phase 2: create supervised dataset from anonymized interactions/corrections.</a:t>
             </a:r>
           </a:p>
           <a:p>
             <a:pPr>
               <a:spcAft>
-                <a:spcPts val="800"/>
+                <a:spcPts val="500"/>
               </a:spcAft>
-              <a:defRPr sz="2100">
+              <a:defRPr sz="1800">
                 <a:solidFill>
                   <a:srgbClr val="1F2937"/>
                 </a:solidFill>
@@ -5855,7 +6028,23 @@
               </a:defRPr>
             </a:pPr>
             <a:r>
-              <a:t>Launch phase-1 pilot in limited geography with go/no-go gates.</a:t>
+              <a:t>Phase 2: evaluate lightweight fine-tuning for style and intent robustness.</a:t>
+            </a:r>
+          </a:p>
+          <a:p>
+            <a:pPr>
+              <a:spcAft>
+                <a:spcPts val="500"/>
+              </a:spcAft>
+              <a:defRPr sz="1800">
+                <a:solidFill>
+                  <a:srgbClr val="1F2937"/>
+                </a:solidFill>
+                <a:latin typeface="Calibri"/>
+              </a:defRPr>
+            </a:pPr>
+            <a:r>
+              <a:t>Phase 3: continuous evaluation and selective retraining for drift management.</a:t>
             </a:r>
           </a:p>
         </p:txBody>
@@ -5868,8 +6057,8 @@
         </p:nvSpPr>
         <p:spPr>
           <a:xfrm>
-            <a:off x="822960" y="5349240"/>
-            <a:ext cx="10698480" cy="502920"/>
+            <a:off x="822960" y="5358384"/>
+            <a:ext cx="10698480" cy="512064"/>
           </a:xfrm>
           <a:prstGeom prst="roundRect">
             <a:avLst/>
@@ -5900,7 +6089,7 @@
           <a:lstStyle/>
           <a:p>
             <a:pPr algn="ctr">
-              <a:defRPr sz="1300" b="1">
+              <a:defRPr sz="1250" b="1">
                 <a:solidFill>
                   <a:srgbClr val="064E3B"/>
                 </a:solidFill>
@@ -5908,7 +6097,2504 @@
               </a:defRPr>
             </a:pPr>
             <a:r>
-              <a:t>Key Takeaway: Greenlight pilot execution with governance.</a:t>
+              <a:t>Key Takeaway: Adopt a staged learning strategy to control risk and improve quality over time.</a:t>
+            </a:r>
+          </a:p>
+        </p:txBody>
+      </p:sp>
+      <p:sp>
+        <p:nvSpPr>
+          <p:cNvPr id="11" name="TextBox 10"/>
+          <p:cNvSpPr txBox="1"/>
+          <p:nvPr/>
+        </p:nvSpPr>
+        <p:spPr>
+          <a:xfrm>
+            <a:off x="411480" y="6446520"/>
+            <a:ext cx="11247120" cy="228600"/>
+          </a:xfrm>
+          <a:prstGeom prst="rect">
+            <a:avLst/>
+          </a:prstGeom>
+          <a:noFill/>
+        </p:spPr>
+        <p:txBody>
+          <a:bodyPr wrap="none">
+            <a:spAutoFit/>
+          </a:bodyPr>
+          <a:lstStyle/>
+          <a:p>
+            <a:pPr algn="r">
+              <a:defRPr sz="1000" b="1">
+                <a:solidFill>
+                  <a:srgbClr val="64748B"/>
+                </a:solidFill>
+                <a:latin typeface="Calibri"/>
+              </a:defRPr>
+            </a:pPr>
+            <a:r>
+              <a:t>Created By : ZIA UL MUSTAFA</a:t>
+            </a:r>
+          </a:p>
+        </p:txBody>
+      </p:sp>
+    </p:spTree>
+  </p:cSld>
+  <p:clrMapOvr>
+    <a:masterClrMapping/>
+  </p:clrMapOvr>
+</p:sld>
+</file>
+
+<file path=ppt/slides/slide15.xml><?xml version="1.0" encoding="utf-8"?>
+<p:sld xmlns:a="http://schemas.openxmlformats.org/drawingml/2006/main" xmlns:p="http://schemas.openxmlformats.org/presentationml/2006/main" xmlns:r="http://schemas.openxmlformats.org/officeDocument/2006/relationships">
+  <p:cSld>
+    <p:spTree>
+      <p:nvGrpSpPr>
+        <p:cNvPr id="1" name=""/>
+        <p:cNvGrpSpPr/>
+        <p:nvPr/>
+      </p:nvGrpSpPr>
+      <p:grpSpPr/>
+      <p:sp>
+        <p:nvSpPr>
+          <p:cNvPr id="2" name="Rectangle 1"/>
+          <p:cNvSpPr/>
+          <p:nvPr/>
+        </p:nvSpPr>
+        <p:spPr>
+          <a:xfrm>
+            <a:off x="0" y="0"/>
+            <a:ext cx="9144000" cy="6858000"/>
+          </a:xfrm>
+          <a:prstGeom prst="rect">
+            <a:avLst/>
+          </a:prstGeom>
+          <a:solidFill>
+            <a:srgbClr val="F4F7FA"/>
+          </a:solidFill>
+          <a:ln>
+            <a:noFill/>
+          </a:ln>
+        </p:spPr>
+        <p:style>
+          <a:lnRef idx="1">
+            <a:schemeClr val="accent1"/>
+          </a:lnRef>
+          <a:fillRef idx="3">
+            <a:schemeClr val="accent1"/>
+          </a:fillRef>
+          <a:effectRef idx="2">
+            <a:schemeClr val="accent1"/>
+          </a:effectRef>
+          <a:fontRef idx="minor">
+            <a:schemeClr val="lt1"/>
+          </a:fontRef>
+        </p:style>
+        <p:txBody>
+          <a:bodyPr rtlCol="0" anchor="ctr"/>
+          <a:lstStyle/>
+          <a:p>
+            <a:pPr algn="ctr"/>
+          </a:p>
+        </p:txBody>
+      </p:sp>
+      <p:sp>
+        <p:nvSpPr>
+          <p:cNvPr id="3" name="Rectangle 2"/>
+          <p:cNvSpPr/>
+          <p:nvPr/>
+        </p:nvSpPr>
+        <p:spPr>
+          <a:xfrm>
+            <a:off x="0" y="0"/>
+            <a:ext cx="9144000" cy="658368"/>
+          </a:xfrm>
+          <a:prstGeom prst="rect">
+            <a:avLst/>
+          </a:prstGeom>
+          <a:solidFill>
+            <a:srgbClr val="112E4E"/>
+          </a:solidFill>
+          <a:ln>
+            <a:noFill/>
+          </a:ln>
+        </p:spPr>
+        <p:style>
+          <a:lnRef idx="1">
+            <a:schemeClr val="accent1"/>
+          </a:lnRef>
+          <a:fillRef idx="3">
+            <a:schemeClr val="accent1"/>
+          </a:fillRef>
+          <a:effectRef idx="2">
+            <a:schemeClr val="accent1"/>
+          </a:effectRef>
+          <a:fontRef idx="minor">
+            <a:schemeClr val="lt1"/>
+          </a:fontRef>
+        </p:style>
+        <p:txBody>
+          <a:bodyPr rtlCol="0" anchor="ctr"/>
+          <a:lstStyle/>
+          <a:p>
+            <a:pPr algn="ctr"/>
+          </a:p>
+        </p:txBody>
+      </p:sp>
+      <p:sp>
+        <p:nvSpPr>
+          <p:cNvPr id="4" name="TextBox 3"/>
+          <p:cNvSpPr txBox="1"/>
+          <p:nvPr/>
+        </p:nvSpPr>
+        <p:spPr>
+          <a:xfrm>
+            <a:off x="411480" y="164592"/>
+            <a:ext cx="8046720" cy="320040"/>
+          </a:xfrm>
+          <a:prstGeom prst="rect">
+            <a:avLst/>
+          </a:prstGeom>
+          <a:noFill/>
+        </p:spPr>
+        <p:txBody>
+          <a:bodyPr wrap="none">
+            <a:spAutoFit/>
+          </a:bodyPr>
+          <a:lstStyle/>
+          <a:p>
+            <a:pPr>
+              <a:defRPr sz="1200" b="1">
+                <a:solidFill>
+                  <a:srgbClr val="FFFFFF"/>
+                </a:solidFill>
+                <a:latin typeface="Calibri"/>
+              </a:defRPr>
+            </a:pPr>
+            <a:r>
+              <a:t>AI Product Proposal</a:t>
+            </a:r>
+          </a:p>
+        </p:txBody>
+      </p:sp>
+      <p:sp>
+        <p:nvSpPr>
+          <p:cNvPr id="5" name="Rounded Rectangle 4"/>
+          <p:cNvSpPr/>
+          <p:nvPr/>
+        </p:nvSpPr>
+        <p:spPr>
+          <a:xfrm>
+            <a:off x="7269481" y="128016"/>
+            <a:ext cx="1508760" cy="384048"/>
+          </a:xfrm>
+          <a:prstGeom prst="roundRect">
+            <a:avLst/>
+          </a:prstGeom>
+          <a:solidFill>
+            <a:srgbClr val="0B8174"/>
+          </a:solidFill>
+          <a:ln>
+            <a:noFill/>
+          </a:ln>
+        </p:spPr>
+        <p:style>
+          <a:lnRef idx="1">
+            <a:schemeClr val="accent1"/>
+          </a:lnRef>
+          <a:fillRef idx="3">
+            <a:schemeClr val="accent1"/>
+          </a:fillRef>
+          <a:effectRef idx="2">
+            <a:schemeClr val="accent1"/>
+          </a:effectRef>
+          <a:fontRef idx="minor">
+            <a:schemeClr val="lt1"/>
+          </a:fontRef>
+        </p:style>
+        <p:txBody>
+          <a:bodyPr rtlCol="0" anchor="ctr"/>
+          <a:lstStyle/>
+          <a:p>
+            <a:pPr algn="ctr">
+              <a:defRPr sz="1100" b="1">
+                <a:solidFill>
+                  <a:srgbClr val="FFFFFF"/>
+                </a:solidFill>
+                <a:latin typeface="Calibri"/>
+              </a:defRPr>
+            </a:pPr>
+            <a:r>
+              <a:t>15 / 20</a:t>
+            </a:r>
+          </a:p>
+        </p:txBody>
+      </p:sp>
+      <p:sp>
+        <p:nvSpPr>
+          <p:cNvPr id="6" name="Rounded Rectangle 5"/>
+          <p:cNvSpPr/>
+          <p:nvPr/>
+        </p:nvSpPr>
+        <p:spPr>
+          <a:xfrm>
+            <a:off x="411480" y="841248"/>
+            <a:ext cx="11247120" cy="5285232"/>
+          </a:xfrm>
+          <a:prstGeom prst="roundRect">
+            <a:avLst/>
+          </a:prstGeom>
+          <a:solidFill>
+            <a:srgbClr val="FFFFFF"/>
+          </a:solidFill>
+          <a:ln w="13970">
+            <a:solidFill>
+              <a:srgbClr val="D1E4F6"/>
+            </a:solidFill>
+          </a:ln>
+        </p:spPr>
+        <p:style>
+          <a:lnRef idx="1">
+            <a:schemeClr val="accent1"/>
+          </a:lnRef>
+          <a:fillRef idx="3">
+            <a:schemeClr val="accent1"/>
+          </a:fillRef>
+          <a:effectRef idx="2">
+            <a:schemeClr val="accent1"/>
+          </a:effectRef>
+          <a:fontRef idx="minor">
+            <a:schemeClr val="lt1"/>
+          </a:fontRef>
+        </p:style>
+        <p:txBody>
+          <a:bodyPr rtlCol="0" anchor="ctr"/>
+          <a:lstStyle/>
+          <a:p>
+            <a:pPr algn="ctr"/>
+          </a:p>
+        </p:txBody>
+      </p:sp>
+      <p:sp>
+        <p:nvSpPr>
+          <p:cNvPr id="7" name="Rectangle 6"/>
+          <p:cNvSpPr/>
+          <p:nvPr/>
+        </p:nvSpPr>
+        <p:spPr>
+          <a:xfrm>
+            <a:off x="621792" y="1051560"/>
+            <a:ext cx="73152" cy="4498848"/>
+          </a:xfrm>
+          <a:prstGeom prst="rect">
+            <a:avLst/>
+          </a:prstGeom>
+          <a:solidFill>
+            <a:srgbClr val="0B8174"/>
+          </a:solidFill>
+          <a:ln>
+            <a:noFill/>
+          </a:ln>
+        </p:spPr>
+        <p:style>
+          <a:lnRef idx="1">
+            <a:schemeClr val="accent1"/>
+          </a:lnRef>
+          <a:fillRef idx="3">
+            <a:schemeClr val="accent1"/>
+          </a:fillRef>
+          <a:effectRef idx="2">
+            <a:schemeClr val="accent1"/>
+          </a:effectRef>
+          <a:fontRef idx="minor">
+            <a:schemeClr val="lt1"/>
+          </a:fontRef>
+        </p:style>
+        <p:txBody>
+          <a:bodyPr rtlCol="0" anchor="ctr"/>
+          <a:lstStyle/>
+          <a:p>
+            <a:pPr algn="ctr"/>
+          </a:p>
+        </p:txBody>
+      </p:sp>
+      <p:sp>
+        <p:nvSpPr>
+          <p:cNvPr id="8" name="TextBox 7"/>
+          <p:cNvSpPr txBox="1"/>
+          <p:nvPr/>
+        </p:nvSpPr>
+        <p:spPr>
+          <a:xfrm>
+            <a:off x="822960" y="1024128"/>
+            <a:ext cx="10515600" cy="777240"/>
+          </a:xfrm>
+          <a:prstGeom prst="rect">
+            <a:avLst/>
+          </a:prstGeom>
+          <a:noFill/>
+        </p:spPr>
+        <p:txBody>
+          <a:bodyPr wrap="none">
+            <a:spAutoFit/>
+          </a:bodyPr>
+          <a:lstStyle/>
+          <a:p>
+            <a:pPr>
+              <a:defRPr sz="2900" b="1">
+                <a:solidFill>
+                  <a:srgbClr val="112E4E"/>
+                </a:solidFill>
+                <a:latin typeface="Calibri"/>
+              </a:defRPr>
+            </a:pPr>
+            <a:r>
+              <a:t>Evaluation Framework and Operating Model</a:t>
+            </a:r>
+          </a:p>
+        </p:txBody>
+      </p:sp>
+      <p:sp>
+        <p:nvSpPr>
+          <p:cNvPr id="9" name="TextBox 8"/>
+          <p:cNvSpPr txBox="1"/>
+          <p:nvPr/>
+        </p:nvSpPr>
+        <p:spPr>
+          <a:xfrm>
+            <a:off x="960120" y="1828800"/>
+            <a:ext cx="10241280" cy="3017520"/>
+          </a:xfrm>
+          <a:prstGeom prst="rect">
+            <a:avLst/>
+          </a:prstGeom>
+          <a:noFill/>
+        </p:spPr>
+        <p:txBody>
+          <a:bodyPr wrap="none">
+            <a:spAutoFit/>
+          </a:bodyPr>
+          <a:lstStyle/>
+          <a:p>
+            <a:pPr>
+              <a:spcAft>
+                <a:spcPts val="500"/>
+              </a:spcAft>
+              <a:defRPr sz="1800">
+                <a:solidFill>
+                  <a:srgbClr val="1F2937"/>
+                </a:solidFill>
+                <a:latin typeface="Calibri"/>
+              </a:defRPr>
+            </a:pPr>
+            <a:r>
+              <a:t>Offline metrics: groundedness, policy compliance, hallucination rate, brevity compliance.</a:t>
+            </a:r>
+          </a:p>
+          <a:p>
+            <a:pPr>
+              <a:spcAft>
+                <a:spcPts val="500"/>
+              </a:spcAft>
+              <a:defRPr sz="1800">
+                <a:solidFill>
+                  <a:srgbClr val="1F2937"/>
+                </a:solidFill>
+                <a:latin typeface="Calibri"/>
+              </a:defRPr>
+            </a:pPr>
+            <a:r>
+              <a:t>Online metrics: task completion, satisfaction, safety interventions, fallback success.</a:t>
+            </a:r>
+          </a:p>
+          <a:p>
+            <a:pPr>
+              <a:spcAft>
+                <a:spcPts val="500"/>
+              </a:spcAft>
+              <a:defRPr sz="1800">
+                <a:solidFill>
+                  <a:srgbClr val="1F2937"/>
+                </a:solidFill>
+                <a:latin typeface="Calibri"/>
+              </a:defRPr>
+            </a:pPr>
+            <a:r>
+              <a:t>Owners: Product, Conversation Safety, ML Platform, Data Governance, Operations.</a:t>
+            </a:r>
+          </a:p>
+          <a:p>
+            <a:pPr>
+              <a:spcAft>
+                <a:spcPts val="500"/>
+              </a:spcAft>
+              <a:defRPr sz="1800">
+                <a:solidFill>
+                  <a:srgbClr val="1F2937"/>
+                </a:solidFill>
+                <a:latin typeface="Calibri"/>
+              </a:defRPr>
+            </a:pPr>
+            <a:r>
+              <a:t>Incident response ownership: Vehicle Digital Operations.</a:t>
+            </a:r>
+          </a:p>
+        </p:txBody>
+      </p:sp>
+      <p:sp>
+        <p:nvSpPr>
+          <p:cNvPr id="10" name="Rounded Rectangle 9"/>
+          <p:cNvSpPr/>
+          <p:nvPr/>
+        </p:nvSpPr>
+        <p:spPr>
+          <a:xfrm>
+            <a:off x="822960" y="5358384"/>
+            <a:ext cx="10698480" cy="512064"/>
+          </a:xfrm>
+          <a:prstGeom prst="roundRect">
+            <a:avLst/>
+          </a:prstGeom>
+          <a:solidFill>
+            <a:srgbClr val="ECFDF5"/>
+          </a:solidFill>
+          <a:ln>
+            <a:noFill/>
+          </a:ln>
+        </p:spPr>
+        <p:style>
+          <a:lnRef idx="1">
+            <a:schemeClr val="accent1"/>
+          </a:lnRef>
+          <a:fillRef idx="3">
+            <a:schemeClr val="accent1"/>
+          </a:fillRef>
+          <a:effectRef idx="2">
+            <a:schemeClr val="accent1"/>
+          </a:effectRef>
+          <a:fontRef idx="minor">
+            <a:schemeClr val="lt1"/>
+          </a:fontRef>
+        </p:style>
+        <p:txBody>
+          <a:bodyPr rtlCol="0" anchor="ctr"/>
+          <a:lstStyle/>
+          <a:p>
+            <a:pPr algn="ctr">
+              <a:defRPr sz="1250" b="1">
+                <a:solidFill>
+                  <a:srgbClr val="064E3B"/>
+                </a:solidFill>
+                <a:latin typeface="Calibri"/>
+              </a:defRPr>
+            </a:pPr>
+            <a:r>
+              <a:t>Key Takeaway: Clear metrics and ownership enable accountable, continuous improvement.</a:t>
+            </a:r>
+          </a:p>
+        </p:txBody>
+      </p:sp>
+      <p:sp>
+        <p:nvSpPr>
+          <p:cNvPr id="11" name="TextBox 10"/>
+          <p:cNvSpPr txBox="1"/>
+          <p:nvPr/>
+        </p:nvSpPr>
+        <p:spPr>
+          <a:xfrm>
+            <a:off x="411480" y="6446520"/>
+            <a:ext cx="11247120" cy="228600"/>
+          </a:xfrm>
+          <a:prstGeom prst="rect">
+            <a:avLst/>
+          </a:prstGeom>
+          <a:noFill/>
+        </p:spPr>
+        <p:txBody>
+          <a:bodyPr wrap="none">
+            <a:spAutoFit/>
+          </a:bodyPr>
+          <a:lstStyle/>
+          <a:p>
+            <a:pPr algn="r">
+              <a:defRPr sz="1000" b="1">
+                <a:solidFill>
+                  <a:srgbClr val="64748B"/>
+                </a:solidFill>
+                <a:latin typeface="Calibri"/>
+              </a:defRPr>
+            </a:pPr>
+            <a:r>
+              <a:t>Created By : ZIA UL MUSTAFA</a:t>
+            </a:r>
+          </a:p>
+        </p:txBody>
+      </p:sp>
+    </p:spTree>
+  </p:cSld>
+  <p:clrMapOvr>
+    <a:masterClrMapping/>
+  </p:clrMapOvr>
+</p:sld>
+</file>
+
+<file path=ppt/slides/slide16.xml><?xml version="1.0" encoding="utf-8"?>
+<p:sld xmlns:a="http://schemas.openxmlformats.org/drawingml/2006/main" xmlns:p="http://schemas.openxmlformats.org/presentationml/2006/main" xmlns:r="http://schemas.openxmlformats.org/officeDocument/2006/relationships">
+  <p:cSld>
+    <p:spTree>
+      <p:nvGrpSpPr>
+        <p:cNvPr id="1" name=""/>
+        <p:cNvGrpSpPr/>
+        <p:nvPr/>
+      </p:nvGrpSpPr>
+      <p:grpSpPr/>
+      <p:sp>
+        <p:nvSpPr>
+          <p:cNvPr id="2" name="Rectangle 1"/>
+          <p:cNvSpPr/>
+          <p:nvPr/>
+        </p:nvSpPr>
+        <p:spPr>
+          <a:xfrm>
+            <a:off x="0" y="0"/>
+            <a:ext cx="9144000" cy="6858000"/>
+          </a:xfrm>
+          <a:prstGeom prst="rect">
+            <a:avLst/>
+          </a:prstGeom>
+          <a:solidFill>
+            <a:srgbClr val="F4F7FA"/>
+          </a:solidFill>
+          <a:ln>
+            <a:noFill/>
+          </a:ln>
+        </p:spPr>
+        <p:style>
+          <a:lnRef idx="1">
+            <a:schemeClr val="accent1"/>
+          </a:lnRef>
+          <a:fillRef idx="3">
+            <a:schemeClr val="accent1"/>
+          </a:fillRef>
+          <a:effectRef idx="2">
+            <a:schemeClr val="accent1"/>
+          </a:effectRef>
+          <a:fontRef idx="minor">
+            <a:schemeClr val="lt1"/>
+          </a:fontRef>
+        </p:style>
+        <p:txBody>
+          <a:bodyPr rtlCol="0" anchor="ctr"/>
+          <a:lstStyle/>
+          <a:p>
+            <a:pPr algn="ctr"/>
+          </a:p>
+        </p:txBody>
+      </p:sp>
+      <p:sp>
+        <p:nvSpPr>
+          <p:cNvPr id="3" name="Rectangle 2"/>
+          <p:cNvSpPr/>
+          <p:nvPr/>
+        </p:nvSpPr>
+        <p:spPr>
+          <a:xfrm>
+            <a:off x="0" y="0"/>
+            <a:ext cx="9144000" cy="658368"/>
+          </a:xfrm>
+          <a:prstGeom prst="rect">
+            <a:avLst/>
+          </a:prstGeom>
+          <a:solidFill>
+            <a:srgbClr val="112E4E"/>
+          </a:solidFill>
+          <a:ln>
+            <a:noFill/>
+          </a:ln>
+        </p:spPr>
+        <p:style>
+          <a:lnRef idx="1">
+            <a:schemeClr val="accent1"/>
+          </a:lnRef>
+          <a:fillRef idx="3">
+            <a:schemeClr val="accent1"/>
+          </a:fillRef>
+          <a:effectRef idx="2">
+            <a:schemeClr val="accent1"/>
+          </a:effectRef>
+          <a:fontRef idx="minor">
+            <a:schemeClr val="lt1"/>
+          </a:fontRef>
+        </p:style>
+        <p:txBody>
+          <a:bodyPr rtlCol="0" anchor="ctr"/>
+          <a:lstStyle/>
+          <a:p>
+            <a:pPr algn="ctr"/>
+          </a:p>
+        </p:txBody>
+      </p:sp>
+      <p:sp>
+        <p:nvSpPr>
+          <p:cNvPr id="4" name="TextBox 3"/>
+          <p:cNvSpPr txBox="1"/>
+          <p:nvPr/>
+        </p:nvSpPr>
+        <p:spPr>
+          <a:xfrm>
+            <a:off x="411480" y="164592"/>
+            <a:ext cx="8046720" cy="320040"/>
+          </a:xfrm>
+          <a:prstGeom prst="rect">
+            <a:avLst/>
+          </a:prstGeom>
+          <a:noFill/>
+        </p:spPr>
+        <p:txBody>
+          <a:bodyPr wrap="none">
+            <a:spAutoFit/>
+          </a:bodyPr>
+          <a:lstStyle/>
+          <a:p>
+            <a:pPr>
+              <a:defRPr sz="1200" b="1">
+                <a:solidFill>
+                  <a:srgbClr val="FFFFFF"/>
+                </a:solidFill>
+                <a:latin typeface="Calibri"/>
+              </a:defRPr>
+            </a:pPr>
+            <a:r>
+              <a:t>AI Product Proposal</a:t>
+            </a:r>
+          </a:p>
+        </p:txBody>
+      </p:sp>
+      <p:sp>
+        <p:nvSpPr>
+          <p:cNvPr id="5" name="Rounded Rectangle 4"/>
+          <p:cNvSpPr/>
+          <p:nvPr/>
+        </p:nvSpPr>
+        <p:spPr>
+          <a:xfrm>
+            <a:off x="7269481" y="128016"/>
+            <a:ext cx="1508760" cy="384048"/>
+          </a:xfrm>
+          <a:prstGeom prst="roundRect">
+            <a:avLst/>
+          </a:prstGeom>
+          <a:solidFill>
+            <a:srgbClr val="0B8174"/>
+          </a:solidFill>
+          <a:ln>
+            <a:noFill/>
+          </a:ln>
+        </p:spPr>
+        <p:style>
+          <a:lnRef idx="1">
+            <a:schemeClr val="accent1"/>
+          </a:lnRef>
+          <a:fillRef idx="3">
+            <a:schemeClr val="accent1"/>
+          </a:fillRef>
+          <a:effectRef idx="2">
+            <a:schemeClr val="accent1"/>
+          </a:effectRef>
+          <a:fontRef idx="minor">
+            <a:schemeClr val="lt1"/>
+          </a:fontRef>
+        </p:style>
+        <p:txBody>
+          <a:bodyPr rtlCol="0" anchor="ctr"/>
+          <a:lstStyle/>
+          <a:p>
+            <a:pPr algn="ctr">
+              <a:defRPr sz="1100" b="1">
+                <a:solidFill>
+                  <a:srgbClr val="FFFFFF"/>
+                </a:solidFill>
+                <a:latin typeface="Calibri"/>
+              </a:defRPr>
+            </a:pPr>
+            <a:r>
+              <a:t>16 / 20</a:t>
+            </a:r>
+          </a:p>
+        </p:txBody>
+      </p:sp>
+      <p:sp>
+        <p:nvSpPr>
+          <p:cNvPr id="6" name="Rounded Rectangle 5"/>
+          <p:cNvSpPr/>
+          <p:nvPr/>
+        </p:nvSpPr>
+        <p:spPr>
+          <a:xfrm>
+            <a:off x="411480" y="841248"/>
+            <a:ext cx="11247120" cy="5285232"/>
+          </a:xfrm>
+          <a:prstGeom prst="roundRect">
+            <a:avLst/>
+          </a:prstGeom>
+          <a:solidFill>
+            <a:srgbClr val="FFFFFF"/>
+          </a:solidFill>
+          <a:ln w="13970">
+            <a:solidFill>
+              <a:srgbClr val="D1E4F6"/>
+            </a:solidFill>
+          </a:ln>
+        </p:spPr>
+        <p:style>
+          <a:lnRef idx="1">
+            <a:schemeClr val="accent1"/>
+          </a:lnRef>
+          <a:fillRef idx="3">
+            <a:schemeClr val="accent1"/>
+          </a:fillRef>
+          <a:effectRef idx="2">
+            <a:schemeClr val="accent1"/>
+          </a:effectRef>
+          <a:fontRef idx="minor">
+            <a:schemeClr val="lt1"/>
+          </a:fontRef>
+        </p:style>
+        <p:txBody>
+          <a:bodyPr rtlCol="0" anchor="ctr"/>
+          <a:lstStyle/>
+          <a:p>
+            <a:pPr algn="ctr"/>
+          </a:p>
+        </p:txBody>
+      </p:sp>
+      <p:sp>
+        <p:nvSpPr>
+          <p:cNvPr id="7" name="Rectangle 6"/>
+          <p:cNvSpPr/>
+          <p:nvPr/>
+        </p:nvSpPr>
+        <p:spPr>
+          <a:xfrm>
+            <a:off x="621792" y="1051560"/>
+            <a:ext cx="73152" cy="4498848"/>
+          </a:xfrm>
+          <a:prstGeom prst="rect">
+            <a:avLst/>
+          </a:prstGeom>
+          <a:solidFill>
+            <a:srgbClr val="0B8174"/>
+          </a:solidFill>
+          <a:ln>
+            <a:noFill/>
+          </a:ln>
+        </p:spPr>
+        <p:style>
+          <a:lnRef idx="1">
+            <a:schemeClr val="accent1"/>
+          </a:lnRef>
+          <a:fillRef idx="3">
+            <a:schemeClr val="accent1"/>
+          </a:fillRef>
+          <a:effectRef idx="2">
+            <a:schemeClr val="accent1"/>
+          </a:effectRef>
+          <a:fontRef idx="minor">
+            <a:schemeClr val="lt1"/>
+          </a:fontRef>
+        </p:style>
+        <p:txBody>
+          <a:bodyPr rtlCol="0" anchor="ctr"/>
+          <a:lstStyle/>
+          <a:p>
+            <a:pPr algn="ctr"/>
+          </a:p>
+        </p:txBody>
+      </p:sp>
+      <p:sp>
+        <p:nvSpPr>
+          <p:cNvPr id="8" name="TextBox 7"/>
+          <p:cNvSpPr txBox="1"/>
+          <p:nvPr/>
+        </p:nvSpPr>
+        <p:spPr>
+          <a:xfrm>
+            <a:off x="822960" y="1024128"/>
+            <a:ext cx="10515600" cy="777240"/>
+          </a:xfrm>
+          <a:prstGeom prst="rect">
+            <a:avLst/>
+          </a:prstGeom>
+          <a:noFill/>
+        </p:spPr>
+        <p:txBody>
+          <a:bodyPr wrap="none">
+            <a:spAutoFit/>
+          </a:bodyPr>
+          <a:lstStyle/>
+          <a:p>
+            <a:pPr>
+              <a:defRPr sz="2900" b="1">
+                <a:solidFill>
+                  <a:srgbClr val="112E4E"/>
+                </a:solidFill>
+                <a:latin typeface="Calibri"/>
+              </a:defRPr>
+            </a:pPr>
+            <a:r>
+              <a:t>Risk Controls and Mitigations</a:t>
+            </a:r>
+          </a:p>
+        </p:txBody>
+      </p:sp>
+      <p:sp>
+        <p:nvSpPr>
+          <p:cNvPr id="9" name="TextBox 8"/>
+          <p:cNvSpPr txBox="1"/>
+          <p:nvPr/>
+        </p:nvSpPr>
+        <p:spPr>
+          <a:xfrm>
+            <a:off x="960120" y="1828800"/>
+            <a:ext cx="10241280" cy="3017520"/>
+          </a:xfrm>
+          <a:prstGeom prst="rect">
+            <a:avLst/>
+          </a:prstGeom>
+          <a:noFill/>
+        </p:spPr>
+        <p:txBody>
+          <a:bodyPr wrap="none">
+            <a:spAutoFit/>
+          </a:bodyPr>
+          <a:lstStyle/>
+          <a:p>
+            <a:pPr>
+              <a:spcAft>
+                <a:spcPts val="500"/>
+              </a:spcAft>
+              <a:defRPr sz="1600">
+                <a:solidFill>
+                  <a:srgbClr val="1F2937"/>
+                </a:solidFill>
+                <a:latin typeface="Calibri"/>
+              </a:defRPr>
+            </a:pPr>
+            <a:r>
+              <a:t>Key risks: distraction, hallucinations, privacy leakage, harmful outputs, cost drift.</a:t>
+            </a:r>
+          </a:p>
+          <a:p>
+            <a:pPr>
+              <a:spcAft>
+                <a:spcPts val="500"/>
+              </a:spcAft>
+              <a:defRPr sz="1600">
+                <a:solidFill>
+                  <a:srgbClr val="1F2937"/>
+                </a:solidFill>
+                <a:latin typeface="Calibri"/>
+              </a:defRPr>
+            </a:pPr>
+            <a:r>
+              <a:t>Confidence-based fallback to offline-safe templates.</a:t>
+            </a:r>
+          </a:p>
+          <a:p>
+            <a:pPr>
+              <a:spcAft>
+                <a:spcPts val="500"/>
+              </a:spcAft>
+              <a:defRPr sz="1600">
+                <a:solidFill>
+                  <a:srgbClr val="1F2937"/>
+                </a:solidFill>
+                <a:latin typeface="Calibri"/>
+              </a:defRPr>
+            </a:pPr>
+            <a:r>
+              <a:t>Block/redirect high-risk prompts while driving.</a:t>
+            </a:r>
+          </a:p>
+          <a:p>
+            <a:pPr>
+              <a:spcAft>
+                <a:spcPts val="500"/>
+              </a:spcAft>
+              <a:defRPr sz="1600">
+                <a:solidFill>
+                  <a:srgbClr val="1F2937"/>
+                </a:solidFill>
+                <a:latin typeface="Calibri"/>
+              </a:defRPr>
+            </a:pPr>
+            <a:r>
+              <a:t>Prompt-injection and unsafe-content detection controls.</a:t>
+            </a:r>
+          </a:p>
+          <a:p>
+            <a:pPr>
+              <a:spcAft>
+                <a:spcPts val="500"/>
+              </a:spcAft>
+              <a:defRPr sz="1600">
+                <a:solidFill>
+                  <a:srgbClr val="1F2937"/>
+                </a:solidFill>
+                <a:latin typeface="Calibri"/>
+              </a:defRPr>
+            </a:pPr>
+            <a:r>
+              <a:t>Session token quotas and anomaly cost alerts.</a:t>
+            </a:r>
+          </a:p>
+          <a:p>
+            <a:pPr>
+              <a:spcAft>
+                <a:spcPts val="500"/>
+              </a:spcAft>
+              <a:defRPr sz="1600">
+                <a:solidFill>
+                  <a:srgbClr val="1F2937"/>
+                </a:solidFill>
+                <a:latin typeface="Calibri"/>
+              </a:defRPr>
+            </a:pPr>
+            <a:r>
+              <a:t>Governance: monitoring dashboards and incident playbooks.</a:t>
+            </a:r>
+          </a:p>
+        </p:txBody>
+      </p:sp>
+      <p:sp>
+        <p:nvSpPr>
+          <p:cNvPr id="10" name="Rounded Rectangle 9"/>
+          <p:cNvSpPr/>
+          <p:nvPr/>
+        </p:nvSpPr>
+        <p:spPr>
+          <a:xfrm>
+            <a:off x="822960" y="5358384"/>
+            <a:ext cx="10698480" cy="512064"/>
+          </a:xfrm>
+          <a:prstGeom prst="roundRect">
+            <a:avLst/>
+          </a:prstGeom>
+          <a:solidFill>
+            <a:srgbClr val="ECFDF5"/>
+          </a:solidFill>
+          <a:ln>
+            <a:noFill/>
+          </a:ln>
+        </p:spPr>
+        <p:style>
+          <a:lnRef idx="1">
+            <a:schemeClr val="accent1"/>
+          </a:lnRef>
+          <a:fillRef idx="3">
+            <a:schemeClr val="accent1"/>
+          </a:fillRef>
+          <a:effectRef idx="2">
+            <a:schemeClr val="accent1"/>
+          </a:effectRef>
+          <a:fontRef idx="minor">
+            <a:schemeClr val="lt1"/>
+          </a:fontRef>
+        </p:style>
+        <p:txBody>
+          <a:bodyPr rtlCol="0" anchor="ctr"/>
+          <a:lstStyle/>
+          <a:p>
+            <a:pPr algn="ctr">
+              <a:defRPr sz="1250" b="1">
+                <a:solidFill>
+                  <a:srgbClr val="064E3B"/>
+                </a:solidFill>
+                <a:latin typeface="Calibri"/>
+              </a:defRPr>
+            </a:pPr>
+            <a:r>
+              <a:t>Key Takeaway: Multi-layer controls are embedded from prompt to operations.</a:t>
+            </a:r>
+          </a:p>
+        </p:txBody>
+      </p:sp>
+      <p:sp>
+        <p:nvSpPr>
+          <p:cNvPr id="11" name="TextBox 10"/>
+          <p:cNvSpPr txBox="1"/>
+          <p:nvPr/>
+        </p:nvSpPr>
+        <p:spPr>
+          <a:xfrm>
+            <a:off x="411480" y="6446520"/>
+            <a:ext cx="11247120" cy="228600"/>
+          </a:xfrm>
+          <a:prstGeom prst="rect">
+            <a:avLst/>
+          </a:prstGeom>
+          <a:noFill/>
+        </p:spPr>
+        <p:txBody>
+          <a:bodyPr wrap="none">
+            <a:spAutoFit/>
+          </a:bodyPr>
+          <a:lstStyle/>
+          <a:p>
+            <a:pPr algn="r">
+              <a:defRPr sz="1000" b="1">
+                <a:solidFill>
+                  <a:srgbClr val="64748B"/>
+                </a:solidFill>
+                <a:latin typeface="Calibri"/>
+              </a:defRPr>
+            </a:pPr>
+            <a:r>
+              <a:t>Created By : ZIA UL MUSTAFA</a:t>
+            </a:r>
+          </a:p>
+        </p:txBody>
+      </p:sp>
+    </p:spTree>
+  </p:cSld>
+  <p:clrMapOvr>
+    <a:masterClrMapping/>
+  </p:clrMapOvr>
+</p:sld>
+</file>
+
+<file path=ppt/slides/slide17.xml><?xml version="1.0" encoding="utf-8"?>
+<p:sld xmlns:a="http://schemas.openxmlformats.org/drawingml/2006/main" xmlns:p="http://schemas.openxmlformats.org/presentationml/2006/main" xmlns:r="http://schemas.openxmlformats.org/officeDocument/2006/relationships">
+  <p:cSld>
+    <p:spTree>
+      <p:nvGrpSpPr>
+        <p:cNvPr id="1" name=""/>
+        <p:cNvGrpSpPr/>
+        <p:nvPr/>
+      </p:nvGrpSpPr>
+      <p:grpSpPr/>
+      <p:sp>
+        <p:nvSpPr>
+          <p:cNvPr id="2" name="Rectangle 1"/>
+          <p:cNvSpPr/>
+          <p:nvPr/>
+        </p:nvSpPr>
+        <p:spPr>
+          <a:xfrm>
+            <a:off x="0" y="0"/>
+            <a:ext cx="9144000" cy="6858000"/>
+          </a:xfrm>
+          <a:prstGeom prst="rect">
+            <a:avLst/>
+          </a:prstGeom>
+          <a:solidFill>
+            <a:srgbClr val="F4F7FA"/>
+          </a:solidFill>
+          <a:ln>
+            <a:noFill/>
+          </a:ln>
+        </p:spPr>
+        <p:style>
+          <a:lnRef idx="1">
+            <a:schemeClr val="accent1"/>
+          </a:lnRef>
+          <a:fillRef idx="3">
+            <a:schemeClr val="accent1"/>
+          </a:fillRef>
+          <a:effectRef idx="2">
+            <a:schemeClr val="accent1"/>
+          </a:effectRef>
+          <a:fontRef idx="minor">
+            <a:schemeClr val="lt1"/>
+          </a:fontRef>
+        </p:style>
+        <p:txBody>
+          <a:bodyPr rtlCol="0" anchor="ctr"/>
+          <a:lstStyle/>
+          <a:p>
+            <a:pPr algn="ctr"/>
+          </a:p>
+        </p:txBody>
+      </p:sp>
+      <p:sp>
+        <p:nvSpPr>
+          <p:cNvPr id="3" name="Rectangle 2"/>
+          <p:cNvSpPr/>
+          <p:nvPr/>
+        </p:nvSpPr>
+        <p:spPr>
+          <a:xfrm>
+            <a:off x="0" y="0"/>
+            <a:ext cx="9144000" cy="658368"/>
+          </a:xfrm>
+          <a:prstGeom prst="rect">
+            <a:avLst/>
+          </a:prstGeom>
+          <a:solidFill>
+            <a:srgbClr val="112E4E"/>
+          </a:solidFill>
+          <a:ln>
+            <a:noFill/>
+          </a:ln>
+        </p:spPr>
+        <p:style>
+          <a:lnRef idx="1">
+            <a:schemeClr val="accent1"/>
+          </a:lnRef>
+          <a:fillRef idx="3">
+            <a:schemeClr val="accent1"/>
+          </a:fillRef>
+          <a:effectRef idx="2">
+            <a:schemeClr val="accent1"/>
+          </a:effectRef>
+          <a:fontRef idx="minor">
+            <a:schemeClr val="lt1"/>
+          </a:fontRef>
+        </p:style>
+        <p:txBody>
+          <a:bodyPr rtlCol="0" anchor="ctr"/>
+          <a:lstStyle/>
+          <a:p>
+            <a:pPr algn="ctr"/>
+          </a:p>
+        </p:txBody>
+      </p:sp>
+      <p:sp>
+        <p:nvSpPr>
+          <p:cNvPr id="4" name="TextBox 3"/>
+          <p:cNvSpPr txBox="1"/>
+          <p:nvPr/>
+        </p:nvSpPr>
+        <p:spPr>
+          <a:xfrm>
+            <a:off x="411480" y="164592"/>
+            <a:ext cx="8046720" cy="320040"/>
+          </a:xfrm>
+          <a:prstGeom prst="rect">
+            <a:avLst/>
+          </a:prstGeom>
+          <a:noFill/>
+        </p:spPr>
+        <p:txBody>
+          <a:bodyPr wrap="none">
+            <a:spAutoFit/>
+          </a:bodyPr>
+          <a:lstStyle/>
+          <a:p>
+            <a:pPr>
+              <a:defRPr sz="1200" b="1">
+                <a:solidFill>
+                  <a:srgbClr val="FFFFFF"/>
+                </a:solidFill>
+                <a:latin typeface="Calibri"/>
+              </a:defRPr>
+            </a:pPr>
+            <a:r>
+              <a:t>AI Product Proposal</a:t>
+            </a:r>
+          </a:p>
+        </p:txBody>
+      </p:sp>
+      <p:sp>
+        <p:nvSpPr>
+          <p:cNvPr id="5" name="Rounded Rectangle 4"/>
+          <p:cNvSpPr/>
+          <p:nvPr/>
+        </p:nvSpPr>
+        <p:spPr>
+          <a:xfrm>
+            <a:off x="7269481" y="128016"/>
+            <a:ext cx="1508760" cy="384048"/>
+          </a:xfrm>
+          <a:prstGeom prst="roundRect">
+            <a:avLst/>
+          </a:prstGeom>
+          <a:solidFill>
+            <a:srgbClr val="0B8174"/>
+          </a:solidFill>
+          <a:ln>
+            <a:noFill/>
+          </a:ln>
+        </p:spPr>
+        <p:style>
+          <a:lnRef idx="1">
+            <a:schemeClr val="accent1"/>
+          </a:lnRef>
+          <a:fillRef idx="3">
+            <a:schemeClr val="accent1"/>
+          </a:fillRef>
+          <a:effectRef idx="2">
+            <a:schemeClr val="accent1"/>
+          </a:effectRef>
+          <a:fontRef idx="minor">
+            <a:schemeClr val="lt1"/>
+          </a:fontRef>
+        </p:style>
+        <p:txBody>
+          <a:bodyPr rtlCol="0" anchor="ctr"/>
+          <a:lstStyle/>
+          <a:p>
+            <a:pPr algn="ctr">
+              <a:defRPr sz="1100" b="1">
+                <a:solidFill>
+                  <a:srgbClr val="FFFFFF"/>
+                </a:solidFill>
+                <a:latin typeface="Calibri"/>
+              </a:defRPr>
+            </a:pPr>
+            <a:r>
+              <a:t>17 / 20</a:t>
+            </a:r>
+          </a:p>
+        </p:txBody>
+      </p:sp>
+      <p:sp>
+        <p:nvSpPr>
+          <p:cNvPr id="6" name="Rounded Rectangle 5"/>
+          <p:cNvSpPr/>
+          <p:nvPr/>
+        </p:nvSpPr>
+        <p:spPr>
+          <a:xfrm>
+            <a:off x="411480" y="841248"/>
+            <a:ext cx="11247120" cy="5285232"/>
+          </a:xfrm>
+          <a:prstGeom prst="roundRect">
+            <a:avLst/>
+          </a:prstGeom>
+          <a:solidFill>
+            <a:srgbClr val="FFFFFF"/>
+          </a:solidFill>
+          <a:ln w="13970">
+            <a:solidFill>
+              <a:srgbClr val="D1E4F6"/>
+            </a:solidFill>
+          </a:ln>
+        </p:spPr>
+        <p:style>
+          <a:lnRef idx="1">
+            <a:schemeClr val="accent1"/>
+          </a:lnRef>
+          <a:fillRef idx="3">
+            <a:schemeClr val="accent1"/>
+          </a:fillRef>
+          <a:effectRef idx="2">
+            <a:schemeClr val="accent1"/>
+          </a:effectRef>
+          <a:fontRef idx="minor">
+            <a:schemeClr val="lt1"/>
+          </a:fontRef>
+        </p:style>
+        <p:txBody>
+          <a:bodyPr rtlCol="0" anchor="ctr"/>
+          <a:lstStyle/>
+          <a:p>
+            <a:pPr algn="ctr"/>
+          </a:p>
+        </p:txBody>
+      </p:sp>
+      <p:sp>
+        <p:nvSpPr>
+          <p:cNvPr id="7" name="Rectangle 6"/>
+          <p:cNvSpPr/>
+          <p:nvPr/>
+        </p:nvSpPr>
+        <p:spPr>
+          <a:xfrm>
+            <a:off x="621792" y="1051560"/>
+            <a:ext cx="73152" cy="4498848"/>
+          </a:xfrm>
+          <a:prstGeom prst="rect">
+            <a:avLst/>
+          </a:prstGeom>
+          <a:solidFill>
+            <a:srgbClr val="0B8174"/>
+          </a:solidFill>
+          <a:ln>
+            <a:noFill/>
+          </a:ln>
+        </p:spPr>
+        <p:style>
+          <a:lnRef idx="1">
+            <a:schemeClr val="accent1"/>
+          </a:lnRef>
+          <a:fillRef idx="3">
+            <a:schemeClr val="accent1"/>
+          </a:fillRef>
+          <a:effectRef idx="2">
+            <a:schemeClr val="accent1"/>
+          </a:effectRef>
+          <a:fontRef idx="minor">
+            <a:schemeClr val="lt1"/>
+          </a:fontRef>
+        </p:style>
+        <p:txBody>
+          <a:bodyPr rtlCol="0" anchor="ctr"/>
+          <a:lstStyle/>
+          <a:p>
+            <a:pPr algn="ctr"/>
+          </a:p>
+        </p:txBody>
+      </p:sp>
+      <p:sp>
+        <p:nvSpPr>
+          <p:cNvPr id="8" name="TextBox 7"/>
+          <p:cNvSpPr txBox="1"/>
+          <p:nvPr/>
+        </p:nvSpPr>
+        <p:spPr>
+          <a:xfrm>
+            <a:off x="822960" y="1024128"/>
+            <a:ext cx="10515600" cy="777240"/>
+          </a:xfrm>
+          <a:prstGeom prst="rect">
+            <a:avLst/>
+          </a:prstGeom>
+          <a:noFill/>
+        </p:spPr>
+        <p:txBody>
+          <a:bodyPr wrap="none">
+            <a:spAutoFit/>
+          </a:bodyPr>
+          <a:lstStyle/>
+          <a:p>
+            <a:pPr>
+              <a:defRPr sz="2900" b="1">
+                <a:solidFill>
+                  <a:srgbClr val="112E4E"/>
+                </a:solidFill>
+                <a:latin typeface="Calibri"/>
+              </a:defRPr>
+            </a:pPr>
+            <a:r>
+              <a:t>Risk of Inaction</a:t>
+            </a:r>
+          </a:p>
+        </p:txBody>
+      </p:sp>
+      <p:sp>
+        <p:nvSpPr>
+          <p:cNvPr id="9" name="TextBox 8"/>
+          <p:cNvSpPr txBox="1"/>
+          <p:nvPr/>
+        </p:nvSpPr>
+        <p:spPr>
+          <a:xfrm>
+            <a:off x="960120" y="1828800"/>
+            <a:ext cx="10241280" cy="3017520"/>
+          </a:xfrm>
+          <a:prstGeom prst="rect">
+            <a:avLst/>
+          </a:prstGeom>
+          <a:noFill/>
+        </p:spPr>
+        <p:txBody>
+          <a:bodyPr wrap="none">
+            <a:spAutoFit/>
+          </a:bodyPr>
+          <a:lstStyle/>
+          <a:p>
+            <a:pPr>
+              <a:spcAft>
+                <a:spcPts val="500"/>
+              </a:spcAft>
+              <a:defRPr sz="1800">
+                <a:solidFill>
+                  <a:srgbClr val="1F2937"/>
+                </a:solidFill>
+                <a:latin typeface="Calibri"/>
+              </a:defRPr>
+            </a:pPr>
+            <a:r>
+              <a:t>Product perception remains outdated vs AI-native competitors.</a:t>
+            </a:r>
+          </a:p>
+          <a:p>
+            <a:pPr>
+              <a:spcAft>
+                <a:spcPts val="500"/>
+              </a:spcAft>
+              <a:defRPr sz="1800">
+                <a:solidFill>
+                  <a:srgbClr val="1F2937"/>
+                </a:solidFill>
+                <a:latin typeface="Calibri"/>
+              </a:defRPr>
+            </a:pPr>
+            <a:r>
+              <a:t>Reduced attractiveness in high-value AI-familiar segments.</a:t>
+            </a:r>
+          </a:p>
+          <a:p>
+            <a:pPr>
+              <a:spcAft>
+                <a:spcPts val="500"/>
+              </a:spcAft>
+              <a:defRPr sz="1800">
+                <a:solidFill>
+                  <a:srgbClr val="1F2937"/>
+                </a:solidFill>
+                <a:latin typeface="Calibri"/>
+              </a:defRPr>
+            </a:pPr>
+            <a:r>
+              <a:t>Missed opportunity to build loyalty through differentiated digital experiences.</a:t>
+            </a:r>
+          </a:p>
+        </p:txBody>
+      </p:sp>
+      <p:sp>
+        <p:nvSpPr>
+          <p:cNvPr id="10" name="Rounded Rectangle 9"/>
+          <p:cNvSpPr/>
+          <p:nvPr/>
+        </p:nvSpPr>
+        <p:spPr>
+          <a:xfrm>
+            <a:off x="822960" y="5358384"/>
+            <a:ext cx="10698480" cy="512064"/>
+          </a:xfrm>
+          <a:prstGeom prst="roundRect">
+            <a:avLst/>
+          </a:prstGeom>
+          <a:solidFill>
+            <a:srgbClr val="ECFDF5"/>
+          </a:solidFill>
+          <a:ln>
+            <a:noFill/>
+          </a:ln>
+        </p:spPr>
+        <p:style>
+          <a:lnRef idx="1">
+            <a:schemeClr val="accent1"/>
+          </a:lnRef>
+          <a:fillRef idx="3">
+            <a:schemeClr val="accent1"/>
+          </a:fillRef>
+          <a:effectRef idx="2">
+            <a:schemeClr val="accent1"/>
+          </a:effectRef>
+          <a:fontRef idx="minor">
+            <a:schemeClr val="lt1"/>
+          </a:fontRef>
+        </p:style>
+        <p:txBody>
+          <a:bodyPr rtlCol="0" anchor="ctr"/>
+          <a:lstStyle/>
+          <a:p>
+            <a:pPr algn="ctr">
+              <a:defRPr sz="1250" b="1">
+                <a:solidFill>
+                  <a:srgbClr val="064E3B"/>
+                </a:solidFill>
+                <a:latin typeface="Calibri"/>
+              </a:defRPr>
+            </a:pPr>
+            <a:r>
+              <a:t>Key Takeaway: Not implementing LLM carries measurable strategic downside.</a:t>
+            </a:r>
+          </a:p>
+        </p:txBody>
+      </p:sp>
+      <p:sp>
+        <p:nvSpPr>
+          <p:cNvPr id="11" name="TextBox 10"/>
+          <p:cNvSpPr txBox="1"/>
+          <p:nvPr/>
+        </p:nvSpPr>
+        <p:spPr>
+          <a:xfrm>
+            <a:off x="411480" y="6446520"/>
+            <a:ext cx="11247120" cy="228600"/>
+          </a:xfrm>
+          <a:prstGeom prst="rect">
+            <a:avLst/>
+          </a:prstGeom>
+          <a:noFill/>
+        </p:spPr>
+        <p:txBody>
+          <a:bodyPr wrap="none">
+            <a:spAutoFit/>
+          </a:bodyPr>
+          <a:lstStyle/>
+          <a:p>
+            <a:pPr algn="r">
+              <a:defRPr sz="1000" b="1">
+                <a:solidFill>
+                  <a:srgbClr val="64748B"/>
+                </a:solidFill>
+                <a:latin typeface="Calibri"/>
+              </a:defRPr>
+            </a:pPr>
+            <a:r>
+              <a:t>Created By : ZIA UL MUSTAFA</a:t>
+            </a:r>
+          </a:p>
+        </p:txBody>
+      </p:sp>
+    </p:spTree>
+  </p:cSld>
+  <p:clrMapOvr>
+    <a:masterClrMapping/>
+  </p:clrMapOvr>
+</p:sld>
+</file>
+
+<file path=ppt/slides/slide18.xml><?xml version="1.0" encoding="utf-8"?>
+<p:sld xmlns:a="http://schemas.openxmlformats.org/drawingml/2006/main" xmlns:p="http://schemas.openxmlformats.org/presentationml/2006/main" xmlns:r="http://schemas.openxmlformats.org/officeDocument/2006/relationships">
+  <p:cSld>
+    <p:spTree>
+      <p:nvGrpSpPr>
+        <p:cNvPr id="1" name=""/>
+        <p:cNvGrpSpPr/>
+        <p:nvPr/>
+      </p:nvGrpSpPr>
+      <p:grpSpPr/>
+      <p:sp>
+        <p:nvSpPr>
+          <p:cNvPr id="2" name="Rectangle 1"/>
+          <p:cNvSpPr/>
+          <p:nvPr/>
+        </p:nvSpPr>
+        <p:spPr>
+          <a:xfrm>
+            <a:off x="0" y="0"/>
+            <a:ext cx="9144000" cy="6858000"/>
+          </a:xfrm>
+          <a:prstGeom prst="rect">
+            <a:avLst/>
+          </a:prstGeom>
+          <a:solidFill>
+            <a:srgbClr val="F4F7FA"/>
+          </a:solidFill>
+          <a:ln>
+            <a:noFill/>
+          </a:ln>
+        </p:spPr>
+        <p:style>
+          <a:lnRef idx="1">
+            <a:schemeClr val="accent1"/>
+          </a:lnRef>
+          <a:fillRef idx="3">
+            <a:schemeClr val="accent1"/>
+          </a:fillRef>
+          <a:effectRef idx="2">
+            <a:schemeClr val="accent1"/>
+          </a:effectRef>
+          <a:fontRef idx="minor">
+            <a:schemeClr val="lt1"/>
+          </a:fontRef>
+        </p:style>
+        <p:txBody>
+          <a:bodyPr rtlCol="0" anchor="ctr"/>
+          <a:lstStyle/>
+          <a:p>
+            <a:pPr algn="ctr"/>
+          </a:p>
+        </p:txBody>
+      </p:sp>
+      <p:sp>
+        <p:nvSpPr>
+          <p:cNvPr id="3" name="Rectangle 2"/>
+          <p:cNvSpPr/>
+          <p:nvPr/>
+        </p:nvSpPr>
+        <p:spPr>
+          <a:xfrm>
+            <a:off x="0" y="0"/>
+            <a:ext cx="9144000" cy="658368"/>
+          </a:xfrm>
+          <a:prstGeom prst="rect">
+            <a:avLst/>
+          </a:prstGeom>
+          <a:solidFill>
+            <a:srgbClr val="112E4E"/>
+          </a:solidFill>
+          <a:ln>
+            <a:noFill/>
+          </a:ln>
+        </p:spPr>
+        <p:style>
+          <a:lnRef idx="1">
+            <a:schemeClr val="accent1"/>
+          </a:lnRef>
+          <a:fillRef idx="3">
+            <a:schemeClr val="accent1"/>
+          </a:fillRef>
+          <a:effectRef idx="2">
+            <a:schemeClr val="accent1"/>
+          </a:effectRef>
+          <a:fontRef idx="minor">
+            <a:schemeClr val="lt1"/>
+          </a:fontRef>
+        </p:style>
+        <p:txBody>
+          <a:bodyPr rtlCol="0" anchor="ctr"/>
+          <a:lstStyle/>
+          <a:p>
+            <a:pPr algn="ctr"/>
+          </a:p>
+        </p:txBody>
+      </p:sp>
+      <p:sp>
+        <p:nvSpPr>
+          <p:cNvPr id="4" name="TextBox 3"/>
+          <p:cNvSpPr txBox="1"/>
+          <p:nvPr/>
+        </p:nvSpPr>
+        <p:spPr>
+          <a:xfrm>
+            <a:off x="411480" y="164592"/>
+            <a:ext cx="8046720" cy="320040"/>
+          </a:xfrm>
+          <a:prstGeom prst="rect">
+            <a:avLst/>
+          </a:prstGeom>
+          <a:noFill/>
+        </p:spPr>
+        <p:txBody>
+          <a:bodyPr wrap="none">
+            <a:spAutoFit/>
+          </a:bodyPr>
+          <a:lstStyle/>
+          <a:p>
+            <a:pPr>
+              <a:defRPr sz="1200" b="1">
+                <a:solidFill>
+                  <a:srgbClr val="FFFFFF"/>
+                </a:solidFill>
+                <a:latin typeface="Calibri"/>
+              </a:defRPr>
+            </a:pPr>
+            <a:r>
+              <a:t>AI Product Proposal</a:t>
+            </a:r>
+          </a:p>
+        </p:txBody>
+      </p:sp>
+      <p:sp>
+        <p:nvSpPr>
+          <p:cNvPr id="5" name="Rounded Rectangle 4"/>
+          <p:cNvSpPr/>
+          <p:nvPr/>
+        </p:nvSpPr>
+        <p:spPr>
+          <a:xfrm>
+            <a:off x="7269481" y="128016"/>
+            <a:ext cx="1508760" cy="384048"/>
+          </a:xfrm>
+          <a:prstGeom prst="roundRect">
+            <a:avLst/>
+          </a:prstGeom>
+          <a:solidFill>
+            <a:srgbClr val="0B8174"/>
+          </a:solidFill>
+          <a:ln>
+            <a:noFill/>
+          </a:ln>
+        </p:spPr>
+        <p:style>
+          <a:lnRef idx="1">
+            <a:schemeClr val="accent1"/>
+          </a:lnRef>
+          <a:fillRef idx="3">
+            <a:schemeClr val="accent1"/>
+          </a:fillRef>
+          <a:effectRef idx="2">
+            <a:schemeClr val="accent1"/>
+          </a:effectRef>
+          <a:fontRef idx="minor">
+            <a:schemeClr val="lt1"/>
+          </a:fontRef>
+        </p:style>
+        <p:txBody>
+          <a:bodyPr rtlCol="0" anchor="ctr"/>
+          <a:lstStyle/>
+          <a:p>
+            <a:pPr algn="ctr">
+              <a:defRPr sz="1100" b="1">
+                <a:solidFill>
+                  <a:srgbClr val="FFFFFF"/>
+                </a:solidFill>
+                <a:latin typeface="Calibri"/>
+              </a:defRPr>
+            </a:pPr>
+            <a:r>
+              <a:t>18 / 20</a:t>
+            </a:r>
+          </a:p>
+        </p:txBody>
+      </p:sp>
+      <p:sp>
+        <p:nvSpPr>
+          <p:cNvPr id="6" name="Rounded Rectangle 5"/>
+          <p:cNvSpPr/>
+          <p:nvPr/>
+        </p:nvSpPr>
+        <p:spPr>
+          <a:xfrm>
+            <a:off x="411480" y="841248"/>
+            <a:ext cx="11247120" cy="5285232"/>
+          </a:xfrm>
+          <a:prstGeom prst="roundRect">
+            <a:avLst/>
+          </a:prstGeom>
+          <a:solidFill>
+            <a:srgbClr val="FFFFFF"/>
+          </a:solidFill>
+          <a:ln w="13970">
+            <a:solidFill>
+              <a:srgbClr val="D1E4F6"/>
+            </a:solidFill>
+          </a:ln>
+        </p:spPr>
+        <p:style>
+          <a:lnRef idx="1">
+            <a:schemeClr val="accent1"/>
+          </a:lnRef>
+          <a:fillRef idx="3">
+            <a:schemeClr val="accent1"/>
+          </a:fillRef>
+          <a:effectRef idx="2">
+            <a:schemeClr val="accent1"/>
+          </a:effectRef>
+          <a:fontRef idx="minor">
+            <a:schemeClr val="lt1"/>
+          </a:fontRef>
+        </p:style>
+        <p:txBody>
+          <a:bodyPr rtlCol="0" anchor="ctr"/>
+          <a:lstStyle/>
+          <a:p>
+            <a:pPr algn="ctr"/>
+          </a:p>
+        </p:txBody>
+      </p:sp>
+      <p:sp>
+        <p:nvSpPr>
+          <p:cNvPr id="7" name="Rectangle 6"/>
+          <p:cNvSpPr/>
+          <p:nvPr/>
+        </p:nvSpPr>
+        <p:spPr>
+          <a:xfrm>
+            <a:off x="621792" y="1051560"/>
+            <a:ext cx="73152" cy="4498848"/>
+          </a:xfrm>
+          <a:prstGeom prst="rect">
+            <a:avLst/>
+          </a:prstGeom>
+          <a:solidFill>
+            <a:srgbClr val="0B8174"/>
+          </a:solidFill>
+          <a:ln>
+            <a:noFill/>
+          </a:ln>
+        </p:spPr>
+        <p:style>
+          <a:lnRef idx="1">
+            <a:schemeClr val="accent1"/>
+          </a:lnRef>
+          <a:fillRef idx="3">
+            <a:schemeClr val="accent1"/>
+          </a:fillRef>
+          <a:effectRef idx="2">
+            <a:schemeClr val="accent1"/>
+          </a:effectRef>
+          <a:fontRef idx="minor">
+            <a:schemeClr val="lt1"/>
+          </a:fontRef>
+        </p:style>
+        <p:txBody>
+          <a:bodyPr rtlCol="0" anchor="ctr"/>
+          <a:lstStyle/>
+          <a:p>
+            <a:pPr algn="ctr"/>
+          </a:p>
+        </p:txBody>
+      </p:sp>
+      <p:sp>
+        <p:nvSpPr>
+          <p:cNvPr id="8" name="TextBox 7"/>
+          <p:cNvSpPr txBox="1"/>
+          <p:nvPr/>
+        </p:nvSpPr>
+        <p:spPr>
+          <a:xfrm>
+            <a:off x="822960" y="1024128"/>
+            <a:ext cx="10515600" cy="777240"/>
+          </a:xfrm>
+          <a:prstGeom prst="rect">
+            <a:avLst/>
+          </a:prstGeom>
+          <a:noFill/>
+        </p:spPr>
+        <p:txBody>
+          <a:bodyPr wrap="none">
+            <a:spAutoFit/>
+          </a:bodyPr>
+          <a:lstStyle/>
+          <a:p>
+            <a:pPr>
+              <a:defRPr sz="2900" b="1">
+                <a:solidFill>
+                  <a:srgbClr val="112E4E"/>
+                </a:solidFill>
+                <a:latin typeface="Calibri"/>
+              </a:defRPr>
+            </a:pPr>
+            <a:r>
+              <a:t>Roadmap and Milestones</a:t>
+            </a:r>
+          </a:p>
+        </p:txBody>
+      </p:sp>
+      <p:sp>
+        <p:nvSpPr>
+          <p:cNvPr id="9" name="TextBox 8"/>
+          <p:cNvSpPr txBox="1"/>
+          <p:nvPr/>
+        </p:nvSpPr>
+        <p:spPr>
+          <a:xfrm>
+            <a:off x="960120" y="1828800"/>
+            <a:ext cx="10241280" cy="3017520"/>
+          </a:xfrm>
+          <a:prstGeom prst="rect">
+            <a:avLst/>
+          </a:prstGeom>
+          <a:noFill/>
+        </p:spPr>
+        <p:txBody>
+          <a:bodyPr wrap="none">
+            <a:spAutoFit/>
+          </a:bodyPr>
+          <a:lstStyle/>
+          <a:p>
+            <a:pPr>
+              <a:spcAft>
+                <a:spcPts val="500"/>
+              </a:spcAft>
+              <a:defRPr sz="1800">
+                <a:solidFill>
+                  <a:srgbClr val="1F2937"/>
+                </a:solidFill>
+                <a:latin typeface="Calibri"/>
+              </a:defRPr>
+            </a:pPr>
+            <a:r>
+              <a:t>Phase 1 (0-8 weeks): safety/privacy framework, core intents, internal pilot.</a:t>
+            </a:r>
+          </a:p>
+          <a:p>
+            <a:pPr>
+              <a:spcAft>
+                <a:spcPts val="500"/>
+              </a:spcAft>
+              <a:defRPr sz="1800">
+                <a:solidFill>
+                  <a:srgbClr val="1F2937"/>
+                </a:solidFill>
+                <a:latin typeface="Calibri"/>
+              </a:defRPr>
+            </a:pPr>
+            <a:r>
+              <a:t>Phase 2 (8-16 weeks): personalization controls, resilience, quality/bias expansion.</a:t>
+            </a:r>
+          </a:p>
+          <a:p>
+            <a:pPr>
+              <a:spcAft>
+                <a:spcPts val="500"/>
+              </a:spcAft>
+              <a:defRPr sz="1800">
+                <a:solidFill>
+                  <a:srgbClr val="1F2937"/>
+                </a:solidFill>
+                <a:latin typeface="Calibri"/>
+              </a:defRPr>
+            </a:pPr>
+            <a:r>
+              <a:t>Phase 3 (16-24 weeks): regional rollout, monitoring dashboards, incident runbooks.</a:t>
+            </a:r>
+          </a:p>
+          <a:p>
+            <a:pPr>
+              <a:spcAft>
+                <a:spcPts val="500"/>
+              </a:spcAft>
+              <a:defRPr sz="1800">
+                <a:solidFill>
+                  <a:srgbClr val="1F2937"/>
+                </a:solidFill>
+                <a:latin typeface="Calibri"/>
+              </a:defRPr>
+            </a:pPr>
+            <a:r>
+              <a:t>Launch narrative: safe, privacy-first AI assistance.</a:t>
+            </a:r>
+          </a:p>
+        </p:txBody>
+      </p:sp>
+      <p:sp>
+        <p:nvSpPr>
+          <p:cNvPr id="10" name="Rounded Rectangle 9"/>
+          <p:cNvSpPr/>
+          <p:nvPr/>
+        </p:nvSpPr>
+        <p:spPr>
+          <a:xfrm>
+            <a:off x="822960" y="5358384"/>
+            <a:ext cx="10698480" cy="512064"/>
+          </a:xfrm>
+          <a:prstGeom prst="roundRect">
+            <a:avLst/>
+          </a:prstGeom>
+          <a:solidFill>
+            <a:srgbClr val="ECFDF5"/>
+          </a:solidFill>
+          <a:ln>
+            <a:noFill/>
+          </a:ln>
+        </p:spPr>
+        <p:style>
+          <a:lnRef idx="1">
+            <a:schemeClr val="accent1"/>
+          </a:lnRef>
+          <a:fillRef idx="3">
+            <a:schemeClr val="accent1"/>
+          </a:fillRef>
+          <a:effectRef idx="2">
+            <a:schemeClr val="accent1"/>
+          </a:effectRef>
+          <a:fontRef idx="minor">
+            <a:schemeClr val="lt1"/>
+          </a:fontRef>
+        </p:style>
+        <p:txBody>
+          <a:bodyPr rtlCol="0" anchor="ctr"/>
+          <a:lstStyle/>
+          <a:p>
+            <a:pPr algn="ctr">
+              <a:defRPr sz="1250" b="1">
+                <a:solidFill>
+                  <a:srgbClr val="064E3B"/>
+                </a:solidFill>
+                <a:latin typeface="Calibri"/>
+              </a:defRPr>
+            </a:pPr>
+            <a:r>
+              <a:t>Key Takeaway: Phased delivery balances speed with safety and quality maturity.</a:t>
+            </a:r>
+          </a:p>
+        </p:txBody>
+      </p:sp>
+      <p:sp>
+        <p:nvSpPr>
+          <p:cNvPr id="11" name="TextBox 10"/>
+          <p:cNvSpPr txBox="1"/>
+          <p:nvPr/>
+        </p:nvSpPr>
+        <p:spPr>
+          <a:xfrm>
+            <a:off x="411480" y="6446520"/>
+            <a:ext cx="11247120" cy="228600"/>
+          </a:xfrm>
+          <a:prstGeom prst="rect">
+            <a:avLst/>
+          </a:prstGeom>
+          <a:noFill/>
+        </p:spPr>
+        <p:txBody>
+          <a:bodyPr wrap="none">
+            <a:spAutoFit/>
+          </a:bodyPr>
+          <a:lstStyle/>
+          <a:p>
+            <a:pPr algn="r">
+              <a:defRPr sz="1000" b="1">
+                <a:solidFill>
+                  <a:srgbClr val="64748B"/>
+                </a:solidFill>
+                <a:latin typeface="Calibri"/>
+              </a:defRPr>
+            </a:pPr>
+            <a:r>
+              <a:t>Created By : ZIA UL MUSTAFA</a:t>
+            </a:r>
+          </a:p>
+        </p:txBody>
+      </p:sp>
+    </p:spTree>
+  </p:cSld>
+  <p:clrMapOvr>
+    <a:masterClrMapping/>
+  </p:clrMapOvr>
+</p:sld>
+</file>
+
+<file path=ppt/slides/slide19.xml><?xml version="1.0" encoding="utf-8"?>
+<p:sld xmlns:a="http://schemas.openxmlformats.org/drawingml/2006/main" xmlns:p="http://schemas.openxmlformats.org/presentationml/2006/main" xmlns:r="http://schemas.openxmlformats.org/officeDocument/2006/relationships">
+  <p:cSld>
+    <p:spTree>
+      <p:nvGrpSpPr>
+        <p:cNvPr id="1" name=""/>
+        <p:cNvGrpSpPr/>
+        <p:nvPr/>
+      </p:nvGrpSpPr>
+      <p:grpSpPr/>
+      <p:sp>
+        <p:nvSpPr>
+          <p:cNvPr id="2" name="Rectangle 1"/>
+          <p:cNvSpPr/>
+          <p:nvPr/>
+        </p:nvSpPr>
+        <p:spPr>
+          <a:xfrm>
+            <a:off x="0" y="0"/>
+            <a:ext cx="9144000" cy="6858000"/>
+          </a:xfrm>
+          <a:prstGeom prst="rect">
+            <a:avLst/>
+          </a:prstGeom>
+          <a:solidFill>
+            <a:srgbClr val="F4F7FA"/>
+          </a:solidFill>
+          <a:ln>
+            <a:noFill/>
+          </a:ln>
+        </p:spPr>
+        <p:style>
+          <a:lnRef idx="1">
+            <a:schemeClr val="accent1"/>
+          </a:lnRef>
+          <a:fillRef idx="3">
+            <a:schemeClr val="accent1"/>
+          </a:fillRef>
+          <a:effectRef idx="2">
+            <a:schemeClr val="accent1"/>
+          </a:effectRef>
+          <a:fontRef idx="minor">
+            <a:schemeClr val="lt1"/>
+          </a:fontRef>
+        </p:style>
+        <p:txBody>
+          <a:bodyPr rtlCol="0" anchor="ctr"/>
+          <a:lstStyle/>
+          <a:p>
+            <a:pPr algn="ctr"/>
+          </a:p>
+        </p:txBody>
+      </p:sp>
+      <p:sp>
+        <p:nvSpPr>
+          <p:cNvPr id="3" name="Rectangle 2"/>
+          <p:cNvSpPr/>
+          <p:nvPr/>
+        </p:nvSpPr>
+        <p:spPr>
+          <a:xfrm>
+            <a:off x="0" y="0"/>
+            <a:ext cx="9144000" cy="658368"/>
+          </a:xfrm>
+          <a:prstGeom prst="rect">
+            <a:avLst/>
+          </a:prstGeom>
+          <a:solidFill>
+            <a:srgbClr val="112E4E"/>
+          </a:solidFill>
+          <a:ln>
+            <a:noFill/>
+          </a:ln>
+        </p:spPr>
+        <p:style>
+          <a:lnRef idx="1">
+            <a:schemeClr val="accent1"/>
+          </a:lnRef>
+          <a:fillRef idx="3">
+            <a:schemeClr val="accent1"/>
+          </a:fillRef>
+          <a:effectRef idx="2">
+            <a:schemeClr val="accent1"/>
+          </a:effectRef>
+          <a:fontRef idx="minor">
+            <a:schemeClr val="lt1"/>
+          </a:fontRef>
+        </p:style>
+        <p:txBody>
+          <a:bodyPr rtlCol="0" anchor="ctr"/>
+          <a:lstStyle/>
+          <a:p>
+            <a:pPr algn="ctr"/>
+          </a:p>
+        </p:txBody>
+      </p:sp>
+      <p:sp>
+        <p:nvSpPr>
+          <p:cNvPr id="4" name="TextBox 3"/>
+          <p:cNvSpPr txBox="1"/>
+          <p:nvPr/>
+        </p:nvSpPr>
+        <p:spPr>
+          <a:xfrm>
+            <a:off x="411480" y="164592"/>
+            <a:ext cx="8046720" cy="320040"/>
+          </a:xfrm>
+          <a:prstGeom prst="rect">
+            <a:avLst/>
+          </a:prstGeom>
+          <a:noFill/>
+        </p:spPr>
+        <p:txBody>
+          <a:bodyPr wrap="none">
+            <a:spAutoFit/>
+          </a:bodyPr>
+          <a:lstStyle/>
+          <a:p>
+            <a:pPr>
+              <a:defRPr sz="1200" b="1">
+                <a:solidFill>
+                  <a:srgbClr val="FFFFFF"/>
+                </a:solidFill>
+                <a:latin typeface="Calibri"/>
+              </a:defRPr>
+            </a:pPr>
+            <a:r>
+              <a:t>AI Product Proposal</a:t>
+            </a:r>
+          </a:p>
+        </p:txBody>
+      </p:sp>
+      <p:sp>
+        <p:nvSpPr>
+          <p:cNvPr id="5" name="Rounded Rectangle 4"/>
+          <p:cNvSpPr/>
+          <p:nvPr/>
+        </p:nvSpPr>
+        <p:spPr>
+          <a:xfrm>
+            <a:off x="7269481" y="128016"/>
+            <a:ext cx="1508760" cy="384048"/>
+          </a:xfrm>
+          <a:prstGeom prst="roundRect">
+            <a:avLst/>
+          </a:prstGeom>
+          <a:solidFill>
+            <a:srgbClr val="0B8174"/>
+          </a:solidFill>
+          <a:ln>
+            <a:noFill/>
+          </a:ln>
+        </p:spPr>
+        <p:style>
+          <a:lnRef idx="1">
+            <a:schemeClr val="accent1"/>
+          </a:lnRef>
+          <a:fillRef idx="3">
+            <a:schemeClr val="accent1"/>
+          </a:fillRef>
+          <a:effectRef idx="2">
+            <a:schemeClr val="accent1"/>
+          </a:effectRef>
+          <a:fontRef idx="minor">
+            <a:schemeClr val="lt1"/>
+          </a:fontRef>
+        </p:style>
+        <p:txBody>
+          <a:bodyPr rtlCol="0" anchor="ctr"/>
+          <a:lstStyle/>
+          <a:p>
+            <a:pPr algn="ctr">
+              <a:defRPr sz="1100" b="1">
+                <a:solidFill>
+                  <a:srgbClr val="FFFFFF"/>
+                </a:solidFill>
+                <a:latin typeface="Calibri"/>
+              </a:defRPr>
+            </a:pPr>
+            <a:r>
+              <a:t>19 / 20</a:t>
+            </a:r>
+          </a:p>
+        </p:txBody>
+      </p:sp>
+      <p:sp>
+        <p:nvSpPr>
+          <p:cNvPr id="6" name="Rounded Rectangle 5"/>
+          <p:cNvSpPr/>
+          <p:nvPr/>
+        </p:nvSpPr>
+        <p:spPr>
+          <a:xfrm>
+            <a:off x="411480" y="841248"/>
+            <a:ext cx="11247120" cy="5285232"/>
+          </a:xfrm>
+          <a:prstGeom prst="roundRect">
+            <a:avLst/>
+          </a:prstGeom>
+          <a:solidFill>
+            <a:srgbClr val="FFFFFF"/>
+          </a:solidFill>
+          <a:ln w="13970">
+            <a:solidFill>
+              <a:srgbClr val="D1E4F6"/>
+            </a:solidFill>
+          </a:ln>
+        </p:spPr>
+        <p:style>
+          <a:lnRef idx="1">
+            <a:schemeClr val="accent1"/>
+          </a:lnRef>
+          <a:fillRef idx="3">
+            <a:schemeClr val="accent1"/>
+          </a:fillRef>
+          <a:effectRef idx="2">
+            <a:schemeClr val="accent1"/>
+          </a:effectRef>
+          <a:fontRef idx="minor">
+            <a:schemeClr val="lt1"/>
+          </a:fontRef>
+        </p:style>
+        <p:txBody>
+          <a:bodyPr rtlCol="0" anchor="ctr"/>
+          <a:lstStyle/>
+          <a:p>
+            <a:pPr algn="ctr"/>
+          </a:p>
+        </p:txBody>
+      </p:sp>
+      <p:sp>
+        <p:nvSpPr>
+          <p:cNvPr id="7" name="Rectangle 6"/>
+          <p:cNvSpPr/>
+          <p:nvPr/>
+        </p:nvSpPr>
+        <p:spPr>
+          <a:xfrm>
+            <a:off x="621792" y="1051560"/>
+            <a:ext cx="73152" cy="4498848"/>
+          </a:xfrm>
+          <a:prstGeom prst="rect">
+            <a:avLst/>
+          </a:prstGeom>
+          <a:solidFill>
+            <a:srgbClr val="0B8174"/>
+          </a:solidFill>
+          <a:ln>
+            <a:noFill/>
+          </a:ln>
+        </p:spPr>
+        <p:style>
+          <a:lnRef idx="1">
+            <a:schemeClr val="accent1"/>
+          </a:lnRef>
+          <a:fillRef idx="3">
+            <a:schemeClr val="accent1"/>
+          </a:fillRef>
+          <a:effectRef idx="2">
+            <a:schemeClr val="accent1"/>
+          </a:effectRef>
+          <a:fontRef idx="minor">
+            <a:schemeClr val="lt1"/>
+          </a:fontRef>
+        </p:style>
+        <p:txBody>
+          <a:bodyPr rtlCol="0" anchor="ctr"/>
+          <a:lstStyle/>
+          <a:p>
+            <a:pPr algn="ctr"/>
+          </a:p>
+        </p:txBody>
+      </p:sp>
+      <p:sp>
+        <p:nvSpPr>
+          <p:cNvPr id="8" name="TextBox 7"/>
+          <p:cNvSpPr txBox="1"/>
+          <p:nvPr/>
+        </p:nvSpPr>
+        <p:spPr>
+          <a:xfrm>
+            <a:off x="822960" y="1024128"/>
+            <a:ext cx="10515600" cy="777240"/>
+          </a:xfrm>
+          <a:prstGeom prst="rect">
+            <a:avLst/>
+          </a:prstGeom>
+          <a:noFill/>
+        </p:spPr>
+        <p:txBody>
+          <a:bodyPr wrap="none">
+            <a:spAutoFit/>
+          </a:bodyPr>
+          <a:lstStyle/>
+          <a:p>
+            <a:pPr>
+              <a:defRPr sz="2900" b="1">
+                <a:solidFill>
+                  <a:srgbClr val="112E4E"/>
+                </a:solidFill>
+                <a:latin typeface="Calibri"/>
+              </a:defRPr>
+            </a:pPr>
+            <a:r>
+              <a:t>Success Metrics and KPI Targets</a:t>
+            </a:r>
+          </a:p>
+        </p:txBody>
+      </p:sp>
+      <p:sp>
+        <p:nvSpPr>
+          <p:cNvPr id="9" name="TextBox 8"/>
+          <p:cNvSpPr txBox="1"/>
+          <p:nvPr/>
+        </p:nvSpPr>
+        <p:spPr>
+          <a:xfrm>
+            <a:off x="960120" y="1828800"/>
+            <a:ext cx="10241280" cy="3017520"/>
+          </a:xfrm>
+          <a:prstGeom prst="rect">
+            <a:avLst/>
+          </a:prstGeom>
+          <a:noFill/>
+        </p:spPr>
+        <p:txBody>
+          <a:bodyPr wrap="none">
+            <a:spAutoFit/>
+          </a:bodyPr>
+          <a:lstStyle/>
+          <a:p>
+            <a:pPr>
+              <a:spcAft>
+                <a:spcPts val="500"/>
+              </a:spcAft>
+              <a:defRPr sz="1600">
+                <a:solidFill>
+                  <a:srgbClr val="1F2937"/>
+                </a:solidFill>
+                <a:latin typeface="Calibri"/>
+              </a:defRPr>
+            </a:pPr>
+            <a:r>
+              <a:t>Core metrics: task success, satisfaction, time-to-complete, trust, violations, fallback success.</a:t>
+            </a:r>
+          </a:p>
+          <a:p>
+            <a:pPr>
+              <a:spcAft>
+                <a:spcPts val="500"/>
+              </a:spcAft>
+              <a:defRPr sz="1600">
+                <a:solidFill>
+                  <a:srgbClr val="1F2937"/>
+                </a:solidFill>
+                <a:latin typeface="Calibri"/>
+              </a:defRPr>
+            </a:pPr>
+            <a:r>
+              <a:t>Pilot target: +30% voice task completion.</a:t>
+            </a:r>
+          </a:p>
+          <a:p>
+            <a:pPr>
+              <a:spcAft>
+                <a:spcPts val="500"/>
+              </a:spcAft>
+              <a:defRPr sz="1600">
+                <a:solidFill>
+                  <a:srgbClr val="1F2937"/>
+                </a:solidFill>
+                <a:latin typeface="Calibri"/>
+              </a:defRPr>
+            </a:pPr>
+            <a:r>
+              <a:t>Pilot target: -20% time-to-complete common tasks.</a:t>
+            </a:r>
+          </a:p>
+          <a:p>
+            <a:pPr>
+              <a:spcAft>
+                <a:spcPts val="500"/>
+              </a:spcAft>
+              <a:defRPr sz="1600">
+                <a:solidFill>
+                  <a:srgbClr val="1F2937"/>
+                </a:solidFill>
+                <a:latin typeface="Calibri"/>
+              </a:defRPr>
+            </a:pPr>
+            <a:r>
+              <a:t>Pilot target: +15-point satisfaction uplift among active users.</a:t>
+            </a:r>
+          </a:p>
+          <a:p>
+            <a:pPr>
+              <a:spcAft>
+                <a:spcPts val="500"/>
+              </a:spcAft>
+              <a:defRPr sz="1600">
+                <a:solidFill>
+                  <a:srgbClr val="1F2937"/>
+                </a:solidFill>
+                <a:latin typeface="Calibri"/>
+              </a:defRPr>
+            </a:pPr>
+            <a:r>
+              <a:t>Pilot target: &lt;1% critical safety/policy violation rate.</a:t>
+            </a:r>
+          </a:p>
+        </p:txBody>
+      </p:sp>
+      <p:sp>
+        <p:nvSpPr>
+          <p:cNvPr id="10" name="Rounded Rectangle 9"/>
+          <p:cNvSpPr/>
+          <p:nvPr/>
+        </p:nvSpPr>
+        <p:spPr>
+          <a:xfrm>
+            <a:off x="822960" y="5358384"/>
+            <a:ext cx="10698480" cy="512064"/>
+          </a:xfrm>
+          <a:prstGeom prst="roundRect">
+            <a:avLst/>
+          </a:prstGeom>
+          <a:solidFill>
+            <a:srgbClr val="ECFDF5"/>
+          </a:solidFill>
+          <a:ln>
+            <a:noFill/>
+          </a:ln>
+        </p:spPr>
+        <p:style>
+          <a:lnRef idx="1">
+            <a:schemeClr val="accent1"/>
+          </a:lnRef>
+          <a:fillRef idx="3">
+            <a:schemeClr val="accent1"/>
+          </a:fillRef>
+          <a:effectRef idx="2">
+            <a:schemeClr val="accent1"/>
+          </a:effectRef>
+          <a:fontRef idx="minor">
+            <a:schemeClr val="lt1"/>
+          </a:fontRef>
+        </p:style>
+        <p:txBody>
+          <a:bodyPr rtlCol="0" anchor="ctr"/>
+          <a:lstStyle/>
+          <a:p>
+            <a:pPr algn="ctr">
+              <a:defRPr sz="1250" b="1">
+                <a:solidFill>
+                  <a:srgbClr val="064E3B"/>
+                </a:solidFill>
+                <a:latin typeface="Calibri"/>
+              </a:defRPr>
+            </a:pPr>
+            <a:r>
+              <a:t>Key Takeaway: KPI targets tie product outcomes directly to launch success criteria.</a:t>
             </a:r>
           </a:p>
         </p:txBody>
@@ -5982,7 +8668,7 @@
             <a:avLst/>
           </a:prstGeom>
           <a:solidFill>
-            <a:srgbClr val="F1F5F9"/>
+            <a:srgbClr val="F4F7FA"/>
           </a:solidFill>
           <a:ln>
             <a:noFill/>
@@ -6025,7 +8711,7 @@
             <a:avLst/>
           </a:prstGeom>
           <a:solidFill>
-            <a:srgbClr val="0E2A47"/>
+            <a:srgbClr val="112E4E"/>
           </a:solidFill>
           <a:ln>
             <a:noFill/>
@@ -6062,7 +8748,7 @@
         <p:spPr>
           <a:xfrm>
             <a:off x="411480" y="164592"/>
-            <a:ext cx="7772400" cy="320040"/>
+            <a:ext cx="8046720" cy="320040"/>
           </a:xfrm>
           <a:prstGeom prst="rect">
             <a:avLst/>
@@ -6080,6 +8766,7 @@
                 <a:solidFill>
                   <a:srgbClr val="FFFFFF"/>
                 </a:solidFill>
+                <a:latin typeface="Calibri"/>
               </a:defRPr>
             </a:pPr>
             <a:r>
@@ -6096,14 +8783,14 @@
         </p:nvSpPr>
         <p:spPr>
           <a:xfrm>
-            <a:off x="7360920" y="128016"/>
-            <a:ext cx="1417320" cy="384048"/>
+            <a:off x="7269481" y="128016"/>
+            <a:ext cx="1508760" cy="384048"/>
           </a:xfrm>
           <a:prstGeom prst="roundRect">
             <a:avLst/>
           </a:prstGeom>
           <a:solidFill>
-            <a:srgbClr val="0D9488"/>
+            <a:srgbClr val="0B8174"/>
           </a:solidFill>
           <a:ln>
             <a:noFill/>
@@ -6132,10 +8819,11 @@
                 <a:solidFill>
                   <a:srgbClr val="FFFFFF"/>
                 </a:solidFill>
-              </a:defRPr>
-            </a:pPr>
-            <a:r>
-              <a:t>02 / 14</a:t>
+                <a:latin typeface="Calibri"/>
+              </a:defRPr>
+            </a:pPr>
+            <a:r>
+              <a:t>02 / 20</a:t>
             </a:r>
           </a:p>
         </p:txBody>
@@ -6148,8 +8836,8 @@
         </p:nvSpPr>
         <p:spPr>
           <a:xfrm>
-            <a:off x="411480" y="868680"/>
-            <a:ext cx="11247120" cy="5257800"/>
+            <a:off x="411480" y="841248"/>
+            <a:ext cx="11247120" cy="5285232"/>
           </a:xfrm>
           <a:prstGeom prst="roundRect">
             <a:avLst/>
@@ -6157,9 +8845,9 @@
           <a:solidFill>
             <a:srgbClr val="FFFFFF"/>
           </a:solidFill>
-          <a:ln w="15240">
+          <a:ln w="13970">
             <a:solidFill>
-              <a:srgbClr val="DBEAFE"/>
+              <a:srgbClr val="D1E4F6"/>
             </a:solidFill>
           </a:ln>
         </p:spPr>
@@ -6193,14 +8881,14 @@
         </p:nvSpPr>
         <p:spPr>
           <a:xfrm>
-            <a:off x="621792" y="1078992"/>
-            <a:ext cx="73152" cy="4434840"/>
-          </a:xfrm>
-          <a:prstGeom prst="rect">
-            <a:avLst/>
-          </a:prstGeom>
-          <a:solidFill>
-            <a:srgbClr val="0D9488"/>
+            <a:off x="621792" y="1051560"/>
+            <a:ext cx="73152" cy="4498848"/>
+          </a:xfrm>
+          <a:prstGeom prst="rect">
+            <a:avLst/>
+          </a:prstGeom>
+          <a:solidFill>
+            <a:srgbClr val="0B8174"/>
           </a:solidFill>
           <a:ln>
             <a:noFill/>
@@ -6236,8 +8924,8 @@
         </p:nvSpPr>
         <p:spPr>
           <a:xfrm>
-            <a:off x="822960" y="1078992"/>
-            <a:ext cx="10515600" cy="731520"/>
+            <a:off x="822960" y="1024128"/>
+            <a:ext cx="10515600" cy="777240"/>
           </a:xfrm>
           <a:prstGeom prst="rect">
             <a:avLst/>
@@ -6251,15 +8939,15 @@
           <a:lstStyle/>
           <a:p>
             <a:pPr>
-              <a:defRPr sz="3000" b="1">
-                <a:solidFill>
-                  <a:srgbClr val="0E2A47"/>
-                </a:solidFill>
-                <a:latin typeface="Calibri"/>
-              </a:defRPr>
-            </a:pPr>
-            <a:r>
-              <a:t>Business Context</a:t>
+              <a:defRPr sz="2900" b="1">
+                <a:solidFill>
+                  <a:srgbClr val="112E4E"/>
+                </a:solidFill>
+                <a:latin typeface="Calibri"/>
+              </a:defRPr>
+            </a:pPr>
+            <a:r>
+              <a:t>Product Definition: Problem and Current Workarounds</a:t>
             </a:r>
           </a:p>
         </p:txBody>
@@ -6273,7 +8961,7 @@
         <p:spPr>
           <a:xfrm>
             <a:off x="960120" y="1828800"/>
-            <a:ext cx="10241280" cy="3200400"/>
+            <a:ext cx="10241280" cy="3017520"/>
           </a:xfrm>
           <a:prstGeom prst="rect">
             <a:avLst/>
@@ -6288,9 +8976,9 @@
           <a:p>
             <a:pPr>
               <a:spcAft>
-                <a:spcPts val="800"/>
+                <a:spcPts val="500"/>
               </a:spcAft>
-              <a:defRPr sz="2100">
+              <a:defRPr sz="1600">
                 <a:solidFill>
                   <a:srgbClr val="1F2937"/>
                 </a:solidFill>
@@ -6298,15 +8986,15 @@
               </a:defRPr>
             </a:pPr>
             <a:r>
-              <a:t>Legacy in-car voice UX is outdated and rigid.</a:t>
+              <a:t>Problem: existing in-car voice interactions are rigid and outdated.</a:t>
             </a:r>
           </a:p>
           <a:p>
             <a:pPr>
               <a:spcAft>
-                <a:spcPts val="800"/>
+                <a:spcPts val="500"/>
               </a:spcAft>
-              <a:defRPr sz="2100">
+              <a:defRPr sz="1600">
                 <a:solidFill>
                   <a:srgbClr val="1F2937"/>
                 </a:solidFill>
@@ -6314,15 +9002,15 @@
               </a:defRPr>
             </a:pPr>
             <a:r>
-              <a:t>Target buyers increasingly expect natural conversational AI.</a:t>
+              <a:t>Current workarounds: legacy voice service, touchscreen taps, mobile assistants.</a:t>
             </a:r>
           </a:p>
           <a:p>
             <a:pPr>
               <a:spcAft>
-                <a:spcPts val="800"/>
+                <a:spcPts val="500"/>
               </a:spcAft>
-              <a:defRPr sz="2100">
+              <a:defRPr sz="1600">
                 <a:solidFill>
                   <a:srgbClr val="1F2937"/>
                 </a:solidFill>
@@ -6330,7 +9018,39 @@
               </a:defRPr>
             </a:pPr>
             <a:r>
-              <a:t>Recent connected-car privacy scandals raise trust stakes.</a:t>
+              <a:t>Pain points: weak natural language handling and poor follow-up context.</a:t>
+            </a:r>
+          </a:p>
+          <a:p>
+            <a:pPr>
+              <a:spcAft>
+                <a:spcPts val="500"/>
+              </a:spcAft>
+              <a:defRPr sz="1600">
+                <a:solidFill>
+                  <a:srgbClr val="1F2937"/>
+                </a:solidFill>
+                <a:latin typeface="Calibri"/>
+              </a:defRPr>
+            </a:pPr>
+            <a:r>
+              <a:t>Pain points: higher cognitive load and inconsistent in-drive performance.</a:t>
+            </a:r>
+          </a:p>
+          <a:p>
+            <a:pPr>
+              <a:spcAft>
+                <a:spcPts val="500"/>
+              </a:spcAft>
+              <a:defRPr sz="1600">
+                <a:solidFill>
+                  <a:srgbClr val="1F2937"/>
+                </a:solidFill>
+                <a:latin typeface="Calibri"/>
+              </a:defRPr>
+            </a:pPr>
+            <a:r>
+              <a:t>Pain points: rising customer concern around connected-car privacy practices.</a:t>
             </a:r>
           </a:p>
         </p:txBody>
@@ -6343,8 +9063,8 @@
         </p:nvSpPr>
         <p:spPr>
           <a:xfrm>
-            <a:off x="822960" y="5349240"/>
-            <a:ext cx="10698480" cy="502920"/>
+            <a:off x="822960" y="5358384"/>
+            <a:ext cx="10698480" cy="512064"/>
           </a:xfrm>
           <a:prstGeom prst="roundRect">
             <a:avLst/>
@@ -6375,7 +9095,7 @@
           <a:lstStyle/>
           <a:p>
             <a:pPr algn="ctr">
-              <a:defRPr sz="1300" b="1">
+              <a:defRPr sz="1250" b="1">
                 <a:solidFill>
                   <a:srgbClr val="064E3B"/>
                 </a:solidFill>
@@ -6383,7 +9103,500 @@
               </a:defRPr>
             </a:pPr>
             <a:r>
-              <a:t>Key Takeaway: Differentiation now depends on both experience and trust.</a:t>
+              <a:t>Key Takeaway: The status quo is fragmented, frustrating, and trust-sensitive.</a:t>
+            </a:r>
+          </a:p>
+        </p:txBody>
+      </p:sp>
+      <p:sp>
+        <p:nvSpPr>
+          <p:cNvPr id="11" name="TextBox 10"/>
+          <p:cNvSpPr txBox="1"/>
+          <p:nvPr/>
+        </p:nvSpPr>
+        <p:spPr>
+          <a:xfrm>
+            <a:off x="411480" y="6446520"/>
+            <a:ext cx="11247120" cy="228600"/>
+          </a:xfrm>
+          <a:prstGeom prst="rect">
+            <a:avLst/>
+          </a:prstGeom>
+          <a:noFill/>
+        </p:spPr>
+        <p:txBody>
+          <a:bodyPr wrap="none">
+            <a:spAutoFit/>
+          </a:bodyPr>
+          <a:lstStyle/>
+          <a:p>
+            <a:pPr algn="r">
+              <a:defRPr sz="1000" b="1">
+                <a:solidFill>
+                  <a:srgbClr val="64748B"/>
+                </a:solidFill>
+                <a:latin typeface="Calibri"/>
+              </a:defRPr>
+            </a:pPr>
+            <a:r>
+              <a:t>Created By : ZIA UL MUSTAFA</a:t>
+            </a:r>
+          </a:p>
+        </p:txBody>
+      </p:sp>
+    </p:spTree>
+  </p:cSld>
+  <p:clrMapOvr>
+    <a:masterClrMapping/>
+  </p:clrMapOvr>
+</p:sld>
+</file>
+
+<file path=ppt/slides/slide20.xml><?xml version="1.0" encoding="utf-8"?>
+<p:sld xmlns:a="http://schemas.openxmlformats.org/drawingml/2006/main" xmlns:p="http://schemas.openxmlformats.org/presentationml/2006/main" xmlns:r="http://schemas.openxmlformats.org/officeDocument/2006/relationships">
+  <p:cSld>
+    <p:spTree>
+      <p:nvGrpSpPr>
+        <p:cNvPr id="1" name=""/>
+        <p:cNvGrpSpPr/>
+        <p:nvPr/>
+      </p:nvGrpSpPr>
+      <p:grpSpPr/>
+      <p:sp>
+        <p:nvSpPr>
+          <p:cNvPr id="2" name="Rectangle 1"/>
+          <p:cNvSpPr/>
+          <p:nvPr/>
+        </p:nvSpPr>
+        <p:spPr>
+          <a:xfrm>
+            <a:off x="0" y="0"/>
+            <a:ext cx="9144000" cy="6858000"/>
+          </a:xfrm>
+          <a:prstGeom prst="rect">
+            <a:avLst/>
+          </a:prstGeom>
+          <a:solidFill>
+            <a:srgbClr val="F4F7FA"/>
+          </a:solidFill>
+          <a:ln>
+            <a:noFill/>
+          </a:ln>
+        </p:spPr>
+        <p:style>
+          <a:lnRef idx="1">
+            <a:schemeClr val="accent1"/>
+          </a:lnRef>
+          <a:fillRef idx="3">
+            <a:schemeClr val="accent1"/>
+          </a:fillRef>
+          <a:effectRef idx="2">
+            <a:schemeClr val="accent1"/>
+          </a:effectRef>
+          <a:fontRef idx="minor">
+            <a:schemeClr val="lt1"/>
+          </a:fontRef>
+        </p:style>
+        <p:txBody>
+          <a:bodyPr rtlCol="0" anchor="ctr"/>
+          <a:lstStyle/>
+          <a:p>
+            <a:pPr algn="ctr"/>
+          </a:p>
+        </p:txBody>
+      </p:sp>
+      <p:sp>
+        <p:nvSpPr>
+          <p:cNvPr id="3" name="Rectangle 2"/>
+          <p:cNvSpPr/>
+          <p:nvPr/>
+        </p:nvSpPr>
+        <p:spPr>
+          <a:xfrm>
+            <a:off x="0" y="0"/>
+            <a:ext cx="9144000" cy="658368"/>
+          </a:xfrm>
+          <a:prstGeom prst="rect">
+            <a:avLst/>
+          </a:prstGeom>
+          <a:solidFill>
+            <a:srgbClr val="112E4E"/>
+          </a:solidFill>
+          <a:ln>
+            <a:noFill/>
+          </a:ln>
+        </p:spPr>
+        <p:style>
+          <a:lnRef idx="1">
+            <a:schemeClr val="accent1"/>
+          </a:lnRef>
+          <a:fillRef idx="3">
+            <a:schemeClr val="accent1"/>
+          </a:fillRef>
+          <a:effectRef idx="2">
+            <a:schemeClr val="accent1"/>
+          </a:effectRef>
+          <a:fontRef idx="minor">
+            <a:schemeClr val="lt1"/>
+          </a:fontRef>
+        </p:style>
+        <p:txBody>
+          <a:bodyPr rtlCol="0" anchor="ctr"/>
+          <a:lstStyle/>
+          <a:p>
+            <a:pPr algn="ctr"/>
+          </a:p>
+        </p:txBody>
+      </p:sp>
+      <p:sp>
+        <p:nvSpPr>
+          <p:cNvPr id="4" name="TextBox 3"/>
+          <p:cNvSpPr txBox="1"/>
+          <p:nvPr/>
+        </p:nvSpPr>
+        <p:spPr>
+          <a:xfrm>
+            <a:off x="411480" y="164592"/>
+            <a:ext cx="8046720" cy="320040"/>
+          </a:xfrm>
+          <a:prstGeom prst="rect">
+            <a:avLst/>
+          </a:prstGeom>
+          <a:noFill/>
+        </p:spPr>
+        <p:txBody>
+          <a:bodyPr wrap="none">
+            <a:spAutoFit/>
+          </a:bodyPr>
+          <a:lstStyle/>
+          <a:p>
+            <a:pPr>
+              <a:defRPr sz="1200" b="1">
+                <a:solidFill>
+                  <a:srgbClr val="FFFFFF"/>
+                </a:solidFill>
+                <a:latin typeface="Calibri"/>
+              </a:defRPr>
+            </a:pPr>
+            <a:r>
+              <a:t>AI Product Proposal</a:t>
+            </a:r>
+          </a:p>
+        </p:txBody>
+      </p:sp>
+      <p:sp>
+        <p:nvSpPr>
+          <p:cNvPr id="5" name="Rounded Rectangle 4"/>
+          <p:cNvSpPr/>
+          <p:nvPr/>
+        </p:nvSpPr>
+        <p:spPr>
+          <a:xfrm>
+            <a:off x="7269481" y="128016"/>
+            <a:ext cx="1508760" cy="384048"/>
+          </a:xfrm>
+          <a:prstGeom prst="roundRect">
+            <a:avLst/>
+          </a:prstGeom>
+          <a:solidFill>
+            <a:srgbClr val="0B8174"/>
+          </a:solidFill>
+          <a:ln>
+            <a:noFill/>
+          </a:ln>
+        </p:spPr>
+        <p:style>
+          <a:lnRef idx="1">
+            <a:schemeClr val="accent1"/>
+          </a:lnRef>
+          <a:fillRef idx="3">
+            <a:schemeClr val="accent1"/>
+          </a:fillRef>
+          <a:effectRef idx="2">
+            <a:schemeClr val="accent1"/>
+          </a:effectRef>
+          <a:fontRef idx="minor">
+            <a:schemeClr val="lt1"/>
+          </a:fontRef>
+        </p:style>
+        <p:txBody>
+          <a:bodyPr rtlCol="0" anchor="ctr"/>
+          <a:lstStyle/>
+          <a:p>
+            <a:pPr algn="ctr">
+              <a:defRPr sz="1100" b="1">
+                <a:solidFill>
+                  <a:srgbClr val="FFFFFF"/>
+                </a:solidFill>
+                <a:latin typeface="Calibri"/>
+              </a:defRPr>
+            </a:pPr>
+            <a:r>
+              <a:t>20 / 20</a:t>
+            </a:r>
+          </a:p>
+        </p:txBody>
+      </p:sp>
+      <p:sp>
+        <p:nvSpPr>
+          <p:cNvPr id="6" name="Rounded Rectangle 5"/>
+          <p:cNvSpPr/>
+          <p:nvPr/>
+        </p:nvSpPr>
+        <p:spPr>
+          <a:xfrm>
+            <a:off x="411480" y="841248"/>
+            <a:ext cx="11247120" cy="5285232"/>
+          </a:xfrm>
+          <a:prstGeom prst="roundRect">
+            <a:avLst/>
+          </a:prstGeom>
+          <a:solidFill>
+            <a:srgbClr val="FFFFFF"/>
+          </a:solidFill>
+          <a:ln w="13970">
+            <a:solidFill>
+              <a:srgbClr val="D1E4F6"/>
+            </a:solidFill>
+          </a:ln>
+        </p:spPr>
+        <p:style>
+          <a:lnRef idx="1">
+            <a:schemeClr val="accent1"/>
+          </a:lnRef>
+          <a:fillRef idx="3">
+            <a:schemeClr val="accent1"/>
+          </a:fillRef>
+          <a:effectRef idx="2">
+            <a:schemeClr val="accent1"/>
+          </a:effectRef>
+          <a:fontRef idx="minor">
+            <a:schemeClr val="lt1"/>
+          </a:fontRef>
+        </p:style>
+        <p:txBody>
+          <a:bodyPr rtlCol="0" anchor="ctr"/>
+          <a:lstStyle/>
+          <a:p>
+            <a:pPr algn="ctr"/>
+          </a:p>
+        </p:txBody>
+      </p:sp>
+      <p:sp>
+        <p:nvSpPr>
+          <p:cNvPr id="7" name="Rectangle 6"/>
+          <p:cNvSpPr/>
+          <p:nvPr/>
+        </p:nvSpPr>
+        <p:spPr>
+          <a:xfrm>
+            <a:off x="621792" y="1051560"/>
+            <a:ext cx="73152" cy="4498848"/>
+          </a:xfrm>
+          <a:prstGeom prst="rect">
+            <a:avLst/>
+          </a:prstGeom>
+          <a:solidFill>
+            <a:srgbClr val="0B8174"/>
+          </a:solidFill>
+          <a:ln>
+            <a:noFill/>
+          </a:ln>
+        </p:spPr>
+        <p:style>
+          <a:lnRef idx="1">
+            <a:schemeClr val="accent1"/>
+          </a:lnRef>
+          <a:fillRef idx="3">
+            <a:schemeClr val="accent1"/>
+          </a:fillRef>
+          <a:effectRef idx="2">
+            <a:schemeClr val="accent1"/>
+          </a:effectRef>
+          <a:fontRef idx="minor">
+            <a:schemeClr val="lt1"/>
+          </a:fontRef>
+        </p:style>
+        <p:txBody>
+          <a:bodyPr rtlCol="0" anchor="ctr"/>
+          <a:lstStyle/>
+          <a:p>
+            <a:pPr algn="ctr"/>
+          </a:p>
+        </p:txBody>
+      </p:sp>
+      <p:sp>
+        <p:nvSpPr>
+          <p:cNvPr id="8" name="TextBox 7"/>
+          <p:cNvSpPr txBox="1"/>
+          <p:nvPr/>
+        </p:nvSpPr>
+        <p:spPr>
+          <a:xfrm>
+            <a:off x="822960" y="1024128"/>
+            <a:ext cx="10515600" cy="777240"/>
+          </a:xfrm>
+          <a:prstGeom prst="rect">
+            <a:avLst/>
+          </a:prstGeom>
+          <a:noFill/>
+        </p:spPr>
+        <p:txBody>
+          <a:bodyPr wrap="none">
+            <a:spAutoFit/>
+          </a:bodyPr>
+          <a:lstStyle/>
+          <a:p>
+            <a:pPr>
+              <a:defRPr sz="2900" b="1">
+                <a:solidFill>
+                  <a:srgbClr val="112E4E"/>
+                </a:solidFill>
+                <a:latin typeface="Calibri"/>
+              </a:defRPr>
+            </a:pPr>
+            <a:r>
+              <a:t>Ask and Next Steps</a:t>
+            </a:r>
+          </a:p>
+        </p:txBody>
+      </p:sp>
+      <p:sp>
+        <p:nvSpPr>
+          <p:cNvPr id="9" name="TextBox 8"/>
+          <p:cNvSpPr txBox="1"/>
+          <p:nvPr/>
+        </p:nvSpPr>
+        <p:spPr>
+          <a:xfrm>
+            <a:off x="960120" y="1828800"/>
+            <a:ext cx="10241280" cy="3017520"/>
+          </a:xfrm>
+          <a:prstGeom prst="rect">
+            <a:avLst/>
+          </a:prstGeom>
+          <a:noFill/>
+        </p:spPr>
+        <p:txBody>
+          <a:bodyPr wrap="none">
+            <a:spAutoFit/>
+          </a:bodyPr>
+          <a:lstStyle/>
+          <a:p>
+            <a:pPr>
+              <a:spcAft>
+                <a:spcPts val="500"/>
+              </a:spcAft>
+              <a:defRPr sz="1800">
+                <a:solidFill>
+                  <a:srgbClr val="1F2937"/>
+                </a:solidFill>
+                <a:latin typeface="Calibri"/>
+              </a:defRPr>
+            </a:pPr>
+            <a:r>
+              <a:t>Approve pilot scope, budget, and target geography.</a:t>
+            </a:r>
+          </a:p>
+          <a:p>
+            <a:pPr>
+              <a:spcAft>
+                <a:spcPts val="500"/>
+              </a:spcAft>
+              <a:defRPr sz="1800">
+                <a:solidFill>
+                  <a:srgbClr val="1F2937"/>
+                </a:solidFill>
+                <a:latin typeface="Calibri"/>
+              </a:defRPr>
+            </a:pPr>
+            <a:r>
+              <a:t>Confirm legal/privacy guardrails and governance responsibilities.</a:t>
+            </a:r>
+          </a:p>
+          <a:p>
+            <a:pPr>
+              <a:spcAft>
+                <a:spcPts val="500"/>
+              </a:spcAft>
+              <a:defRPr sz="1800">
+                <a:solidFill>
+                  <a:srgbClr val="1F2937"/>
+                </a:solidFill>
+                <a:latin typeface="Calibri"/>
+              </a:defRPr>
+            </a:pPr>
+            <a:r>
+              <a:t>Execute phase-1 pilot with explicit go/no-go decision gates.</a:t>
+            </a:r>
+          </a:p>
+          <a:p>
+            <a:pPr>
+              <a:spcAft>
+                <a:spcPts val="500"/>
+              </a:spcAft>
+              <a:defRPr sz="1800">
+                <a:solidFill>
+                  <a:srgbClr val="1F2937"/>
+                </a:solidFill>
+                <a:latin typeface="Calibri"/>
+              </a:defRPr>
+            </a:pPr>
+            <a:r>
+              <a:t>Prepare scale plan based on pilot KPI outcomes.</a:t>
+            </a:r>
+          </a:p>
+        </p:txBody>
+      </p:sp>
+      <p:sp>
+        <p:nvSpPr>
+          <p:cNvPr id="10" name="Rounded Rectangle 9"/>
+          <p:cNvSpPr/>
+          <p:nvPr/>
+        </p:nvSpPr>
+        <p:spPr>
+          <a:xfrm>
+            <a:off x="822960" y="5358384"/>
+            <a:ext cx="10698480" cy="512064"/>
+          </a:xfrm>
+          <a:prstGeom prst="roundRect">
+            <a:avLst/>
+          </a:prstGeom>
+          <a:solidFill>
+            <a:srgbClr val="ECFDF5"/>
+          </a:solidFill>
+          <a:ln>
+            <a:noFill/>
+          </a:ln>
+        </p:spPr>
+        <p:style>
+          <a:lnRef idx="1">
+            <a:schemeClr val="accent1"/>
+          </a:lnRef>
+          <a:fillRef idx="3">
+            <a:schemeClr val="accent1"/>
+          </a:fillRef>
+          <a:effectRef idx="2">
+            <a:schemeClr val="accent1"/>
+          </a:effectRef>
+          <a:fontRef idx="minor">
+            <a:schemeClr val="lt1"/>
+          </a:fontRef>
+        </p:style>
+        <p:txBody>
+          <a:bodyPr rtlCol="0" anchor="ctr"/>
+          <a:lstStyle/>
+          <a:p>
+            <a:pPr algn="ctr">
+              <a:defRPr sz="1250" b="1">
+                <a:solidFill>
+                  <a:srgbClr val="064E3B"/>
+                </a:solidFill>
+                <a:latin typeface="Calibri"/>
+              </a:defRPr>
+            </a:pPr>
+            <a:r>
+              <a:t>Key Takeaway: Decision request: approve pilot and governance to begin execution.</a:t>
             </a:r>
           </a:p>
         </p:txBody>
@@ -6457,7 +9670,7 @@
             <a:avLst/>
           </a:prstGeom>
           <a:solidFill>
-            <a:srgbClr val="F1F5F9"/>
+            <a:srgbClr val="F4F7FA"/>
           </a:solidFill>
           <a:ln>
             <a:noFill/>
@@ -6500,7 +9713,7 @@
             <a:avLst/>
           </a:prstGeom>
           <a:solidFill>
-            <a:srgbClr val="0E2A47"/>
+            <a:srgbClr val="112E4E"/>
           </a:solidFill>
           <a:ln>
             <a:noFill/>
@@ -6537,7 +9750,7 @@
         <p:spPr>
           <a:xfrm>
             <a:off x="411480" y="164592"/>
-            <a:ext cx="7772400" cy="320040"/>
+            <a:ext cx="8046720" cy="320040"/>
           </a:xfrm>
           <a:prstGeom prst="rect">
             <a:avLst/>
@@ -6555,6 +9768,7 @@
                 <a:solidFill>
                   <a:srgbClr val="FFFFFF"/>
                 </a:solidFill>
+                <a:latin typeface="Calibri"/>
               </a:defRPr>
             </a:pPr>
             <a:r>
@@ -6571,14 +9785,14 @@
         </p:nvSpPr>
         <p:spPr>
           <a:xfrm>
-            <a:off x="7360920" y="128016"/>
-            <a:ext cx="1417320" cy="384048"/>
+            <a:off x="7269481" y="128016"/>
+            <a:ext cx="1508760" cy="384048"/>
           </a:xfrm>
           <a:prstGeom prst="roundRect">
             <a:avLst/>
           </a:prstGeom>
           <a:solidFill>
-            <a:srgbClr val="0D9488"/>
+            <a:srgbClr val="0B8174"/>
           </a:solidFill>
           <a:ln>
             <a:noFill/>
@@ -6607,10 +9821,11 @@
                 <a:solidFill>
                   <a:srgbClr val="FFFFFF"/>
                 </a:solidFill>
-              </a:defRPr>
-            </a:pPr>
-            <a:r>
-              <a:t>03 / 14</a:t>
+                <a:latin typeface="Calibri"/>
+              </a:defRPr>
+            </a:pPr>
+            <a:r>
+              <a:t>03 / 20</a:t>
             </a:r>
           </a:p>
         </p:txBody>
@@ -6623,8 +9838,8 @@
         </p:nvSpPr>
         <p:spPr>
           <a:xfrm>
-            <a:off x="411480" y="868680"/>
-            <a:ext cx="11247120" cy="5257800"/>
+            <a:off x="411480" y="841248"/>
+            <a:ext cx="11247120" cy="5285232"/>
           </a:xfrm>
           <a:prstGeom prst="roundRect">
             <a:avLst/>
@@ -6632,9 +9847,9 @@
           <a:solidFill>
             <a:srgbClr val="FFFFFF"/>
           </a:solidFill>
-          <a:ln w="15240">
+          <a:ln w="13970">
             <a:solidFill>
-              <a:srgbClr val="DBEAFE"/>
+              <a:srgbClr val="D1E4F6"/>
             </a:solidFill>
           </a:ln>
         </p:spPr>
@@ -6668,14 +9883,14 @@
         </p:nvSpPr>
         <p:spPr>
           <a:xfrm>
-            <a:off x="621792" y="1078992"/>
-            <a:ext cx="73152" cy="4434840"/>
-          </a:xfrm>
-          <a:prstGeom prst="rect">
-            <a:avLst/>
-          </a:prstGeom>
-          <a:solidFill>
-            <a:srgbClr val="0D9488"/>
+            <a:off x="621792" y="1051560"/>
+            <a:ext cx="73152" cy="4498848"/>
+          </a:xfrm>
+          <a:prstGeom prst="rect">
+            <a:avLst/>
+          </a:prstGeom>
+          <a:solidFill>
+            <a:srgbClr val="0B8174"/>
           </a:solidFill>
           <a:ln>
             <a:noFill/>
@@ -6711,8 +9926,8 @@
         </p:nvSpPr>
         <p:spPr>
           <a:xfrm>
-            <a:off x="822960" y="1078992"/>
-            <a:ext cx="10515600" cy="731520"/>
+            <a:off x="822960" y="1024128"/>
+            <a:ext cx="10515600" cy="777240"/>
           </a:xfrm>
           <a:prstGeom prst="rect">
             <a:avLst/>
@@ -6726,15 +9941,15 @@
           <a:lstStyle/>
           <a:p>
             <a:pPr>
-              <a:defRPr sz="3000" b="1">
-                <a:solidFill>
-                  <a:srgbClr val="0E2A47"/>
-                </a:solidFill>
-                <a:latin typeface="Calibri"/>
-              </a:defRPr>
-            </a:pPr>
-            <a:r>
-              <a:t>Core Challenge</a:t>
+              <a:defRPr sz="2900" b="1">
+                <a:solidFill>
+                  <a:srgbClr val="112E4E"/>
+                </a:solidFill>
+                <a:latin typeface="Calibri"/>
+              </a:defRPr>
+            </a:pPr>
+            <a:r>
+              <a:t>Business Problem and Customer Need</a:t>
             </a:r>
           </a:p>
         </p:txBody>
@@ -6748,7 +9963,7 @@
         <p:spPr>
           <a:xfrm>
             <a:off x="960120" y="1828800"/>
-            <a:ext cx="10241280" cy="3200400"/>
+            <a:ext cx="10241280" cy="3017520"/>
           </a:xfrm>
           <a:prstGeom prst="rect">
             <a:avLst/>
@@ -6763,9 +9978,9 @@
           <a:p>
             <a:pPr>
               <a:spcAft>
-                <a:spcPts val="800"/>
+                <a:spcPts val="500"/>
               </a:spcAft>
-              <a:defRPr sz="2100">
+              <a:defRPr sz="1600">
                 <a:solidFill>
                   <a:srgbClr val="1F2937"/>
                 </a:solidFill>
@@ -6773,15 +9988,15 @@
               </a:defRPr>
             </a:pPr>
             <a:r>
-              <a:t>Deliver modern in-car conversational assistance without compromising safety or privacy.</a:t>
+              <a:t>Need modern, context-aware, personalized conversational experiences.</a:t>
             </a:r>
           </a:p>
           <a:p>
             <a:pPr>
               <a:spcAft>
-                <a:spcPts val="800"/>
+                <a:spcPts val="500"/>
               </a:spcAft>
-              <a:defRPr sz="2100">
+              <a:defRPr sz="1600">
                 <a:solidFill>
                   <a:srgbClr val="1F2937"/>
                 </a:solidFill>
@@ -6789,15 +10004,15 @@
               </a:defRPr>
             </a:pPr>
             <a:r>
-              <a:t>Compete for younger tech-savvy urban/suburban buyers.</a:t>
+              <a:t>Need fast and natural support for navigation, messaging, and media tasks.</a:t>
             </a:r>
           </a:p>
           <a:p>
             <a:pPr>
               <a:spcAft>
-                <a:spcPts val="800"/>
+                <a:spcPts val="500"/>
               </a:spcAft>
-              <a:defRPr sz="2100">
+              <a:defRPr sz="1600">
                 <a:solidFill>
                   <a:srgbClr val="1F2937"/>
                 </a:solidFill>
@@ -6805,7 +10020,39 @@
               </a:defRPr>
             </a:pPr>
             <a:r>
-              <a:t>Avoid product-review and privacy backlash risk.</a:t>
+              <a:t>Need useful personalization that respects privacy expectations.</a:t>
+            </a:r>
+          </a:p>
+          <a:p>
+            <a:pPr>
+              <a:spcAft>
+                <a:spcPts val="500"/>
+              </a:spcAft>
+              <a:defRPr sz="1600">
+                <a:solidFill>
+                  <a:srgbClr val="1F2937"/>
+                </a:solidFill>
+                <a:latin typeface="Calibri"/>
+              </a:defRPr>
+            </a:pPr>
+            <a:r>
+              <a:t>Need reliable behavior under variable connectivity.</a:t>
+            </a:r>
+          </a:p>
+          <a:p>
+            <a:pPr>
+              <a:spcAft>
+                <a:spcPts val="500"/>
+              </a:spcAft>
+              <a:defRPr sz="1600">
+                <a:solidFill>
+                  <a:srgbClr val="1F2937"/>
+                </a:solidFill>
+                <a:latin typeface="Calibri"/>
+              </a:defRPr>
+            </a:pPr>
+            <a:r>
+              <a:t>Need safety-first interactions that minimize distraction.</a:t>
             </a:r>
           </a:p>
         </p:txBody>
@@ -6818,8 +10065,8 @@
         </p:nvSpPr>
         <p:spPr>
           <a:xfrm>
-            <a:off x="822960" y="5349240"/>
-            <a:ext cx="10698480" cy="502920"/>
+            <a:off x="822960" y="5358384"/>
+            <a:ext cx="10698480" cy="512064"/>
           </a:xfrm>
           <a:prstGeom prst="roundRect">
             <a:avLst/>
@@ -6850,7 +10097,7 @@
           <a:lstStyle/>
           <a:p>
             <a:pPr algn="ctr">
-              <a:defRPr sz="1300" b="1">
+              <a:defRPr sz="1250" b="1">
                 <a:solidFill>
                   <a:srgbClr val="064E3B"/>
                 </a:solidFill>
@@ -6858,7 +10105,7 @@
               </a:defRPr>
             </a:pPr>
             <a:r>
-              <a:t>Key Takeaway: Safety and privacy are non-negotiable design constraints.</a:t>
+              <a:t>Key Takeaway: Customer value depends on usefulness, safety, and reliability together.</a:t>
             </a:r>
           </a:p>
         </p:txBody>
@@ -6932,7 +10179,7 @@
             <a:avLst/>
           </a:prstGeom>
           <a:solidFill>
-            <a:srgbClr val="F1F5F9"/>
+            <a:srgbClr val="F4F7FA"/>
           </a:solidFill>
           <a:ln>
             <a:noFill/>
@@ -6975,7 +10222,7 @@
             <a:avLst/>
           </a:prstGeom>
           <a:solidFill>
-            <a:srgbClr val="0E2A47"/>
+            <a:srgbClr val="112E4E"/>
           </a:solidFill>
           <a:ln>
             <a:noFill/>
@@ -7012,7 +10259,7 @@
         <p:spPr>
           <a:xfrm>
             <a:off x="411480" y="164592"/>
-            <a:ext cx="7772400" cy="320040"/>
+            <a:ext cx="8046720" cy="320040"/>
           </a:xfrm>
           <a:prstGeom prst="rect">
             <a:avLst/>
@@ -7030,6 +10277,7 @@
                 <a:solidFill>
                   <a:srgbClr val="FFFFFF"/>
                 </a:solidFill>
+                <a:latin typeface="Calibri"/>
               </a:defRPr>
             </a:pPr>
             <a:r>
@@ -7046,14 +10294,14 @@
         </p:nvSpPr>
         <p:spPr>
           <a:xfrm>
-            <a:off x="7360920" y="128016"/>
-            <a:ext cx="1417320" cy="384048"/>
+            <a:off x="7269481" y="128016"/>
+            <a:ext cx="1508760" cy="384048"/>
           </a:xfrm>
           <a:prstGeom prst="roundRect">
             <a:avLst/>
           </a:prstGeom>
           <a:solidFill>
-            <a:srgbClr val="0D9488"/>
+            <a:srgbClr val="0B8174"/>
           </a:solidFill>
           <a:ln>
             <a:noFill/>
@@ -7082,10 +10330,11 @@
                 <a:solidFill>
                   <a:srgbClr val="FFFFFF"/>
                 </a:solidFill>
-              </a:defRPr>
-            </a:pPr>
-            <a:r>
-              <a:t>04 / 14</a:t>
+                <a:latin typeface="Calibri"/>
+              </a:defRPr>
+            </a:pPr>
+            <a:r>
+              <a:t>04 / 20</a:t>
             </a:r>
           </a:p>
         </p:txBody>
@@ -7098,8 +10347,8 @@
         </p:nvSpPr>
         <p:spPr>
           <a:xfrm>
-            <a:off x="411480" y="868680"/>
-            <a:ext cx="11247120" cy="5257800"/>
+            <a:off x="411480" y="841248"/>
+            <a:ext cx="11247120" cy="5285232"/>
           </a:xfrm>
           <a:prstGeom prst="roundRect">
             <a:avLst/>
@@ -7107,9 +10356,9 @@
           <a:solidFill>
             <a:srgbClr val="FFFFFF"/>
           </a:solidFill>
-          <a:ln w="15240">
+          <a:ln w="13970">
             <a:solidFill>
-              <a:srgbClr val="DBEAFE"/>
+              <a:srgbClr val="D1E4F6"/>
             </a:solidFill>
           </a:ln>
         </p:spPr>
@@ -7143,14 +10392,14 @@
         </p:nvSpPr>
         <p:spPr>
           <a:xfrm>
-            <a:off x="621792" y="1078992"/>
-            <a:ext cx="73152" cy="4434840"/>
-          </a:xfrm>
-          <a:prstGeom prst="rect">
-            <a:avLst/>
-          </a:prstGeom>
-          <a:solidFill>
-            <a:srgbClr val="0D9488"/>
+            <a:off x="621792" y="1051560"/>
+            <a:ext cx="73152" cy="4498848"/>
+          </a:xfrm>
+          <a:prstGeom prst="rect">
+            <a:avLst/>
+          </a:prstGeom>
+          <a:solidFill>
+            <a:srgbClr val="0B8174"/>
           </a:solidFill>
           <a:ln>
             <a:noFill/>
@@ -7186,8 +10435,8 @@
         </p:nvSpPr>
         <p:spPr>
           <a:xfrm>
-            <a:off x="822960" y="1078992"/>
-            <a:ext cx="10515600" cy="731520"/>
+            <a:off x="822960" y="1024128"/>
+            <a:ext cx="10515600" cy="777240"/>
           </a:xfrm>
           <a:prstGeom prst="rect">
             <a:avLst/>
@@ -7201,15 +10450,15 @@
           <a:lstStyle/>
           <a:p>
             <a:pPr>
-              <a:defRPr sz="3000" b="1">
-                <a:solidFill>
-                  <a:srgbClr val="0E2A47"/>
-                </a:solidFill>
-                <a:latin typeface="Calibri"/>
-              </a:defRPr>
-            </a:pPr>
-            <a:r>
-              <a:t>Market Opportunity</a:t>
+              <a:defRPr sz="2900" b="1">
+                <a:solidFill>
+                  <a:srgbClr val="112E4E"/>
+                </a:solidFill>
+                <a:latin typeface="Calibri"/>
+              </a:defRPr>
+            </a:pPr>
+            <a:r>
+              <a:t>Market Landscape and Competitive Pressure</a:t>
             </a:r>
           </a:p>
         </p:txBody>
@@ -7223,7 +10472,7 @@
         <p:spPr>
           <a:xfrm>
             <a:off x="960120" y="1828800"/>
-            <a:ext cx="10241280" cy="3200400"/>
+            <a:ext cx="10241280" cy="3017520"/>
           </a:xfrm>
           <a:prstGeom prst="rect">
             <a:avLst/>
@@ -7238,9 +10487,9 @@
           <a:p>
             <a:pPr>
               <a:spcAft>
-                <a:spcPts val="800"/>
+                <a:spcPts val="500"/>
               </a:spcAft>
-              <a:defRPr sz="2100">
+              <a:defRPr sz="1800">
                 <a:solidFill>
                   <a:srgbClr val="1F2937"/>
                 </a:solidFill>
@@ -7248,15 +10497,15 @@
               </a:defRPr>
             </a:pPr>
             <a:r>
-              <a:t>25-45 metro/suburban target segment has high AI readiness.</a:t>
+              <a:t>AI assistants are becoming premium differentiators in new vehicles.</a:t>
             </a:r>
           </a:p>
           <a:p>
             <a:pPr>
               <a:spcAft>
-                <a:spcPts val="800"/>
+                <a:spcPts val="500"/>
               </a:spcAft>
-              <a:defRPr sz="2100">
+              <a:defRPr sz="1800">
                 <a:solidFill>
                   <a:srgbClr val="1F2937"/>
                 </a:solidFill>
@@ -7264,15 +10513,15 @@
               </a:defRPr>
             </a:pPr>
             <a:r>
-              <a:t>50% already use conversational AI; 98% use messaging.</a:t>
+              <a:t>Target segment (25-45 metro/suburban) expects high-quality dialogue UX.</a:t>
             </a:r>
           </a:p>
           <a:p>
             <a:pPr>
               <a:spcAft>
-                <a:spcPts val="800"/>
+                <a:spcPts val="500"/>
               </a:spcAft>
-              <a:defRPr sz="2100">
+              <a:defRPr sz="1800">
                 <a:solidFill>
                   <a:srgbClr val="1F2937"/>
                 </a:solidFill>
@@ -7280,7 +10529,23 @@
               </a:defRPr>
             </a:pPr>
             <a:r>
-              <a:t>Differentiate on both assistant quality and trust posture.</a:t>
+              <a:t>Negative press on data misuse has elevated trust and privacy scrutiny.</a:t>
+            </a:r>
+          </a:p>
+          <a:p>
+            <a:pPr>
+              <a:spcAft>
+                <a:spcPts val="500"/>
+              </a:spcAft>
+              <a:defRPr sz="1800">
+                <a:solidFill>
+                  <a:srgbClr val="1F2937"/>
+                </a:solidFill>
+                <a:latin typeface="Calibri"/>
+              </a:defRPr>
+            </a:pPr>
+            <a:r>
+              <a:t>Strategic implication: must win on experience and privacy posture simultaneously.</a:t>
             </a:r>
           </a:p>
         </p:txBody>
@@ -7293,8 +10558,8 @@
         </p:nvSpPr>
         <p:spPr>
           <a:xfrm>
-            <a:off x="822960" y="5349240"/>
-            <a:ext cx="10698480" cy="502920"/>
+            <a:off x="822960" y="5358384"/>
+            <a:ext cx="10698480" cy="512064"/>
           </a:xfrm>
           <a:prstGeom prst="roundRect">
             <a:avLst/>
@@ -7325,7 +10590,7 @@
           <a:lstStyle/>
           <a:p>
             <a:pPr algn="ctr">
-              <a:defRPr sz="1300" b="1">
+              <a:defRPr sz="1250" b="1">
                 <a:solidFill>
                   <a:srgbClr val="064E3B"/>
                 </a:solidFill>
@@ -7333,7 +10598,7 @@
               </a:defRPr>
             </a:pPr>
             <a:r>
-              <a:t>Key Takeaway: Usage patterns suggest strong adoption potential.</a:t>
+              <a:t>Key Takeaway: Competitive advantage requires both conversational quality and credible trust.</a:t>
             </a:r>
           </a:p>
         </p:txBody>
@@ -7407,7 +10672,7 @@
             <a:avLst/>
           </a:prstGeom>
           <a:solidFill>
-            <a:srgbClr val="F1F5F9"/>
+            <a:srgbClr val="F4F7FA"/>
           </a:solidFill>
           <a:ln>
             <a:noFill/>
@@ -7450,7 +10715,7 @@
             <a:avLst/>
           </a:prstGeom>
           <a:solidFill>
-            <a:srgbClr val="0E2A47"/>
+            <a:srgbClr val="112E4E"/>
           </a:solidFill>
           <a:ln>
             <a:noFill/>
@@ -7487,7 +10752,7 @@
         <p:spPr>
           <a:xfrm>
             <a:off x="411480" y="164592"/>
-            <a:ext cx="7772400" cy="320040"/>
+            <a:ext cx="8046720" cy="320040"/>
           </a:xfrm>
           <a:prstGeom prst="rect">
             <a:avLst/>
@@ -7505,6 +10770,7 @@
                 <a:solidFill>
                   <a:srgbClr val="FFFFFF"/>
                 </a:solidFill>
+                <a:latin typeface="Calibri"/>
               </a:defRPr>
             </a:pPr>
             <a:r>
@@ -7521,14 +10787,14 @@
         </p:nvSpPr>
         <p:spPr>
           <a:xfrm>
-            <a:off x="7360920" y="128016"/>
-            <a:ext cx="1417320" cy="384048"/>
+            <a:off x="7269481" y="128016"/>
+            <a:ext cx="1508760" cy="384048"/>
           </a:xfrm>
           <a:prstGeom prst="roundRect">
             <a:avLst/>
           </a:prstGeom>
           <a:solidFill>
-            <a:srgbClr val="0D9488"/>
+            <a:srgbClr val="0B8174"/>
           </a:solidFill>
           <a:ln>
             <a:noFill/>
@@ -7557,10 +10823,11 @@
                 <a:solidFill>
                   <a:srgbClr val="FFFFFF"/>
                 </a:solidFill>
-              </a:defRPr>
-            </a:pPr>
-            <a:r>
-              <a:t>05 / 14</a:t>
+                <a:latin typeface="Calibri"/>
+              </a:defRPr>
+            </a:pPr>
+            <a:r>
+              <a:t>05 / 20</a:t>
             </a:r>
           </a:p>
         </p:txBody>
@@ -7573,8 +10840,8 @@
         </p:nvSpPr>
         <p:spPr>
           <a:xfrm>
-            <a:off x="411480" y="868680"/>
-            <a:ext cx="11247120" cy="5257800"/>
+            <a:off x="411480" y="841248"/>
+            <a:ext cx="11247120" cy="5285232"/>
           </a:xfrm>
           <a:prstGeom prst="roundRect">
             <a:avLst/>
@@ -7582,9 +10849,9 @@
           <a:solidFill>
             <a:srgbClr val="FFFFFF"/>
           </a:solidFill>
-          <a:ln w="15240">
+          <a:ln w="13970">
             <a:solidFill>
-              <a:srgbClr val="DBEAFE"/>
+              <a:srgbClr val="D1E4F6"/>
             </a:solidFill>
           </a:ln>
         </p:spPr>
@@ -7618,14 +10885,14 @@
         </p:nvSpPr>
         <p:spPr>
           <a:xfrm>
-            <a:off x="621792" y="1078992"/>
-            <a:ext cx="73152" cy="4434840"/>
-          </a:xfrm>
-          <a:prstGeom prst="rect">
-            <a:avLst/>
-          </a:prstGeom>
-          <a:solidFill>
-            <a:srgbClr val="0D9488"/>
+            <a:off x="621792" y="1051560"/>
+            <a:ext cx="73152" cy="4498848"/>
+          </a:xfrm>
+          <a:prstGeom prst="rect">
+            <a:avLst/>
+          </a:prstGeom>
+          <a:solidFill>
+            <a:srgbClr val="0B8174"/>
           </a:solidFill>
           <a:ln>
             <a:noFill/>
@@ -7661,8 +10928,8 @@
         </p:nvSpPr>
         <p:spPr>
           <a:xfrm>
-            <a:off x="822960" y="1078992"/>
-            <a:ext cx="10515600" cy="731520"/>
+            <a:off x="822960" y="1024128"/>
+            <a:ext cx="10515600" cy="777240"/>
           </a:xfrm>
           <a:prstGeom prst="rect">
             <a:avLst/>
@@ -7676,15 +10943,15 @@
           <a:lstStyle/>
           <a:p>
             <a:pPr>
-              <a:defRPr sz="3000" b="1">
-                <a:solidFill>
-                  <a:srgbClr val="0E2A47"/>
-                </a:solidFill>
-                <a:latin typeface="Calibri"/>
-              </a:defRPr>
-            </a:pPr>
-            <a:r>
-              <a:t>Why LLM vs Alternatives</a:t>
+              <a:defRPr sz="2900" b="1">
+                <a:solidFill>
+                  <a:srgbClr val="112E4E"/>
+                </a:solidFill>
+                <a:latin typeface="Calibri"/>
+              </a:defRPr>
+            </a:pPr>
+            <a:r>
+              <a:t>Data-Driven Opportunity Framing</a:t>
             </a:r>
           </a:p>
         </p:txBody>
@@ -7698,7 +10965,7 @@
         <p:spPr>
           <a:xfrm>
             <a:off x="960120" y="1828800"/>
-            <a:ext cx="10241280" cy="3200400"/>
+            <a:ext cx="10241280" cy="3017520"/>
           </a:xfrm>
           <a:prstGeom prst="rect">
             <a:avLst/>
@@ -7713,9 +10980,9 @@
           <a:p>
             <a:pPr>
               <a:spcAft>
-                <a:spcPts val="800"/>
+                <a:spcPts val="500"/>
               </a:spcAft>
-              <a:defRPr sz="2100">
+              <a:defRPr sz="1800">
                 <a:solidFill>
                   <a:srgbClr val="1F2937"/>
                 </a:solidFill>
@@ -7723,15 +10990,15 @@
               </a:defRPr>
             </a:pPr>
             <a:r>
-              <a:t>LLM handles natural multi-turn conversation and long-tail requests.</a:t>
+              <a:t>98% messaging usage -&gt; strong fit for hands-free compose/summarize.</a:t>
             </a:r>
           </a:p>
           <a:p>
             <a:pPr>
               <a:spcAft>
-                <a:spcPts val="800"/>
+                <a:spcPts val="500"/>
               </a:spcAft>
-              <a:defRPr sz="2100">
+              <a:defRPr sz="1800">
                 <a:solidFill>
                   <a:srgbClr val="1F2937"/>
                 </a:solidFill>
@@ -7739,15 +11006,15 @@
               </a:defRPr>
             </a:pPr>
             <a:r>
-              <a:t>Rule trees and classic NLU are brittle for open-ended queries.</a:t>
+              <a:t>65% music streaming usage -&gt; strong demand for conversational media control.</a:t>
             </a:r>
           </a:p>
           <a:p>
             <a:pPr>
               <a:spcAft>
-                <a:spcPts val="800"/>
+                <a:spcPts val="500"/>
               </a:spcAft>
-              <a:defRPr sz="2100">
+              <a:defRPr sz="1800">
                 <a:solidFill>
                   <a:srgbClr val="1F2937"/>
                 </a:solidFill>
@@ -7755,7 +11022,23 @@
               </a:defRPr>
             </a:pPr>
             <a:r>
-              <a:t>LLM + policy + retrieval balances flexibility and control.</a:t>
+              <a:t>50% already using conversational AI -&gt; low onboarding friction.</a:t>
+            </a:r>
+          </a:p>
+          <a:p>
+            <a:pPr>
+              <a:spcAft>
+                <a:spcPts val="500"/>
+              </a:spcAft>
+              <a:defRPr sz="1800">
+                <a:solidFill>
+                  <a:srgbClr val="1F2937"/>
+                </a:solidFill>
+                <a:latin typeface="Calibri"/>
+              </a:defRPr>
+            </a:pPr>
+            <a:r>
+              <a:t>Average 15 trips/week -&gt; frequent interaction and habit-formation opportunities.</a:t>
             </a:r>
           </a:p>
         </p:txBody>
@@ -7768,8 +11051,8 @@
         </p:nvSpPr>
         <p:spPr>
           <a:xfrm>
-            <a:off x="822960" y="5349240"/>
-            <a:ext cx="10698480" cy="502920"/>
+            <a:off x="822960" y="5358384"/>
+            <a:ext cx="10698480" cy="512064"/>
           </a:xfrm>
           <a:prstGeom prst="roundRect">
             <a:avLst/>
@@ -7800,7 +11083,7 @@
           <a:lstStyle/>
           <a:p>
             <a:pPr algn="ctr">
-              <a:defRPr sz="1300" b="1">
+              <a:defRPr sz="1250" b="1">
                 <a:solidFill>
                   <a:srgbClr val="064E3B"/>
                 </a:solidFill>
@@ -7808,7 +11091,7 @@
               </a:defRPr>
             </a:pPr>
             <a:r>
-              <a:t>Key Takeaway: Hybrid LLM architecture is the best fit for quality and control.</a:t>
+              <a:t>Key Takeaway: Behavioral signals indicate high adoption potential for in-car AI copilot flows.</a:t>
             </a:r>
           </a:p>
         </p:txBody>
@@ -7882,7 +11165,7 @@
             <a:avLst/>
           </a:prstGeom>
           <a:solidFill>
-            <a:srgbClr val="F1F5F9"/>
+            <a:srgbClr val="F4F7FA"/>
           </a:solidFill>
           <a:ln>
             <a:noFill/>
@@ -7925,7 +11208,7 @@
             <a:avLst/>
           </a:prstGeom>
           <a:solidFill>
-            <a:srgbClr val="0E2A47"/>
+            <a:srgbClr val="112E4E"/>
           </a:solidFill>
           <a:ln>
             <a:noFill/>
@@ -7962,7 +11245,7 @@
         <p:spPr>
           <a:xfrm>
             <a:off x="411480" y="164592"/>
-            <a:ext cx="7772400" cy="320040"/>
+            <a:ext cx="8046720" cy="320040"/>
           </a:xfrm>
           <a:prstGeom prst="rect">
             <a:avLst/>
@@ -7980,6 +11263,7 @@
                 <a:solidFill>
                   <a:srgbClr val="FFFFFF"/>
                 </a:solidFill>
+                <a:latin typeface="Calibri"/>
               </a:defRPr>
             </a:pPr>
             <a:r>
@@ -7996,14 +11280,14 @@
         </p:nvSpPr>
         <p:spPr>
           <a:xfrm>
-            <a:off x="7360920" y="128016"/>
-            <a:ext cx="1417320" cy="384048"/>
+            <a:off x="7269481" y="128016"/>
+            <a:ext cx="1508760" cy="384048"/>
           </a:xfrm>
           <a:prstGeom prst="roundRect">
             <a:avLst/>
           </a:prstGeom>
           <a:solidFill>
-            <a:srgbClr val="0D9488"/>
+            <a:srgbClr val="0B8174"/>
           </a:solidFill>
           <a:ln>
             <a:noFill/>
@@ -8032,10 +11316,11 @@
                 <a:solidFill>
                   <a:srgbClr val="FFFFFF"/>
                 </a:solidFill>
-              </a:defRPr>
-            </a:pPr>
-            <a:r>
-              <a:t>06 / 14</a:t>
+                <a:latin typeface="Calibri"/>
+              </a:defRPr>
+            </a:pPr>
+            <a:r>
+              <a:t>06 / 20</a:t>
             </a:r>
           </a:p>
         </p:txBody>
@@ -8048,8 +11333,8 @@
         </p:nvSpPr>
         <p:spPr>
           <a:xfrm>
-            <a:off x="411480" y="868680"/>
-            <a:ext cx="11247120" cy="5257800"/>
+            <a:off x="411480" y="841248"/>
+            <a:ext cx="11247120" cy="5285232"/>
           </a:xfrm>
           <a:prstGeom prst="roundRect">
             <a:avLst/>
@@ -8057,9 +11342,9 @@
           <a:solidFill>
             <a:srgbClr val="FFFFFF"/>
           </a:solidFill>
-          <a:ln w="15240">
+          <a:ln w="13970">
             <a:solidFill>
-              <a:srgbClr val="DBEAFE"/>
+              <a:srgbClr val="D1E4F6"/>
             </a:solidFill>
           </a:ln>
         </p:spPr>
@@ -8093,14 +11378,14 @@
         </p:nvSpPr>
         <p:spPr>
           <a:xfrm>
-            <a:off x="621792" y="1078992"/>
-            <a:ext cx="73152" cy="4434840"/>
-          </a:xfrm>
-          <a:prstGeom prst="rect">
-            <a:avLst/>
-          </a:prstGeom>
-          <a:solidFill>
-            <a:srgbClr val="0D9488"/>
+            <a:off x="621792" y="1051560"/>
+            <a:ext cx="73152" cy="4498848"/>
+          </a:xfrm>
+          <a:prstGeom prst="rect">
+            <a:avLst/>
+          </a:prstGeom>
+          <a:solidFill>
+            <a:srgbClr val="0B8174"/>
           </a:solidFill>
           <a:ln>
             <a:noFill/>
@@ -8136,8 +11421,8 @@
         </p:nvSpPr>
         <p:spPr>
           <a:xfrm>
-            <a:off x="822960" y="1078992"/>
-            <a:ext cx="10515600" cy="731520"/>
+            <a:off x="822960" y="1024128"/>
+            <a:ext cx="10515600" cy="777240"/>
           </a:xfrm>
           <a:prstGeom prst="rect">
             <a:avLst/>
@@ -8151,15 +11436,15 @@
           <a:lstStyle/>
           <a:p>
             <a:pPr>
-              <a:defRPr sz="3000" b="1">
-                <a:solidFill>
-                  <a:srgbClr val="0E2A47"/>
-                </a:solidFill>
-                <a:latin typeface="Calibri"/>
-              </a:defRPr>
-            </a:pPr>
-            <a:r>
-              <a:t>Value Proposition</a:t>
+              <a:defRPr sz="2900" b="1">
+                <a:solidFill>
+                  <a:srgbClr val="112E4E"/>
+                </a:solidFill>
+                <a:latin typeface="Calibri"/>
+              </a:defRPr>
+            </a:pPr>
+            <a:r>
+              <a:t>Solution and Value Proposition</a:t>
             </a:r>
           </a:p>
         </p:txBody>
@@ -8173,7 +11458,7 @@
         <p:spPr>
           <a:xfrm>
             <a:off x="960120" y="1828800"/>
-            <a:ext cx="10241280" cy="3200400"/>
+            <a:ext cx="10241280" cy="3017520"/>
           </a:xfrm>
           <a:prstGeom prst="rect">
             <a:avLst/>
@@ -8188,9 +11473,9 @@
           <a:p>
             <a:pPr>
               <a:spcAft>
-                <a:spcPts val="800"/>
+                <a:spcPts val="500"/>
               </a:spcAft>
-              <a:defRPr sz="2100">
+              <a:defRPr sz="1600">
                 <a:solidFill>
                   <a:srgbClr val="1F2937"/>
                 </a:solidFill>
@@ -8198,15 +11483,15 @@
               </a:defRPr>
             </a:pPr>
             <a:r>
-              <a:t>Faster and more natural in-car task completion.</a:t>
+              <a:t>TastyDrive Assistant: privacy-first, safety-gated in-car AI copilot.</a:t>
             </a:r>
           </a:p>
           <a:p>
             <a:pPr>
               <a:spcAft>
-                <a:spcPts val="800"/>
+                <a:spcPts val="500"/>
               </a:spcAft>
-              <a:defRPr sz="2100">
+              <a:defRPr sz="1600">
                 <a:solidFill>
                   <a:srgbClr val="1F2937"/>
                 </a:solidFill>
@@ -8214,15 +11499,15 @@
               </a:defRPr>
             </a:pPr>
             <a:r>
-              <a:t>Lower cognitive load through context-aware interactions.</a:t>
+              <a:t>Hybrid edge safety logic + cloud LLM intelligence for natural conversations.</a:t>
             </a:r>
           </a:p>
           <a:p>
             <a:pPr>
               <a:spcAft>
-                <a:spcPts val="800"/>
+                <a:spcPts val="500"/>
               </a:spcAft>
-              <a:defRPr sz="2100">
+              <a:defRPr sz="1600">
                 <a:solidFill>
                   <a:srgbClr val="1F2937"/>
                 </a:solidFill>
@@ -8230,7 +11515,39 @@
               </a:defRPr>
             </a:pPr>
             <a:r>
-              <a:t>Privacy-first design builds trust and protects brand equity.</a:t>
+              <a:t>Driving-mode constraints and consent-based personalization by design.</a:t>
+            </a:r>
+          </a:p>
+          <a:p>
+            <a:pPr>
+              <a:spcAft>
+                <a:spcPts val="500"/>
+              </a:spcAft>
+              <a:defRPr sz="1600">
+                <a:solidFill>
+                  <a:srgbClr val="1F2937"/>
+                </a:solidFill>
+                <a:latin typeface="Calibri"/>
+              </a:defRPr>
+            </a:pPr>
+            <a:r>
+              <a:t>Customer value: fewer taps, lower cognitive load, better guidance.</a:t>
+            </a:r>
+          </a:p>
+          <a:p>
+            <a:pPr>
+              <a:spcAft>
+                <a:spcPts val="500"/>
+              </a:spcAft>
+              <a:defRPr sz="1600">
+                <a:solidFill>
+                  <a:srgbClr val="1F2937"/>
+                </a:solidFill>
+                <a:latin typeface="Calibri"/>
+              </a:defRPr>
+            </a:pPr>
+            <a:r>
+              <a:t>Business value: stronger differentiation, engagement, and loyalty.</a:t>
             </a:r>
           </a:p>
         </p:txBody>
@@ -8243,8 +11560,8 @@
         </p:nvSpPr>
         <p:spPr>
           <a:xfrm>
-            <a:off x="822960" y="5349240"/>
-            <a:ext cx="10698480" cy="502920"/>
+            <a:off x="822960" y="5358384"/>
+            <a:ext cx="10698480" cy="512064"/>
           </a:xfrm>
           <a:prstGeom prst="roundRect">
             <a:avLst/>
@@ -8275,7 +11592,7 @@
           <a:lstStyle/>
           <a:p>
             <a:pPr algn="ctr">
-              <a:defRPr sz="1300" b="1">
+              <a:defRPr sz="1250" b="1">
                 <a:solidFill>
                   <a:srgbClr val="064E3B"/>
                 </a:solidFill>
@@ -8283,7 +11600,7 @@
               </a:defRPr>
             </a:pPr>
             <a:r>
-              <a:t>Key Takeaway: Customer utility and brand trust improve together.</a:t>
+              <a:t>Key Takeaway: The solution improves both customer utility and brand trust.</a:t>
             </a:r>
           </a:p>
         </p:txBody>
@@ -8357,7 +11674,7 @@
             <a:avLst/>
           </a:prstGeom>
           <a:solidFill>
-            <a:srgbClr val="F1F5F9"/>
+            <a:srgbClr val="F4F7FA"/>
           </a:solidFill>
           <a:ln>
             <a:noFill/>
@@ -8400,7 +11717,7 @@
             <a:avLst/>
           </a:prstGeom>
           <a:solidFill>
-            <a:srgbClr val="0E2A47"/>
+            <a:srgbClr val="112E4E"/>
           </a:solidFill>
           <a:ln>
             <a:noFill/>
@@ -8437,7 +11754,7 @@
         <p:spPr>
           <a:xfrm>
             <a:off x="411480" y="164592"/>
-            <a:ext cx="7772400" cy="320040"/>
+            <a:ext cx="8046720" cy="320040"/>
           </a:xfrm>
           <a:prstGeom prst="rect">
             <a:avLst/>
@@ -8455,6 +11772,7 @@
                 <a:solidFill>
                   <a:srgbClr val="FFFFFF"/>
                 </a:solidFill>
+                <a:latin typeface="Calibri"/>
               </a:defRPr>
             </a:pPr>
             <a:r>
@@ -8471,14 +11789,14 @@
         </p:nvSpPr>
         <p:spPr>
           <a:xfrm>
-            <a:off x="7360920" y="128016"/>
-            <a:ext cx="1417320" cy="384048"/>
+            <a:off x="7269481" y="128016"/>
+            <a:ext cx="1508760" cy="384048"/>
           </a:xfrm>
           <a:prstGeom prst="roundRect">
             <a:avLst/>
           </a:prstGeom>
           <a:solidFill>
-            <a:srgbClr val="0D9488"/>
+            <a:srgbClr val="0B8174"/>
           </a:solidFill>
           <a:ln>
             <a:noFill/>
@@ -8507,10 +11825,11 @@
                 <a:solidFill>
                   <a:srgbClr val="FFFFFF"/>
                 </a:solidFill>
-              </a:defRPr>
-            </a:pPr>
-            <a:r>
-              <a:t>07 / 14</a:t>
+                <a:latin typeface="Calibri"/>
+              </a:defRPr>
+            </a:pPr>
+            <a:r>
+              <a:t>07 / 20</a:t>
             </a:r>
           </a:p>
         </p:txBody>
@@ -8523,8 +11842,8 @@
         </p:nvSpPr>
         <p:spPr>
           <a:xfrm>
-            <a:off x="411480" y="868680"/>
-            <a:ext cx="11247120" cy="5257800"/>
+            <a:off x="411480" y="841248"/>
+            <a:ext cx="11247120" cy="5285232"/>
           </a:xfrm>
           <a:prstGeom prst="roundRect">
             <a:avLst/>
@@ -8532,9 +11851,9 @@
           <a:solidFill>
             <a:srgbClr val="FFFFFF"/>
           </a:solidFill>
-          <a:ln w="15240">
+          <a:ln w="13970">
             <a:solidFill>
-              <a:srgbClr val="DBEAFE"/>
+              <a:srgbClr val="D1E4F6"/>
             </a:solidFill>
           </a:ln>
         </p:spPr>
@@ -8568,14 +11887,14 @@
         </p:nvSpPr>
         <p:spPr>
           <a:xfrm>
-            <a:off x="621792" y="1078992"/>
-            <a:ext cx="73152" cy="4434840"/>
-          </a:xfrm>
-          <a:prstGeom prst="rect">
-            <a:avLst/>
-          </a:prstGeom>
-          <a:solidFill>
-            <a:srgbClr val="0D9488"/>
+            <a:off x="621792" y="1051560"/>
+            <a:ext cx="73152" cy="4498848"/>
+          </a:xfrm>
+          <a:prstGeom prst="rect">
+            <a:avLst/>
+          </a:prstGeom>
+          <a:solidFill>
+            <a:srgbClr val="0B8174"/>
           </a:solidFill>
           <a:ln>
             <a:noFill/>
@@ -8611,8 +11930,8 @@
         </p:nvSpPr>
         <p:spPr>
           <a:xfrm>
-            <a:off x="822960" y="1078992"/>
-            <a:ext cx="10515600" cy="731520"/>
+            <a:off x="822960" y="1024128"/>
+            <a:ext cx="10515600" cy="777240"/>
           </a:xfrm>
           <a:prstGeom prst="rect">
             <a:avLst/>
@@ -8626,15 +11945,15 @@
           <a:lstStyle/>
           <a:p>
             <a:pPr>
-              <a:defRPr sz="3000" b="1">
-                <a:solidFill>
-                  <a:srgbClr val="0E2A47"/>
-                </a:solidFill>
-                <a:latin typeface="Calibri"/>
-              </a:defRPr>
-            </a:pPr>
-            <a:r>
-              <a:t>System Architecture</a:t>
+              <a:defRPr sz="2900" b="1">
+                <a:solidFill>
+                  <a:srgbClr val="112E4E"/>
+                </a:solidFill>
+                <a:latin typeface="Calibri"/>
+              </a:defRPr>
+            </a:pPr>
+            <a:r>
+              <a:t>Why LLM Is the Best Approach</a:t>
             </a:r>
           </a:p>
         </p:txBody>
@@ -8648,7 +11967,7 @@
         <p:spPr>
           <a:xfrm>
             <a:off x="960120" y="1828800"/>
-            <a:ext cx="10241280" cy="3200400"/>
+            <a:ext cx="10241280" cy="3017520"/>
           </a:xfrm>
           <a:prstGeom prst="rect">
             <a:avLst/>
@@ -8663,9 +11982,9 @@
           <a:p>
             <a:pPr>
               <a:spcAft>
-                <a:spcPts val="800"/>
+                <a:spcPts val="500"/>
               </a:spcAft>
-              <a:defRPr sz="2100">
+              <a:defRPr sz="1600">
                 <a:solidFill>
                   <a:srgbClr val="1F2937"/>
                 </a:solidFill>
@@ -8673,15 +11992,15 @@
               </a:defRPr>
             </a:pPr>
             <a:r>
-              <a:t>Hybrid edge + cloud architecture.</a:t>
+              <a:t>Supports diverse natural-language requests across key in-car tasks.</a:t>
             </a:r>
           </a:p>
           <a:p>
             <a:pPr>
               <a:spcAft>
-                <a:spcPts val="800"/>
+                <a:spcPts val="500"/>
               </a:spcAft>
-              <a:defRPr sz="2100">
+              <a:defRPr sz="1600">
                 <a:solidFill>
                   <a:srgbClr val="1F2937"/>
                 </a:solidFill>
@@ -8689,15 +12008,15 @@
               </a:defRPr>
             </a:pPr>
             <a:r>
-              <a:t>Edge: safety gate, privacy filter, offline fallback intents.</a:t>
+              <a:t>Handles multi-turn context and follow-up clarifications naturally.</a:t>
             </a:r>
           </a:p>
           <a:p>
             <a:pPr>
               <a:spcAft>
-                <a:spcPts val="800"/>
+                <a:spcPts val="500"/>
               </a:spcAft>
-              <a:defRPr sz="2100">
+              <a:defRPr sz="1600">
                 <a:solidFill>
                   <a:srgbClr val="1F2937"/>
                 </a:solidFill>
@@ -8705,7 +12024,39 @@
               </a:defRPr>
             </a:pPr>
             <a:r>
-              <a:t>Cloud: orchestrator, RAG retrieval, private LLM endpoint, monitoring.</a:t>
+              <a:t>Enables personalization from approved context signals.</a:t>
+            </a:r>
+          </a:p>
+          <a:p>
+            <a:pPr>
+              <a:spcAft>
+                <a:spcPts val="500"/>
+              </a:spcAft>
+              <a:defRPr sz="1600">
+                <a:solidFill>
+                  <a:srgbClr val="1F2937"/>
+                </a:solidFill>
+                <a:latin typeface="Calibri"/>
+              </a:defRPr>
+            </a:pPr>
+            <a:r>
+              <a:t>Adapts faster than rule trees for long-tail phrasing variation.</a:t>
+            </a:r>
+          </a:p>
+          <a:p>
+            <a:pPr>
+              <a:spcAft>
+                <a:spcPts val="500"/>
+              </a:spcAft>
+              <a:defRPr sz="1600">
+                <a:solidFill>
+                  <a:srgbClr val="1F2937"/>
+                </a:solidFill>
+                <a:latin typeface="Calibri"/>
+              </a:defRPr>
+            </a:pPr>
+            <a:r>
+              <a:t>LLM + policy + retrieval balances flexibility and controllability.</a:t>
             </a:r>
           </a:p>
         </p:txBody>
@@ -8718,8 +12069,8 @@
         </p:nvSpPr>
         <p:spPr>
           <a:xfrm>
-            <a:off x="822960" y="5349240"/>
-            <a:ext cx="10698480" cy="502920"/>
+            <a:off x="822960" y="5358384"/>
+            <a:ext cx="10698480" cy="512064"/>
           </a:xfrm>
           <a:prstGeom prst="roundRect">
             <a:avLst/>
@@ -8750,7 +12101,7 @@
           <a:lstStyle/>
           <a:p>
             <a:pPr algn="ctr">
-              <a:defRPr sz="1300" b="1">
+              <a:defRPr sz="1250" b="1">
                 <a:solidFill>
                   <a:srgbClr val="064E3B"/>
                 </a:solidFill>
@@ -8758,7 +12109,7 @@
               </a:defRPr>
             </a:pPr>
             <a:r>
-              <a:t>Key Takeaway: Edge handles safety; cloud handles intelligence.</a:t>
+              <a:t>Key Takeaway: LLM capability is necessary to meet modern in-car UX expectations.</a:t>
             </a:r>
           </a:p>
         </p:txBody>
@@ -8832,7 +12183,7 @@
             <a:avLst/>
           </a:prstGeom>
           <a:solidFill>
-            <a:srgbClr val="F1F5F9"/>
+            <a:srgbClr val="F4F7FA"/>
           </a:solidFill>
           <a:ln>
             <a:noFill/>
@@ -8875,7 +12226,7 @@
             <a:avLst/>
           </a:prstGeom>
           <a:solidFill>
-            <a:srgbClr val="0E2A47"/>
+            <a:srgbClr val="112E4E"/>
           </a:solidFill>
           <a:ln>
             <a:noFill/>
@@ -8912,7 +12263,7 @@
         <p:spPr>
           <a:xfrm>
             <a:off x="411480" y="164592"/>
-            <a:ext cx="7772400" cy="320040"/>
+            <a:ext cx="8046720" cy="320040"/>
           </a:xfrm>
           <a:prstGeom prst="rect">
             <a:avLst/>
@@ -8930,6 +12281,7 @@
                 <a:solidFill>
                   <a:srgbClr val="FFFFFF"/>
                 </a:solidFill>
+                <a:latin typeface="Calibri"/>
               </a:defRPr>
             </a:pPr>
             <a:r>
@@ -8946,14 +12298,14 @@
         </p:nvSpPr>
         <p:spPr>
           <a:xfrm>
-            <a:off x="7360920" y="128016"/>
-            <a:ext cx="1417320" cy="384048"/>
+            <a:off x="7269481" y="128016"/>
+            <a:ext cx="1508760" cy="384048"/>
           </a:xfrm>
           <a:prstGeom prst="roundRect">
             <a:avLst/>
           </a:prstGeom>
           <a:solidFill>
-            <a:srgbClr val="0D9488"/>
+            <a:srgbClr val="0B8174"/>
           </a:solidFill>
           <a:ln>
             <a:noFill/>
@@ -8982,10 +12334,11 @@
                 <a:solidFill>
                   <a:srgbClr val="FFFFFF"/>
                 </a:solidFill>
-              </a:defRPr>
-            </a:pPr>
-            <a:r>
-              <a:t>08 / 14</a:t>
+                <a:latin typeface="Calibri"/>
+              </a:defRPr>
+            </a:pPr>
+            <a:r>
+              <a:t>08 / 20</a:t>
             </a:r>
           </a:p>
         </p:txBody>
@@ -8998,8 +12351,8 @@
         </p:nvSpPr>
         <p:spPr>
           <a:xfrm>
-            <a:off x="411480" y="868680"/>
-            <a:ext cx="11247120" cy="5257800"/>
+            <a:off x="411480" y="841248"/>
+            <a:ext cx="11247120" cy="5285232"/>
           </a:xfrm>
           <a:prstGeom prst="roundRect">
             <a:avLst/>
@@ -9007,9 +12360,9 @@
           <a:solidFill>
             <a:srgbClr val="FFFFFF"/>
           </a:solidFill>
-          <a:ln w="15240">
+          <a:ln w="13970">
             <a:solidFill>
-              <a:srgbClr val="DBEAFE"/>
+              <a:srgbClr val="D1E4F6"/>
             </a:solidFill>
           </a:ln>
         </p:spPr>
@@ -9043,14 +12396,14 @@
         </p:nvSpPr>
         <p:spPr>
           <a:xfrm>
-            <a:off x="621792" y="1078992"/>
-            <a:ext cx="73152" cy="4434840"/>
-          </a:xfrm>
-          <a:prstGeom prst="rect">
-            <a:avLst/>
-          </a:prstGeom>
-          <a:solidFill>
-            <a:srgbClr val="0D9488"/>
+            <a:off x="621792" y="1051560"/>
+            <a:ext cx="73152" cy="4498848"/>
+          </a:xfrm>
+          <a:prstGeom prst="rect">
+            <a:avLst/>
+          </a:prstGeom>
+          <a:solidFill>
+            <a:srgbClr val="0B8174"/>
           </a:solidFill>
           <a:ln>
             <a:noFill/>
@@ -9086,8 +12439,8 @@
         </p:nvSpPr>
         <p:spPr>
           <a:xfrm>
-            <a:off x="822960" y="1078992"/>
-            <a:ext cx="10515600" cy="731520"/>
+            <a:off x="822960" y="1024128"/>
+            <a:ext cx="10515600" cy="777240"/>
           </a:xfrm>
           <a:prstGeom prst="rect">
             <a:avLst/>
@@ -9101,15 +12454,15 @@
           <a:lstStyle/>
           <a:p>
             <a:pPr>
-              <a:defRPr sz="3000" b="1">
-                <a:solidFill>
-                  <a:srgbClr val="0E2A47"/>
-                </a:solidFill>
-                <a:latin typeface="Calibri"/>
-              </a:defRPr>
-            </a:pPr>
-            <a:r>
-              <a:t>Scalability, Security, Efficiency</a:t>
+              <a:defRPr sz="2900" b="1">
+                <a:solidFill>
+                  <a:srgbClr val="112E4E"/>
+                </a:solidFill>
+                <a:latin typeface="Calibri"/>
+              </a:defRPr>
+            </a:pPr>
+            <a:r>
+              <a:t>LLM vs Alternatives</a:t>
             </a:r>
           </a:p>
         </p:txBody>
@@ -9123,7 +12476,7 @@
         <p:spPr>
           <a:xfrm>
             <a:off x="960120" y="1828800"/>
-            <a:ext cx="10241280" cy="3200400"/>
+            <a:ext cx="10241280" cy="3017520"/>
           </a:xfrm>
           <a:prstGeom prst="rect">
             <a:avLst/>
@@ -9138,9 +12491,9 @@
           <a:p>
             <a:pPr>
               <a:spcAft>
-                <a:spcPts val="800"/>
+                <a:spcPts val="500"/>
               </a:spcAft>
-              <a:defRPr sz="2100">
+              <a:defRPr sz="1800">
                 <a:solidFill>
                   <a:srgbClr val="1F2937"/>
                 </a:solidFill>
@@ -9148,15 +12501,15 @@
               </a:defRPr>
             </a:pPr>
             <a:r>
-              <a:t>Regional autoscaling and resilient offline fallback.</a:t>
+              <a:t>Rule-based assistant: predictable for narrow commands, but rigid at scale.</a:t>
             </a:r>
           </a:p>
           <a:p>
             <a:pPr>
               <a:spcAft>
-                <a:spcPts val="800"/>
+                <a:spcPts val="500"/>
               </a:spcAft>
-              <a:defRPr sz="2100">
+              <a:defRPr sz="1800">
                 <a:solidFill>
                   <a:srgbClr val="1F2937"/>
                 </a:solidFill>
@@ -9164,15 +12517,15 @@
               </a:defRPr>
             </a:pPr>
             <a:r>
-              <a:t>Consent-gated personalization and redaction controls.</a:t>
+              <a:t>Traditional NLU intent/slot: lower cost for simple flows, weak on open queries.</a:t>
             </a:r>
           </a:p>
           <a:p>
             <a:pPr>
               <a:spcAft>
-                <a:spcPts val="800"/>
+                <a:spcPts val="500"/>
               </a:spcAft>
-              <a:defRPr sz="2100">
+              <a:defRPr sz="1800">
                 <a:solidFill>
                   <a:srgbClr val="1F2937"/>
                 </a:solidFill>
@@ -9180,7 +12533,23 @@
               </a:defRPr>
             </a:pPr>
             <a:r>
-              <a:t>Model routing and token budgets for cost/performance.</a:t>
+              <a:t>LLM-centric hybrid: best conversational quality and long-tail coverage.</a:t>
+            </a:r>
+          </a:p>
+          <a:p>
+            <a:pPr>
+              <a:spcAft>
+                <a:spcPts val="500"/>
+              </a:spcAft>
+              <a:defRPr sz="1800">
+                <a:solidFill>
+                  <a:srgbClr val="1F2937"/>
+                </a:solidFill>
+                <a:latin typeface="Calibri"/>
+              </a:defRPr>
+            </a:pPr>
+            <a:r>
+              <a:t>Tradeoff: LLM approach requires robust safety, privacy, and cost controls.</a:t>
             </a:r>
           </a:p>
         </p:txBody>
@@ -9193,8 +12562,8 @@
         </p:nvSpPr>
         <p:spPr>
           <a:xfrm>
-            <a:off x="822960" y="5349240"/>
-            <a:ext cx="10698480" cy="502920"/>
+            <a:off x="822960" y="5358384"/>
+            <a:ext cx="10698480" cy="512064"/>
           </a:xfrm>
           <a:prstGeom prst="roundRect">
             <a:avLst/>
@@ -9225,7 +12594,7 @@
           <a:lstStyle/>
           <a:p>
             <a:pPr algn="ctr">
-              <a:defRPr sz="1300" b="1">
+              <a:defRPr sz="1250" b="1">
                 <a:solidFill>
                   <a:srgbClr val="064E3B"/>
                 </a:solidFill>
@@ -9233,7 +12602,7 @@
               </a:defRPr>
             </a:pPr>
             <a:r>
-              <a:t>Key Takeaway: Scalable operations with strict governance controls.</a:t>
+              <a:t>Key Takeaway: Hybrid LLM architecture offers best experience with manageable governance overhead.</a:t>
             </a:r>
           </a:p>
         </p:txBody>
@@ -9307,7 +12676,7 @@
             <a:avLst/>
           </a:prstGeom>
           <a:solidFill>
-            <a:srgbClr val="F1F5F9"/>
+            <a:srgbClr val="F4F7FA"/>
           </a:solidFill>
           <a:ln>
             <a:noFill/>
@@ -9350,7 +12719,7 @@
             <a:avLst/>
           </a:prstGeom>
           <a:solidFill>
-            <a:srgbClr val="0E2A47"/>
+            <a:srgbClr val="112E4E"/>
           </a:solidFill>
           <a:ln>
             <a:noFill/>
@@ -9387,7 +12756,7 @@
         <p:spPr>
           <a:xfrm>
             <a:off x="411480" y="164592"/>
-            <a:ext cx="7772400" cy="320040"/>
+            <a:ext cx="8046720" cy="320040"/>
           </a:xfrm>
           <a:prstGeom prst="rect">
             <a:avLst/>
@@ -9405,6 +12774,7 @@
                 <a:solidFill>
                   <a:srgbClr val="FFFFFF"/>
                 </a:solidFill>
+                <a:latin typeface="Calibri"/>
               </a:defRPr>
             </a:pPr>
             <a:r>
@@ -9421,14 +12791,14 @@
         </p:nvSpPr>
         <p:spPr>
           <a:xfrm>
-            <a:off x="7360920" y="128016"/>
-            <a:ext cx="1417320" cy="384048"/>
+            <a:off x="7269481" y="128016"/>
+            <a:ext cx="1508760" cy="384048"/>
           </a:xfrm>
           <a:prstGeom prst="roundRect">
             <a:avLst/>
           </a:prstGeom>
           <a:solidFill>
-            <a:srgbClr val="0D9488"/>
+            <a:srgbClr val="0B8174"/>
           </a:solidFill>
           <a:ln>
             <a:noFill/>
@@ -9457,10 +12827,11 @@
                 <a:solidFill>
                   <a:srgbClr val="FFFFFF"/>
                 </a:solidFill>
-              </a:defRPr>
-            </a:pPr>
-            <a:r>
-              <a:t>09 / 14</a:t>
+                <a:latin typeface="Calibri"/>
+              </a:defRPr>
+            </a:pPr>
+            <a:r>
+              <a:t>09 / 20</a:t>
             </a:r>
           </a:p>
         </p:txBody>
@@ -9473,8 +12844,8 @@
         </p:nvSpPr>
         <p:spPr>
           <a:xfrm>
-            <a:off x="411480" y="868680"/>
-            <a:ext cx="11247120" cy="5257800"/>
+            <a:off x="411480" y="841248"/>
+            <a:ext cx="11247120" cy="5285232"/>
           </a:xfrm>
           <a:prstGeom prst="roundRect">
             <a:avLst/>
@@ -9482,9 +12853,9 @@
           <a:solidFill>
             <a:srgbClr val="FFFFFF"/>
           </a:solidFill>
-          <a:ln w="15240">
+          <a:ln w="13970">
             <a:solidFill>
-              <a:srgbClr val="DBEAFE"/>
+              <a:srgbClr val="D1E4F6"/>
             </a:solidFill>
           </a:ln>
         </p:spPr>
@@ -9518,14 +12889,14 @@
         </p:nvSpPr>
         <p:spPr>
           <a:xfrm>
-            <a:off x="621792" y="1078992"/>
-            <a:ext cx="73152" cy="4434840"/>
-          </a:xfrm>
-          <a:prstGeom prst="rect">
-            <a:avLst/>
-          </a:prstGeom>
-          <a:solidFill>
-            <a:srgbClr val="0D9488"/>
+            <a:off x="621792" y="1051560"/>
+            <a:ext cx="73152" cy="4498848"/>
+          </a:xfrm>
+          <a:prstGeom prst="rect">
+            <a:avLst/>
+          </a:prstGeom>
+          <a:solidFill>
+            <a:srgbClr val="0B8174"/>
           </a:solidFill>
           <a:ln>
             <a:noFill/>
@@ -9561,8 +12932,8 @@
         </p:nvSpPr>
         <p:spPr>
           <a:xfrm>
-            <a:off x="822960" y="1078992"/>
-            <a:ext cx="10515600" cy="731520"/>
+            <a:off x="822960" y="1024128"/>
+            <a:ext cx="10515600" cy="777240"/>
           </a:xfrm>
           <a:prstGeom prst="rect">
             <a:avLst/>
@@ -9576,15 +12947,15 @@
           <a:lstStyle/>
           <a:p>
             <a:pPr>
-              <a:defRPr sz="3000" b="1">
-                <a:solidFill>
-                  <a:srgbClr val="0E2A47"/>
-                </a:solidFill>
-                <a:latin typeface="Calibri"/>
-              </a:defRPr>
-            </a:pPr>
-            <a:r>
-              <a:t>LLM Configuration</a:t>
+              <a:defRPr sz="2900" b="1">
+                <a:solidFill>
+                  <a:srgbClr val="112E4E"/>
+                </a:solidFill>
+                <a:latin typeface="Calibri"/>
+              </a:defRPr>
+            </a:pPr>
+            <a:r>
+              <a:t>System Architecture Overview</a:t>
             </a:r>
           </a:p>
         </p:txBody>
@@ -9598,7 +12969,7 @@
         <p:spPr>
           <a:xfrm>
             <a:off x="960120" y="1828800"/>
-            <a:ext cx="10241280" cy="3200400"/>
+            <a:ext cx="10241280" cy="3017520"/>
           </a:xfrm>
           <a:prstGeom prst="rect">
             <a:avLst/>
@@ -9613,9 +12984,9 @@
           <a:p>
             <a:pPr>
               <a:spcAft>
-                <a:spcPts val="800"/>
+                <a:spcPts val="500"/>
               </a:spcAft>
-              <a:defRPr sz="2100">
+              <a:defRPr sz="1600">
                 <a:solidFill>
                   <a:srgbClr val="1F2937"/>
                 </a:solidFill>
@@ -9623,15 +12994,15 @@
               </a:defRPr>
             </a:pPr>
             <a:r>
-              <a:t>Deployment: edge safety runtime + private cloud endpoint.</a:t>
+              <a:t>Hybrid edge+cloud pattern with safety and privacy guardrails.</a:t>
             </a:r>
           </a:p>
           <a:p>
             <a:pPr>
               <a:spcAft>
-                <a:spcPts val="800"/>
+                <a:spcPts val="500"/>
               </a:spcAft>
-              <a:defRPr sz="2100">
+              <a:defRPr sz="1600">
                 <a:solidFill>
                   <a:srgbClr val="1F2937"/>
                 </a:solidFill>
@@ -9639,15 +13010,15 @@
               </a:defRPr>
             </a:pPr>
             <a:r>
-              <a:t>Driving mode: low temperature and short responses.</a:t>
+              <a:t>On-device: safety gate, intent pre-classification, redaction, fallback intents.</a:t>
             </a:r>
           </a:p>
           <a:p>
             <a:pPr>
               <a:spcAft>
-                <a:spcPts val="800"/>
+                <a:spcPts val="500"/>
               </a:spcAft>
-              <a:defRPr sz="2100">
+              <a:defRPr sz="1600">
                 <a:solidFill>
                   <a:srgbClr val="1F2937"/>
                 </a:solidFill>
@@ -9655,7 +13026,39 @@
               </a:defRPr>
             </a:pPr>
             <a:r>
-              <a:t>Fine-tuning deferred until quality telemetry validates need.</a:t>
+              <a:t>Cloud: orchestration, private LLM endpoint, RAG retrieval grounding.</a:t>
+            </a:r>
+          </a:p>
+          <a:p>
+            <a:pPr>
+              <a:spcAft>
+                <a:spcPts val="500"/>
+              </a:spcAft>
+              <a:defRPr sz="1600">
+                <a:solidFill>
+                  <a:srgbClr val="1F2937"/>
+                </a:solidFill>
+                <a:latin typeface="Calibri"/>
+              </a:defRPr>
+            </a:pPr>
+            <a:r>
+              <a:t>Policy checks before and after model inference.</a:t>
+            </a:r>
+          </a:p>
+          <a:p>
+            <a:pPr>
+              <a:spcAft>
+                <a:spcPts val="500"/>
+              </a:spcAft>
+              <a:defRPr sz="1600">
+                <a:solidFill>
+                  <a:srgbClr val="1F2937"/>
+                </a:solidFill>
+                <a:latin typeface="Calibri"/>
+              </a:defRPr>
+            </a:pPr>
+            <a:r>
+              <a:t>Graceful degradation during network interruptions.</a:t>
             </a:r>
           </a:p>
         </p:txBody>
@@ -9668,8 +13071,8 @@
         </p:nvSpPr>
         <p:spPr>
           <a:xfrm>
-            <a:off x="822960" y="5349240"/>
-            <a:ext cx="10698480" cy="502920"/>
+            <a:off x="822960" y="5358384"/>
+            <a:ext cx="10698480" cy="512064"/>
           </a:xfrm>
           <a:prstGeom prst="roundRect">
             <a:avLst/>
@@ -9700,7 +13103,7 @@
           <a:lstStyle/>
           <a:p>
             <a:pPr algn="ctr">
-              <a:defRPr sz="1300" b="1">
+              <a:defRPr sz="1250" b="1">
                 <a:solidFill>
                   <a:srgbClr val="064E3B"/>
                 </a:solidFill>
@@ -9708,7 +13111,7 @@
               </a:defRPr>
             </a:pPr>
             <a:r>
-              <a:t>Key Takeaway: Use conservative defaults while driving.</a:t>
+              <a:t>Key Takeaway: Edge handles resilience and safety; cloud provides rich intelligence.</a:t>
             </a:r>
           </a:p>
         </p:txBody>
